--- a/week4_unixIV/week4.pptx
+++ b/week4_unixIV/week4.pptx
@@ -5,30 +5,28 @@
     <p:sldMasterId id="2147483648" r:id="rId1"/>
   </p:sldMasterIdLst>
   <p:notesMasterIdLst>
-    <p:notesMasterId r:id="rId23"/>
+    <p:notesMasterId r:id="rId21"/>
   </p:notesMasterIdLst>
   <p:sldIdLst>
     <p:sldId id="256" r:id="rId2"/>
     <p:sldId id="279" r:id="rId3"/>
     <p:sldId id="300" r:id="rId4"/>
-    <p:sldId id="261" r:id="rId5"/>
-    <p:sldId id="301" r:id="rId6"/>
-    <p:sldId id="260" r:id="rId7"/>
-    <p:sldId id="268" r:id="rId8"/>
-    <p:sldId id="269" r:id="rId9"/>
-    <p:sldId id="270" r:id="rId10"/>
-    <p:sldId id="304" r:id="rId11"/>
-    <p:sldId id="280" r:id="rId12"/>
-    <p:sldId id="281" r:id="rId13"/>
-    <p:sldId id="284" r:id="rId14"/>
-    <p:sldId id="305" r:id="rId15"/>
-    <p:sldId id="306" r:id="rId16"/>
-    <p:sldId id="257" r:id="rId17"/>
-    <p:sldId id="298" r:id="rId18"/>
-    <p:sldId id="299" r:id="rId19"/>
-    <p:sldId id="294" r:id="rId20"/>
-    <p:sldId id="297" r:id="rId21"/>
-    <p:sldId id="286" r:id="rId22"/>
+    <p:sldId id="307" r:id="rId5"/>
+    <p:sldId id="261" r:id="rId6"/>
+    <p:sldId id="301" r:id="rId7"/>
+    <p:sldId id="260" r:id="rId8"/>
+    <p:sldId id="268" r:id="rId9"/>
+    <p:sldId id="269" r:id="rId10"/>
+    <p:sldId id="270" r:id="rId11"/>
+    <p:sldId id="304" r:id="rId12"/>
+    <p:sldId id="280" r:id="rId13"/>
+    <p:sldId id="281" r:id="rId14"/>
+    <p:sldId id="284" r:id="rId15"/>
+    <p:sldId id="305" r:id="rId16"/>
+    <p:sldId id="306" r:id="rId17"/>
+    <p:sldId id="257" r:id="rId18"/>
+    <p:sldId id="298" r:id="rId19"/>
+    <p:sldId id="286" r:id="rId20"/>
   </p:sldIdLst>
   <p:sldSz cx="12192000" cy="6858000"/>
   <p:notesSz cx="6858000" cy="9144000"/>
@@ -217,7 +215,7 @@
           <a:p>
             <a:fld id="{56D77398-3147-2349-91B4-8DD464C64BCA}" type="datetimeFigureOut">
               <a:rPr lang="en-US" smtClean="0"/>
-              <a:t>9/15/24</a:t>
+              <a:t>9/16/25</a:t>
             </a:fld>
             <a:endParaRPr lang="en-US"/>
           </a:p>
@@ -801,7 +799,7 @@
           <a:p>
             <a:fld id="{FBC3CC19-939B-124D-AEB5-0A0C0D7EEB85}" type="slidenum">
               <a:rPr lang="en-US" smtClean="0"/>
-              <a:t>6</a:t>
+              <a:t>7</a:t>
             </a:fld>
             <a:endParaRPr lang="en-US"/>
           </a:p>
@@ -885,7 +883,7 @@
           <a:p>
             <a:fld id="{365ADD6A-EC06-D14C-8D1D-18FC36280765}" type="slidenum">
               <a:rPr lang="en-US" smtClean="0"/>
-              <a:t>9</a:t>
+              <a:t>10</a:t>
             </a:fld>
             <a:endParaRPr lang="en-US"/>
           </a:p>
@@ -969,7 +967,7 @@
           <a:p>
             <a:fld id="{365ADD6A-EC06-D14C-8D1D-18FC36280765}" type="slidenum">
               <a:rPr lang="en-US" smtClean="0"/>
-              <a:t>10</a:t>
+              <a:t>11</a:t>
             </a:fld>
             <a:endParaRPr lang="en-US"/>
           </a:p>
@@ -1135,7 +1133,7 @@
           <a:p>
             <a:fld id="{CDDF0107-2D27-914A-9F22-DFB09E04F050}" type="datetimeFigureOut">
               <a:rPr lang="en-US" smtClean="0"/>
-              <a:t>9/15/24</a:t>
+              <a:t>9/16/25</a:t>
             </a:fld>
             <a:endParaRPr lang="en-US"/>
           </a:p>
@@ -1333,7 +1331,7 @@
           <a:p>
             <a:fld id="{CDDF0107-2D27-914A-9F22-DFB09E04F050}" type="datetimeFigureOut">
               <a:rPr lang="en-US" smtClean="0"/>
-              <a:t>9/15/24</a:t>
+              <a:t>9/16/25</a:t>
             </a:fld>
             <a:endParaRPr lang="en-US"/>
           </a:p>
@@ -1541,7 +1539,7 @@
           <a:p>
             <a:fld id="{CDDF0107-2D27-914A-9F22-DFB09E04F050}" type="datetimeFigureOut">
               <a:rPr lang="en-US" smtClean="0"/>
-              <a:t>9/15/24</a:t>
+              <a:t>9/16/25</a:t>
             </a:fld>
             <a:endParaRPr lang="en-US"/>
           </a:p>
@@ -1739,7 +1737,7 @@
           <a:p>
             <a:fld id="{CDDF0107-2D27-914A-9F22-DFB09E04F050}" type="datetimeFigureOut">
               <a:rPr lang="en-US" smtClean="0"/>
-              <a:t>9/15/24</a:t>
+              <a:t>9/16/25</a:t>
             </a:fld>
             <a:endParaRPr lang="en-US"/>
           </a:p>
@@ -2014,7 +2012,7 @@
           <a:p>
             <a:fld id="{CDDF0107-2D27-914A-9F22-DFB09E04F050}" type="datetimeFigureOut">
               <a:rPr lang="en-US" smtClean="0"/>
-              <a:t>9/15/24</a:t>
+              <a:t>9/16/25</a:t>
             </a:fld>
             <a:endParaRPr lang="en-US"/>
           </a:p>
@@ -2279,7 +2277,7 @@
           <a:p>
             <a:fld id="{CDDF0107-2D27-914A-9F22-DFB09E04F050}" type="datetimeFigureOut">
               <a:rPr lang="en-US" smtClean="0"/>
-              <a:t>9/15/24</a:t>
+              <a:t>9/16/25</a:t>
             </a:fld>
             <a:endParaRPr lang="en-US"/>
           </a:p>
@@ -2691,7 +2689,7 @@
           <a:p>
             <a:fld id="{CDDF0107-2D27-914A-9F22-DFB09E04F050}" type="datetimeFigureOut">
               <a:rPr lang="en-US" smtClean="0"/>
-              <a:t>9/15/24</a:t>
+              <a:t>9/16/25</a:t>
             </a:fld>
             <a:endParaRPr lang="en-US"/>
           </a:p>
@@ -2832,7 +2830,7 @@
           <a:p>
             <a:fld id="{CDDF0107-2D27-914A-9F22-DFB09E04F050}" type="datetimeFigureOut">
               <a:rPr lang="en-US" smtClean="0"/>
-              <a:t>9/15/24</a:t>
+              <a:t>9/16/25</a:t>
             </a:fld>
             <a:endParaRPr lang="en-US"/>
           </a:p>
@@ -2945,7 +2943,7 @@
           <a:p>
             <a:fld id="{CDDF0107-2D27-914A-9F22-DFB09E04F050}" type="datetimeFigureOut">
               <a:rPr lang="en-US" smtClean="0"/>
-              <a:t>9/15/24</a:t>
+              <a:t>9/16/25</a:t>
             </a:fld>
             <a:endParaRPr lang="en-US"/>
           </a:p>
@@ -3256,7 +3254,7 @@
           <a:p>
             <a:fld id="{CDDF0107-2D27-914A-9F22-DFB09E04F050}" type="datetimeFigureOut">
               <a:rPr lang="en-US" smtClean="0"/>
-              <a:t>9/15/24</a:t>
+              <a:t>9/16/25</a:t>
             </a:fld>
             <a:endParaRPr lang="en-US"/>
           </a:p>
@@ -3544,7 +3542,7 @@
           <a:p>
             <a:fld id="{CDDF0107-2D27-914A-9F22-DFB09E04F050}" type="datetimeFigureOut">
               <a:rPr lang="en-US" smtClean="0"/>
-              <a:t>9/15/24</a:t>
+              <a:t>9/16/25</a:t>
             </a:fld>
             <a:endParaRPr lang="en-US"/>
           </a:p>
@@ -3785,7 +3783,7 @@
           <a:p>
             <a:fld id="{CDDF0107-2D27-914A-9F22-DFB09E04F050}" type="datetimeFigureOut">
               <a:rPr lang="en-US" smtClean="0"/>
-              <a:t>9/15/24</a:t>
+              <a:t>9/16/25</a:t>
             </a:fld>
             <a:endParaRPr lang="en-US"/>
           </a:p>
@@ -4217,7 +4215,7 @@
         <p:spPr>
           <a:xfrm>
             <a:off x="1945453" y="1182231"/>
-            <a:ext cx="7675499" cy="4493538"/>
+            <a:ext cx="7141699" cy="4093428"/>
           </a:xfrm>
           <a:prstGeom prst="rect">
             <a:avLst/>
@@ -4361,63 +4359,13 @@
               <a:rPr lang="en-US" sz="2600" dirty="0">
                 <a:latin typeface="Helvetica Light" panose="020B0403020202020204" pitchFamily="34" charset="0"/>
               </a:rPr>
-              <a:t>More on shell scripts</a:t>
+              <a:t>More on shell scripts: arguments and loops</a:t>
             </a:r>
           </a:p>
           <a:p>
             <a:endParaRPr lang="en-US" sz="2600" dirty="0">
               <a:latin typeface="Helvetica Light" panose="020B0403020202020204" pitchFamily="34" charset="0"/>
             </a:endParaRPr>
-          </a:p>
-          <a:p>
-            <a:r>
-              <a:rPr lang="en-US" sz="2600" b="1" dirty="0">
-                <a:latin typeface="Helvetica Light" panose="020B0403020202020204" pitchFamily="34" charset="0"/>
-              </a:rPr>
-              <a:t>V. </a:t>
-            </a:r>
-            <a:r>
-              <a:rPr lang="en-US" sz="2600" dirty="0">
-                <a:latin typeface="Helvetica Light" panose="020B0403020202020204" pitchFamily="34" charset="0"/>
-              </a:rPr>
-              <a:t>Installing packages (</a:t>
-            </a:r>
-            <a:r>
-              <a:rPr lang="en-US" sz="2600" b="1" dirty="0">
-                <a:latin typeface="Helvetica Light" panose="020B0403020202020204" pitchFamily="34" charset="0"/>
-              </a:rPr>
-              <a:t>homebrew</a:t>
-            </a:r>
-            <a:r>
-              <a:rPr lang="en-US" sz="2600" dirty="0">
-                <a:latin typeface="Helvetica Light" panose="020B0403020202020204" pitchFamily="34" charset="0"/>
-              </a:rPr>
-              <a:t>, </a:t>
-            </a:r>
-            <a:r>
-              <a:rPr lang="en-US" sz="2600" b="1" dirty="0">
-                <a:latin typeface="Helvetica Light" panose="020B0403020202020204" pitchFamily="34" charset="0"/>
-              </a:rPr>
-              <a:t>apt-get</a:t>
-            </a:r>
-            <a:r>
-              <a:rPr lang="en-US" sz="2600" dirty="0">
-                <a:latin typeface="Helvetica Light" panose="020B0403020202020204" pitchFamily="34" charset="0"/>
-              </a:rPr>
-              <a:t>, </a:t>
-            </a:r>
-            <a:r>
-              <a:rPr lang="en-US" sz="2600" b="1" dirty="0">
-                <a:latin typeface="Helvetica Light" panose="020B0403020202020204" pitchFamily="34" charset="0"/>
-              </a:rPr>
-              <a:t>yum</a:t>
-            </a:r>
-            <a:r>
-              <a:rPr lang="en-US" sz="2600" dirty="0">
-                <a:latin typeface="Helvetica Light" panose="020B0403020202020204" pitchFamily="34" charset="0"/>
-              </a:rPr>
-              <a:t>) </a:t>
-            </a:r>
           </a:p>
           <a:p>
             <a:pPr marL="285750" indent="-285750">
@@ -4445,7 +4393,7 @@
         <p:spPr>
           <a:xfrm>
             <a:off x="2625929" y="343552"/>
-            <a:ext cx="6314549" cy="553998"/>
+            <a:ext cx="6463629" cy="553998"/>
           </a:xfrm>
           <a:prstGeom prst="rect">
             <a:avLst/>
@@ -4462,7 +4410,7 @@
               <a:rPr lang="en-US" sz="3000" dirty="0">
                 <a:latin typeface="Helvetica Light" panose="020B0403020202020204" pitchFamily="34" charset="0"/>
               </a:rPr>
-              <a:t>Week 4: some more advanced Unix</a:t>
+              <a:t>Week 4: some more advanced Linux</a:t>
             </a:r>
           </a:p>
         </p:txBody>
@@ -4587,7 +4535,7 @@
         <p:spPr>
           <a:xfrm>
             <a:off x="5783204" y="6187472"/>
-            <a:ext cx="6067687" cy="461665"/>
+            <a:ext cx="6187912" cy="461665"/>
           </a:xfrm>
           <a:prstGeom prst="rect">
             <a:avLst/>
@@ -4614,7 +4562,7 @@
                 </a:ln>
                 <a:latin typeface="Helvetica Light" panose="020B0403020202020204" pitchFamily="34" charset="0"/>
               </a:rPr>
-              <a:t>UnixIV_primer.md</a:t>
+              <a:t>LinuxIV_primer.md</a:t>
             </a:r>
             <a:r>
               <a:rPr lang="en-US" sz="2400" dirty="0">
@@ -4668,8 +4616,8 @@
         </p:nvSpPr>
         <p:spPr>
           <a:xfrm>
-            <a:off x="969552" y="373331"/>
-            <a:ext cx="3581430" cy="523220"/>
+            <a:off x="1089328" y="633417"/>
+            <a:ext cx="8337539" cy="584775"/>
           </a:xfrm>
           <a:prstGeom prst="rect">
             <a:avLst/>
@@ -4682,40 +4630,43 @@
           <a:lstStyle/>
           <a:p>
             <a:r>
-              <a:rPr lang="en-US" sz="2800" dirty="0">
-                <a:latin typeface="Helvetica Light" panose="020B0403020202020204" pitchFamily="34" charset="0"/>
-              </a:rPr>
-              <a:t>Example uses of </a:t>
-            </a:r>
-            <a:r>
-              <a:rPr lang="en-US" sz="2800" b="1" dirty="0" err="1">
+              <a:rPr lang="en-US" sz="3200" b="1" dirty="0" err="1">
                 <a:latin typeface="Helvetica Light" panose="020B0403020202020204" pitchFamily="34" charset="0"/>
               </a:rPr>
               <a:t>awk</a:t>
             </a:r>
-            <a:endParaRPr lang="en-US" sz="2800" b="1" dirty="0">
-              <a:latin typeface="Helvetica Light" panose="020B0403020202020204" pitchFamily="34" charset="0"/>
-            </a:endParaRPr>
-          </a:p>
-        </p:txBody>
-      </p:sp>
-      <p:sp>
-        <p:nvSpPr>
-          <p:cNvPr id="4" name="Rectangle 3"/>
+            <a:r>
+              <a:rPr lang="en-US" sz="3200" dirty="0">
+                <a:latin typeface="Helvetica Light" panose="020B0403020202020204" pitchFamily="34" charset="0"/>
+              </a:rPr>
+              <a:t>: versatile text extraction and processing</a:t>
+            </a:r>
+          </a:p>
+        </p:txBody>
+      </p:sp>
+      <p:sp>
+        <p:nvSpPr>
+          <p:cNvPr id="9" name="Rectangle 8">
+            <a:extLst>
+              <a:ext uri="{FF2B5EF4-FFF2-40B4-BE49-F238E27FC236}">
+                <a16:creationId xmlns:a16="http://schemas.microsoft.com/office/drawing/2014/main" id="{FC71CB22-96A2-CC49-B031-13E5BB1F412B}"/>
+              </a:ext>
+            </a:extLst>
+          </p:cNvPr>
           <p:cNvSpPr/>
           <p:nvPr/>
         </p:nvSpPr>
         <p:spPr>
           <a:xfrm>
-            <a:off x="969552" y="2722520"/>
-            <a:ext cx="5008102" cy="461665"/>
+            <a:off x="878319" y="2439837"/>
+            <a:ext cx="5782352" cy="3046988"/>
           </a:xfrm>
           <a:prstGeom prst="rect">
             <a:avLst/>
           </a:prstGeom>
         </p:spPr>
         <p:txBody>
-          <a:bodyPr wrap="none">
+          <a:bodyPr wrap="square">
             <a:spAutoFit/>
           </a:bodyPr>
           <a:lstStyle/>
@@ -4724,26 +4675,91 @@
               <a:rPr lang="en-US" sz="2400" b="1" dirty="0">
                 <a:latin typeface="Helvetica Light" panose="020B0403020202020204" pitchFamily="34" charset="0"/>
               </a:rPr>
-              <a:t>$ </a:t>
-            </a:r>
-            <a:r>
-              <a:rPr lang="en-US" sz="2400" b="1" dirty="0" err="1">
-                <a:latin typeface="Helvetica Light" panose="020B0403020202020204" pitchFamily="34" charset="0"/>
-              </a:rPr>
-              <a:t>awk</a:t>
-            </a:r>
+              <a:t>$0 </a:t>
+            </a:r>
+            <a:r>
+              <a:rPr lang="en-US" sz="2400" dirty="0">
+                <a:latin typeface="Helvetica Light" panose="020B0403020202020204" pitchFamily="34" charset="0"/>
+              </a:rPr>
+              <a:t>for the whole line.</a:t>
+            </a:r>
+          </a:p>
+          <a:p>
             <a:r>
               <a:rPr lang="en-US" sz="2400" b="1" dirty="0">
                 <a:latin typeface="Helvetica Light" panose="020B0403020202020204" pitchFamily="34" charset="0"/>
               </a:rPr>
-              <a:t> {'print $2'} </a:t>
-            </a:r>
-            <a:r>
-              <a:rPr lang="en-US" sz="2400" b="1" dirty="0" err="1">
-                <a:latin typeface="Helvetica Light" panose="020B0403020202020204" pitchFamily="34" charset="0"/>
-              </a:rPr>
-              <a:t>yeast_genome.gff</a:t>
-            </a:r>
+              <a:t>$1 </a:t>
+            </a:r>
+            <a:r>
+              <a:rPr lang="en-US" sz="2400" dirty="0">
+                <a:latin typeface="Helvetica Light" panose="020B0403020202020204" pitchFamily="34" charset="0"/>
+              </a:rPr>
+              <a:t>for the first field.</a:t>
+            </a:r>
+          </a:p>
+          <a:p>
+            <a:r>
+              <a:rPr lang="en-US" sz="2400" b="1" dirty="0">
+                <a:latin typeface="Helvetica Light" panose="020B0403020202020204" pitchFamily="34" charset="0"/>
+              </a:rPr>
+              <a:t>$2 </a:t>
+            </a:r>
+            <a:r>
+              <a:rPr lang="en-US" sz="2400" dirty="0">
+                <a:latin typeface="Helvetica Light" panose="020B0403020202020204" pitchFamily="34" charset="0"/>
+              </a:rPr>
+              <a:t>for the second field.</a:t>
+            </a:r>
+          </a:p>
+          <a:p>
+            <a:r>
+              <a:rPr lang="en-US" sz="2400" b="1" dirty="0">
+                <a:latin typeface="Helvetica Light" panose="020B0403020202020204" pitchFamily="34" charset="0"/>
+              </a:rPr>
+              <a:t>$n </a:t>
+            </a:r>
+            <a:r>
+              <a:rPr lang="en-US" sz="2400" dirty="0">
+                <a:latin typeface="Helvetica Light" panose="020B0403020202020204" pitchFamily="34" charset="0"/>
+              </a:rPr>
+              <a:t>for the nth field.</a:t>
+            </a:r>
+          </a:p>
+          <a:p>
+            <a:endParaRPr lang="en-US" sz="2400" dirty="0">
+              <a:latin typeface="Helvetica Light" panose="020B0403020202020204" pitchFamily="34" charset="0"/>
+            </a:endParaRPr>
+          </a:p>
+          <a:p>
+            <a:r>
+              <a:rPr lang="en-US" sz="2400" dirty="0">
+                <a:latin typeface="Helvetica Light" panose="020B0403020202020204" pitchFamily="34" charset="0"/>
+              </a:rPr>
+              <a:t>-</a:t>
+            </a:r>
+            <a:r>
+              <a:rPr lang="en-US" sz="2400" b="1" dirty="0">
+                <a:latin typeface="Helvetica Light" panose="020B0403020202020204" pitchFamily="34" charset="0"/>
+              </a:rPr>
+              <a:t>F</a:t>
+            </a:r>
+            <a:r>
+              <a:rPr lang="en-US" sz="2400" dirty="0">
+                <a:latin typeface="Helvetica Light" panose="020B0403020202020204" pitchFamily="34" charset="0"/>
+              </a:rPr>
+              <a:t> option sets field delimiter, </a:t>
+            </a:r>
+          </a:p>
+          <a:p>
+            <a:r>
+              <a:rPr lang="en-US" sz="2400" b="1" dirty="0">
+                <a:latin typeface="Helvetica Light" panose="020B0403020202020204" pitchFamily="34" charset="0"/>
+              </a:rPr>
+              <a:t>e.g., -F ‘,’</a:t>
+            </a:r>
+          </a:p>
+          <a:p>
             <a:endParaRPr lang="en-US" sz="2400" b="1" dirty="0">
               <a:latin typeface="Helvetica Light" panose="020B0403020202020204" pitchFamily="34" charset="0"/>
             </a:endParaRPr>
@@ -4752,128 +4768,20 @@
       </p:sp>
       <p:sp>
         <p:nvSpPr>
-          <p:cNvPr id="5" name="Rectangle 4"/>
-          <p:cNvSpPr/>
-          <p:nvPr/>
-        </p:nvSpPr>
-        <p:spPr>
-          <a:xfrm>
-            <a:off x="956330" y="1462717"/>
-            <a:ext cx="4580100" cy="461665"/>
-          </a:xfrm>
-          <a:prstGeom prst="rect">
-            <a:avLst/>
-          </a:prstGeom>
-        </p:spPr>
-        <p:txBody>
-          <a:bodyPr wrap="none">
-            <a:spAutoFit/>
-          </a:bodyPr>
-          <a:lstStyle/>
-          <a:p>
-            <a:r>
-              <a:rPr lang="en-US" sz="2400" b="1" dirty="0">
-                <a:latin typeface="Helvetica Light" panose="020B0403020202020204" pitchFamily="34" charset="0"/>
-              </a:rPr>
-              <a:t>$ </a:t>
-            </a:r>
-            <a:r>
-              <a:rPr lang="en-US" sz="2400" b="1" dirty="0" err="1">
-                <a:latin typeface="Helvetica Light" panose="020B0403020202020204" pitchFamily="34" charset="0"/>
-              </a:rPr>
-              <a:t>awk</a:t>
-            </a:r>
-            <a:r>
-              <a:rPr lang="en-US" sz="2400" b="1" dirty="0">
-                <a:latin typeface="Helvetica Light" panose="020B0403020202020204" pitchFamily="34" charset="0"/>
-              </a:rPr>
-              <a:t> {'print'} </a:t>
-            </a:r>
-            <a:r>
-              <a:rPr lang="en-US" sz="2400" b="1" dirty="0" err="1">
-                <a:latin typeface="Helvetica Light" panose="020B0403020202020204" pitchFamily="34" charset="0"/>
-              </a:rPr>
-              <a:t>yeast_genome.gff</a:t>
-            </a:r>
-            <a:endParaRPr lang="en-US" sz="2400" b="1" dirty="0">
-              <a:latin typeface="Helvetica Light" panose="020B0403020202020204" pitchFamily="34" charset="0"/>
-            </a:endParaRPr>
-          </a:p>
-        </p:txBody>
-      </p:sp>
-      <p:sp>
-        <p:nvSpPr>
-          <p:cNvPr id="6" name="Rectangle 5"/>
-          <p:cNvSpPr/>
-          <p:nvPr/>
-        </p:nvSpPr>
-        <p:spPr>
-          <a:xfrm>
-            <a:off x="956330" y="3923406"/>
-            <a:ext cx="6752169" cy="461665"/>
-          </a:xfrm>
-          <a:prstGeom prst="rect">
-            <a:avLst/>
-          </a:prstGeom>
-        </p:spPr>
-        <p:txBody>
-          <a:bodyPr wrap="none">
-            <a:spAutoFit/>
-          </a:bodyPr>
-          <a:lstStyle/>
-          <a:p>
-            <a:r>
-              <a:rPr lang="en-US" sz="2400" b="1" dirty="0">
-                <a:latin typeface="Helvetica Light" panose="020B0403020202020204" pitchFamily="34" charset="0"/>
-              </a:rPr>
-              <a:t>$ </a:t>
-            </a:r>
-            <a:r>
-              <a:rPr lang="en-US" sz="2400" b="1" dirty="0" err="1">
-                <a:latin typeface="Helvetica Light" panose="020B0403020202020204" pitchFamily="34" charset="0"/>
-              </a:rPr>
-              <a:t>awk</a:t>
-            </a:r>
-            <a:r>
-              <a:rPr lang="en-US" sz="2400" b="1" dirty="0">
-                <a:latin typeface="Helvetica Light" panose="020B0403020202020204" pitchFamily="34" charset="0"/>
-              </a:rPr>
-              <a:t> '/</a:t>
-            </a:r>
-            <a:r>
-              <a:rPr lang="en-US" sz="2400" b="1" dirty="0" err="1">
-                <a:latin typeface="Helvetica Light" panose="020B0403020202020204" pitchFamily="34" charset="0"/>
-              </a:rPr>
-              <a:t>repeat_region</a:t>
-            </a:r>
-            <a:r>
-              <a:rPr lang="en-US" sz="2400" b="1" dirty="0">
-                <a:latin typeface="Helvetica Light" panose="020B0403020202020204" pitchFamily="34" charset="0"/>
-              </a:rPr>
-              <a:t>/ {print}' </a:t>
-            </a:r>
-            <a:r>
-              <a:rPr lang="en-US" sz="2400" b="1" dirty="0" err="1">
-                <a:latin typeface="Helvetica Light" panose="020B0403020202020204" pitchFamily="34" charset="0"/>
-              </a:rPr>
-              <a:t>yeast_genome.gff</a:t>
-            </a:r>
-            <a:endParaRPr lang="en-US" sz="2400" b="1" dirty="0">
-              <a:latin typeface="Helvetica Light" panose="020B0403020202020204" pitchFamily="34" charset="0"/>
-            </a:endParaRPr>
-          </a:p>
-        </p:txBody>
-      </p:sp>
-      <p:sp>
-        <p:nvSpPr>
-          <p:cNvPr id="3" name="TextBox 2"/>
+          <p:cNvPr id="10" name="TextBox 9">
+            <a:extLst>
+              <a:ext uri="{FF2B5EF4-FFF2-40B4-BE49-F238E27FC236}">
+                <a16:creationId xmlns:a16="http://schemas.microsoft.com/office/drawing/2014/main" id="{643918A5-F35A-344D-A9C1-1526374F249D}"/>
+              </a:ext>
+            </a:extLst>
+          </p:cNvPr>
           <p:cNvSpPr txBox="1"/>
           <p:nvPr/>
         </p:nvSpPr>
         <p:spPr>
           <a:xfrm>
-            <a:off x="2585489" y="2063083"/>
-            <a:ext cx="5758308" cy="430887"/>
+            <a:off x="539281" y="1822918"/>
+            <a:ext cx="4717613" cy="461665"/>
           </a:xfrm>
           <a:prstGeom prst="rect">
             <a:avLst/>
@@ -4881,30 +4789,54 @@
           <a:noFill/>
         </p:spPr>
         <p:txBody>
-          <a:bodyPr wrap="none" rtlCol="0">
+          <a:bodyPr wrap="square" rtlCol="0">
             <a:spAutoFit/>
           </a:bodyPr>
           <a:lstStyle/>
           <a:p>
             <a:r>
-              <a:rPr lang="en-US" sz="2200" dirty="0">
-                <a:latin typeface="Helvetica Light" panose="020B0403020202020204" pitchFamily="34" charset="0"/>
-              </a:rPr>
-              <a:t># simplest use, prints the whole file contents</a:t>
-            </a:r>
-          </a:p>
-        </p:txBody>
-      </p:sp>
-      <p:sp>
-        <p:nvSpPr>
-          <p:cNvPr id="7" name="TextBox 6"/>
+              <a:rPr lang="en-US" sz="2400" b="1" dirty="0">
+                <a:latin typeface="Helvetica Light" panose="020B0403020202020204" pitchFamily="34" charset="0"/>
+              </a:rPr>
+              <a:t>A.</a:t>
+            </a:r>
+            <a:r>
+              <a:rPr lang="en-US" sz="2400" dirty="0">
+                <a:latin typeface="Helvetica Light" panose="020B0403020202020204" pitchFamily="34" charset="0"/>
+              </a:rPr>
+              <a:t> </a:t>
+            </a:r>
+            <a:r>
+              <a:rPr lang="en-US" sz="2400" b="1" dirty="0">
+                <a:latin typeface="Helvetica Light" panose="020B0403020202020204" pitchFamily="34" charset="0"/>
+              </a:rPr>
+              <a:t>{'print'} </a:t>
+            </a:r>
+            <a:r>
+              <a:rPr lang="en-US" sz="2400" dirty="0">
+                <a:latin typeface="Helvetica Light" panose="020B0403020202020204" pitchFamily="34" charset="0"/>
+              </a:rPr>
+              <a:t>extracts lines or fields</a:t>
+            </a:r>
+          </a:p>
+        </p:txBody>
+      </p:sp>
+      <p:sp>
+        <p:nvSpPr>
+          <p:cNvPr id="12" name="TextBox 11">
+            <a:extLst>
+              <a:ext uri="{FF2B5EF4-FFF2-40B4-BE49-F238E27FC236}">
+                <a16:creationId xmlns:a16="http://schemas.microsoft.com/office/drawing/2014/main" id="{02D9C896-63E0-2E4C-8971-F5DD3722150B}"/>
+              </a:ext>
+            </a:extLst>
+          </p:cNvPr>
           <p:cNvSpPr txBox="1"/>
           <p:nvPr/>
         </p:nvSpPr>
         <p:spPr>
           <a:xfrm>
-            <a:off x="2585489" y="3251409"/>
-            <a:ext cx="5759910" cy="430887"/>
+            <a:off x="5736128" y="1822918"/>
+            <a:ext cx="5782352" cy="461665"/>
           </a:xfrm>
           <a:prstGeom prst="rect">
             <a:avLst/>
@@ -4918,10 +4850,714 @@
           <a:lstStyle/>
           <a:p>
             <a:r>
+              <a:rPr lang="en-US" sz="2400" b="1" dirty="0">
+                <a:latin typeface="Helvetica Light" panose="020B0403020202020204" pitchFamily="34" charset="0"/>
+              </a:rPr>
+              <a:t>B.</a:t>
+            </a:r>
+            <a:r>
+              <a:rPr lang="en-US" sz="2400" dirty="0">
+                <a:latin typeface="Helvetica Light" panose="020B0403020202020204" pitchFamily="34" charset="0"/>
+              </a:rPr>
+              <a:t> Expression matching: enclosed with </a:t>
+            </a:r>
+            <a:r>
+              <a:rPr lang="en-US" sz="2400" b="1" dirty="0">
+                <a:latin typeface="Helvetica Light" panose="020B0403020202020204" pitchFamily="34" charset="0"/>
+              </a:rPr>
+              <a:t>//</a:t>
+            </a:r>
+          </a:p>
+        </p:txBody>
+      </p:sp>
+      <p:sp>
+        <p:nvSpPr>
+          <p:cNvPr id="13" name="Rectangle 12">
+            <a:extLst>
+              <a:ext uri="{FF2B5EF4-FFF2-40B4-BE49-F238E27FC236}">
+                <a16:creationId xmlns:a16="http://schemas.microsoft.com/office/drawing/2014/main" id="{47289BEB-FE4E-2340-A178-0A7356947CF4}"/>
+              </a:ext>
+            </a:extLst>
+          </p:cNvPr>
+          <p:cNvSpPr/>
+          <p:nvPr/>
+        </p:nvSpPr>
+        <p:spPr>
+          <a:xfrm>
+            <a:off x="6096000" y="2347634"/>
+            <a:ext cx="3018430" cy="461665"/>
+          </a:xfrm>
+          <a:prstGeom prst="rect">
+            <a:avLst/>
+          </a:prstGeom>
+        </p:spPr>
+        <p:txBody>
+          <a:bodyPr wrap="square">
+            <a:spAutoFit/>
+          </a:bodyPr>
+          <a:lstStyle/>
+          <a:p>
+            <a:r>
+              <a:rPr lang="en-US" sz="2400" b="1" dirty="0">
+                <a:latin typeface="Helvetica Light" panose="020B0403020202020204" pitchFamily="34" charset="0"/>
+              </a:rPr>
+              <a:t>/ATG/ </a:t>
+            </a:r>
+          </a:p>
+        </p:txBody>
+      </p:sp>
+      <p:sp>
+        <p:nvSpPr>
+          <p:cNvPr id="14" name="TextBox 13">
+            <a:extLst>
+              <a:ext uri="{FF2B5EF4-FFF2-40B4-BE49-F238E27FC236}">
+                <a16:creationId xmlns:a16="http://schemas.microsoft.com/office/drawing/2014/main" id="{036B978B-F6B6-9446-9C1E-9215ADAAF259}"/>
+              </a:ext>
+            </a:extLst>
+          </p:cNvPr>
+          <p:cNvSpPr txBox="1"/>
+          <p:nvPr/>
+        </p:nvSpPr>
+        <p:spPr>
+          <a:xfrm>
+            <a:off x="5736128" y="3874195"/>
+            <a:ext cx="4770858" cy="1200329"/>
+          </a:xfrm>
+          <a:prstGeom prst="rect">
+            <a:avLst/>
+          </a:prstGeom>
+          <a:noFill/>
+        </p:spPr>
+        <p:txBody>
+          <a:bodyPr wrap="none" rtlCol="0">
+            <a:spAutoFit/>
+          </a:bodyPr>
+          <a:lstStyle/>
+          <a:p>
+            <a:r>
+              <a:rPr lang="en-US" sz="2400" b="1" dirty="0">
+                <a:latin typeface="Helvetica Light" panose="020B0403020202020204" pitchFamily="34" charset="0"/>
+              </a:rPr>
+              <a:t>C</a:t>
+            </a:r>
+            <a:r>
+              <a:rPr lang="en-US" sz="2400" dirty="0">
+                <a:latin typeface="Helvetica Light" panose="020B0403020202020204" pitchFamily="34" charset="0"/>
+              </a:rPr>
+              <a:t>. Conditionals:</a:t>
+            </a:r>
+          </a:p>
+          <a:p>
+            <a:endParaRPr lang="en-US" sz="2400" dirty="0">
+              <a:latin typeface="Helvetica Light" panose="020B0403020202020204" pitchFamily="34" charset="0"/>
+            </a:endParaRPr>
+          </a:p>
+          <a:p>
+            <a:r>
+              <a:rPr lang="en-US" sz="2400" b="1" dirty="0" err="1">
+                <a:latin typeface="Helvetica Light" panose="020B0403020202020204" pitchFamily="34" charset="0"/>
+              </a:rPr>
+              <a:t>awk</a:t>
+            </a:r>
+            <a:r>
+              <a:rPr lang="en-US" sz="2400" b="1" dirty="0">
+                <a:latin typeface="Helvetica Light" panose="020B0403020202020204" pitchFamily="34" charset="0"/>
+              </a:rPr>
+              <a:t> {'if ($5 - $4 &gt; 400) print $1'}, </a:t>
+            </a:r>
+          </a:p>
+        </p:txBody>
+      </p:sp>
+      <p:sp>
+        <p:nvSpPr>
+          <p:cNvPr id="16" name="Rectangle 15">
+            <a:extLst>
+              <a:ext uri="{FF2B5EF4-FFF2-40B4-BE49-F238E27FC236}">
+                <a16:creationId xmlns:a16="http://schemas.microsoft.com/office/drawing/2014/main" id="{059C33CD-DBF3-EA48-AA75-58C92D907141}"/>
+              </a:ext>
+            </a:extLst>
+          </p:cNvPr>
+          <p:cNvSpPr/>
+          <p:nvPr/>
+        </p:nvSpPr>
+        <p:spPr>
+          <a:xfrm>
+            <a:off x="5927426" y="2918953"/>
+            <a:ext cx="4017446" cy="461665"/>
+          </a:xfrm>
+          <a:prstGeom prst="rect">
+            <a:avLst/>
+          </a:prstGeom>
+        </p:spPr>
+        <p:txBody>
+          <a:bodyPr wrap="none">
+            <a:spAutoFit/>
+          </a:bodyPr>
+          <a:lstStyle/>
+          <a:p>
+            <a:r>
+              <a:rPr lang="en-US" sz="2400" b="1" dirty="0">
+                <a:latin typeface="Helvetica Light" panose="020B0403020202020204" pitchFamily="34" charset="0"/>
+              </a:rPr>
+              <a:t>$ </a:t>
+            </a:r>
+            <a:r>
+              <a:rPr lang="en-US" sz="2400" b="1" dirty="0" err="1">
+                <a:latin typeface="Helvetica Light" panose="020B0403020202020204" pitchFamily="34" charset="0"/>
+              </a:rPr>
+              <a:t>awk</a:t>
+            </a:r>
+            <a:r>
+              <a:rPr lang="en-US" sz="2400" b="1" dirty="0">
+                <a:latin typeface="Helvetica Light" panose="020B0403020202020204" pitchFamily="34" charset="0"/>
+              </a:rPr>
+              <a:t> ‘/ATG/ {print}’ </a:t>
+            </a:r>
+            <a:r>
+              <a:rPr lang="en-US" sz="2400" b="1" dirty="0" err="1">
+                <a:latin typeface="Helvetica Light" panose="020B0403020202020204" pitchFamily="34" charset="0"/>
+              </a:rPr>
+              <a:t>fasta.fa</a:t>
+            </a:r>
+            <a:endParaRPr lang="en-US" sz="2400" dirty="0"/>
+          </a:p>
+        </p:txBody>
+      </p:sp>
+      <p:sp>
+        <p:nvSpPr>
+          <p:cNvPr id="3" name="Rectangle 2">
+            <a:extLst>
+              <a:ext uri="{FF2B5EF4-FFF2-40B4-BE49-F238E27FC236}">
+                <a16:creationId xmlns:a16="http://schemas.microsoft.com/office/drawing/2014/main" id="{D3FF30EF-0465-0543-AD3C-A3B58AA0D915}"/>
+              </a:ext>
+            </a:extLst>
+          </p:cNvPr>
+          <p:cNvSpPr/>
+          <p:nvPr/>
+        </p:nvSpPr>
+        <p:spPr>
+          <a:xfrm>
+            <a:off x="539281" y="5642079"/>
+            <a:ext cx="5216493" cy="461665"/>
+          </a:xfrm>
+          <a:prstGeom prst="rect">
+            <a:avLst/>
+          </a:prstGeom>
+        </p:spPr>
+        <p:txBody>
+          <a:bodyPr wrap="none">
+            <a:spAutoFit/>
+          </a:bodyPr>
+          <a:lstStyle/>
+          <a:p>
+            <a:r>
+              <a:rPr lang="en-US" sz="2400" b="1" dirty="0">
+                <a:latin typeface="Helvetica Light" panose="020B0403020202020204" pitchFamily="34" charset="0"/>
+              </a:rPr>
+              <a:t>$ </a:t>
+            </a:r>
+            <a:r>
+              <a:rPr lang="en-US" sz="2400" b="1" dirty="0" err="1">
+                <a:latin typeface="Helvetica Light" panose="020B0403020202020204" pitchFamily="34" charset="0"/>
+              </a:rPr>
+              <a:t>awk</a:t>
+            </a:r>
+            <a:r>
+              <a:rPr lang="en-US" sz="2400" b="1" dirty="0">
+                <a:latin typeface="Helvetica Light" panose="020B0403020202020204" pitchFamily="34" charset="0"/>
+              </a:rPr>
+              <a:t> {'print $2'} </a:t>
+            </a:r>
+            <a:r>
+              <a:rPr lang="en-US" sz="2400" b="1" dirty="0" err="1">
+                <a:latin typeface="Helvetica Light" panose="020B0403020202020204" pitchFamily="34" charset="0"/>
+              </a:rPr>
+              <a:t>yeast_genome.gff</a:t>
+            </a:r>
+            <a:endParaRPr lang="en-US" sz="2400" b="1" dirty="0">
+              <a:latin typeface="Helvetica Light" panose="020B0403020202020204" pitchFamily="34" charset="0"/>
+            </a:endParaRPr>
+          </a:p>
+        </p:txBody>
+      </p:sp>
+    </p:spTree>
+    <p:extLst>
+      <p:ext uri="{BB962C8B-B14F-4D97-AF65-F5344CB8AC3E}">
+        <p14:creationId xmlns:p14="http://schemas.microsoft.com/office/powerpoint/2010/main" val="3798764439"/>
+      </p:ext>
+    </p:extLst>
+  </p:cSld>
+  <p:clrMapOvr>
+    <a:masterClrMapping/>
+  </p:clrMapOvr>
+  <p:timing>
+    <p:tnLst>
+      <p:par>
+        <p:cTn id="1" dur="indefinite" restart="never" nodeType="tmRoot">
+          <p:childTnLst>
+            <p:seq concurrent="1" nextAc="seek">
+              <p:cTn id="2" dur="indefinite" nodeType="mainSeq">
+                <p:childTnLst>
+                  <p:par>
+                    <p:cTn id="3" fill="hold">
+                      <p:stCondLst>
+                        <p:cond delay="indefinite"/>
+                      </p:stCondLst>
+                      <p:childTnLst>
+                        <p:par>
+                          <p:cTn id="4" fill="hold">
+                            <p:stCondLst>
+                              <p:cond delay="0"/>
+                            </p:stCondLst>
+                            <p:childTnLst>
+                              <p:par>
+                                <p:cTn id="5" presetID="1" presetClass="entr" presetSubtype="0" fill="hold" grpId="0" nodeType="clickEffect">
+                                  <p:stCondLst>
+                                    <p:cond delay="0"/>
+                                  </p:stCondLst>
+                                  <p:childTnLst>
+                                    <p:set>
+                                      <p:cBhvr>
+                                        <p:cTn id="6" dur="1" fill="hold">
+                                          <p:stCondLst>
+                                            <p:cond delay="0"/>
+                                          </p:stCondLst>
+                                        </p:cTn>
+                                        <p:tgtEl>
+                                          <p:spTgt spid="12"/>
+                                        </p:tgtEl>
+                                        <p:attrNameLst>
+                                          <p:attrName>style.visibility</p:attrName>
+                                        </p:attrNameLst>
+                                      </p:cBhvr>
+                                      <p:to>
+                                        <p:strVal val="visible"/>
+                                      </p:to>
+                                    </p:set>
+                                  </p:childTnLst>
+                                </p:cTn>
+                              </p:par>
+                              <p:par>
+                                <p:cTn id="7" presetID="1" presetClass="entr" presetSubtype="0" fill="hold" grpId="0" nodeType="withEffect">
+                                  <p:stCondLst>
+                                    <p:cond delay="0"/>
+                                  </p:stCondLst>
+                                  <p:childTnLst>
+                                    <p:set>
+                                      <p:cBhvr>
+                                        <p:cTn id="8" dur="1" fill="hold">
+                                          <p:stCondLst>
+                                            <p:cond delay="0"/>
+                                          </p:stCondLst>
+                                        </p:cTn>
+                                        <p:tgtEl>
+                                          <p:spTgt spid="13"/>
+                                        </p:tgtEl>
+                                        <p:attrNameLst>
+                                          <p:attrName>style.visibility</p:attrName>
+                                        </p:attrNameLst>
+                                      </p:cBhvr>
+                                      <p:to>
+                                        <p:strVal val="visible"/>
+                                      </p:to>
+                                    </p:set>
+                                  </p:childTnLst>
+                                </p:cTn>
+                              </p:par>
+                              <p:par>
+                                <p:cTn id="9" presetID="1" presetClass="entr" presetSubtype="0" fill="hold" grpId="0" nodeType="withEffect">
+                                  <p:stCondLst>
+                                    <p:cond delay="0"/>
+                                  </p:stCondLst>
+                                  <p:childTnLst>
+                                    <p:set>
+                                      <p:cBhvr>
+                                        <p:cTn id="10" dur="1" fill="hold">
+                                          <p:stCondLst>
+                                            <p:cond delay="0"/>
+                                          </p:stCondLst>
+                                        </p:cTn>
+                                        <p:tgtEl>
+                                          <p:spTgt spid="16"/>
+                                        </p:tgtEl>
+                                        <p:attrNameLst>
+                                          <p:attrName>style.visibility</p:attrName>
+                                        </p:attrNameLst>
+                                      </p:cBhvr>
+                                      <p:to>
+                                        <p:strVal val="visible"/>
+                                      </p:to>
+                                    </p:set>
+                                  </p:childTnLst>
+                                </p:cTn>
+                              </p:par>
+                            </p:childTnLst>
+                          </p:cTn>
+                        </p:par>
+                      </p:childTnLst>
+                    </p:cTn>
+                  </p:par>
+                  <p:par>
+                    <p:cTn id="11" fill="hold">
+                      <p:stCondLst>
+                        <p:cond delay="indefinite"/>
+                      </p:stCondLst>
+                      <p:childTnLst>
+                        <p:par>
+                          <p:cTn id="12" fill="hold">
+                            <p:stCondLst>
+                              <p:cond delay="0"/>
+                            </p:stCondLst>
+                            <p:childTnLst>
+                              <p:par>
+                                <p:cTn id="13" presetID="1" presetClass="entr" presetSubtype="0" fill="hold" grpId="0" nodeType="clickEffect">
+                                  <p:stCondLst>
+                                    <p:cond delay="0"/>
+                                  </p:stCondLst>
+                                  <p:childTnLst>
+                                    <p:set>
+                                      <p:cBhvr>
+                                        <p:cTn id="14" dur="1" fill="hold">
+                                          <p:stCondLst>
+                                            <p:cond delay="0"/>
+                                          </p:stCondLst>
+                                        </p:cTn>
+                                        <p:tgtEl>
+                                          <p:spTgt spid="14"/>
+                                        </p:tgtEl>
+                                        <p:attrNameLst>
+                                          <p:attrName>style.visibility</p:attrName>
+                                        </p:attrNameLst>
+                                      </p:cBhvr>
+                                      <p:to>
+                                        <p:strVal val="visible"/>
+                                      </p:to>
+                                    </p:set>
+                                  </p:childTnLst>
+                                </p:cTn>
+                              </p:par>
+                            </p:childTnLst>
+                          </p:cTn>
+                        </p:par>
+                      </p:childTnLst>
+                    </p:cTn>
+                  </p:par>
+                </p:childTnLst>
+              </p:cTn>
+              <p:prevCondLst>
+                <p:cond evt="onPrev" delay="0">
+                  <p:tgtEl>
+                    <p:sldTgt/>
+                  </p:tgtEl>
+                </p:cond>
+              </p:prevCondLst>
+              <p:nextCondLst>
+                <p:cond evt="onNext" delay="0">
+                  <p:tgtEl>
+                    <p:sldTgt/>
+                  </p:tgtEl>
+                </p:cond>
+              </p:nextCondLst>
+            </p:seq>
+          </p:childTnLst>
+        </p:cTn>
+      </p:par>
+    </p:tnLst>
+    <p:bldLst>
+      <p:bldP spid="12" grpId="0"/>
+      <p:bldP spid="13" grpId="0"/>
+      <p:bldP spid="14" grpId="0"/>
+      <p:bldP spid="16" grpId="0"/>
+    </p:bldLst>
+  </p:timing>
+</p:sld>
+</file>
+
+<file path=ppt/slides/slide11.xml><?xml version="1.0" encoding="utf-8"?>
+<p:sld xmlns:a="http://schemas.openxmlformats.org/drawingml/2006/main" xmlns:r="http://schemas.openxmlformats.org/officeDocument/2006/relationships" xmlns:p="http://schemas.openxmlformats.org/presentationml/2006/main">
+  <p:cSld>
+    <p:spTree>
+      <p:nvGrpSpPr>
+        <p:cNvPr id="1" name=""/>
+        <p:cNvGrpSpPr/>
+        <p:nvPr/>
+      </p:nvGrpSpPr>
+      <p:grpSpPr>
+        <a:xfrm>
+          <a:off x="0" y="0"/>
+          <a:ext cx="0" cy="0"/>
+          <a:chOff x="0" y="0"/>
+          <a:chExt cx="0" cy="0"/>
+        </a:xfrm>
+      </p:grpSpPr>
+      <p:sp>
+        <p:nvSpPr>
+          <p:cNvPr id="2" name="Rectangle 1"/>
+          <p:cNvSpPr/>
+          <p:nvPr/>
+        </p:nvSpPr>
+        <p:spPr>
+          <a:xfrm>
+            <a:off x="969552" y="373331"/>
+            <a:ext cx="3581430" cy="523220"/>
+          </a:xfrm>
+          <a:prstGeom prst="rect">
+            <a:avLst/>
+          </a:prstGeom>
+        </p:spPr>
+        <p:txBody>
+          <a:bodyPr wrap="none">
+            <a:spAutoFit/>
+          </a:bodyPr>
+          <a:lstStyle/>
+          <a:p>
+            <a:r>
+              <a:rPr lang="en-US" sz="2800" dirty="0">
+                <a:latin typeface="Helvetica Light" panose="020B0403020202020204" pitchFamily="34" charset="0"/>
+              </a:rPr>
+              <a:t>Example uses of </a:t>
+            </a:r>
+            <a:r>
+              <a:rPr lang="en-US" sz="2800" b="1" dirty="0" err="1">
+                <a:latin typeface="Helvetica Light" panose="020B0403020202020204" pitchFamily="34" charset="0"/>
+              </a:rPr>
+              <a:t>awk</a:t>
+            </a:r>
+            <a:endParaRPr lang="en-US" sz="2800" b="1" dirty="0">
+              <a:latin typeface="Helvetica Light" panose="020B0403020202020204" pitchFamily="34" charset="0"/>
+            </a:endParaRPr>
+          </a:p>
+        </p:txBody>
+      </p:sp>
+      <p:sp>
+        <p:nvSpPr>
+          <p:cNvPr id="4" name="Rectangle 3"/>
+          <p:cNvSpPr/>
+          <p:nvPr/>
+        </p:nvSpPr>
+        <p:spPr>
+          <a:xfrm>
+            <a:off x="969552" y="2722520"/>
+            <a:ext cx="5008102" cy="461665"/>
+          </a:xfrm>
+          <a:prstGeom prst="rect">
+            <a:avLst/>
+          </a:prstGeom>
+        </p:spPr>
+        <p:txBody>
+          <a:bodyPr wrap="none">
+            <a:spAutoFit/>
+          </a:bodyPr>
+          <a:lstStyle/>
+          <a:p>
+            <a:r>
+              <a:rPr lang="en-US" sz="2400" b="1" dirty="0">
+                <a:latin typeface="Helvetica Light" panose="020B0403020202020204" pitchFamily="34" charset="0"/>
+              </a:rPr>
+              <a:t>$ </a:t>
+            </a:r>
+            <a:r>
+              <a:rPr lang="en-US" sz="2400" b="1" dirty="0" err="1">
+                <a:latin typeface="Helvetica Light" panose="020B0403020202020204" pitchFamily="34" charset="0"/>
+              </a:rPr>
+              <a:t>awk</a:t>
+            </a:r>
+            <a:r>
+              <a:rPr lang="en-US" sz="2400" b="1" dirty="0">
+                <a:latin typeface="Helvetica Light" panose="020B0403020202020204" pitchFamily="34" charset="0"/>
+              </a:rPr>
+              <a:t> {'print $2'} </a:t>
+            </a:r>
+            <a:r>
+              <a:rPr lang="en-US" sz="2400" b="1" dirty="0" err="1">
+                <a:latin typeface="Helvetica Light" panose="020B0403020202020204" pitchFamily="34" charset="0"/>
+              </a:rPr>
+              <a:t>yeast_genome.gff</a:t>
+            </a:r>
+            <a:endParaRPr lang="en-US" sz="2400" b="1" dirty="0">
+              <a:latin typeface="Helvetica Light" panose="020B0403020202020204" pitchFamily="34" charset="0"/>
+            </a:endParaRPr>
+          </a:p>
+        </p:txBody>
+      </p:sp>
+      <p:sp>
+        <p:nvSpPr>
+          <p:cNvPr id="5" name="Rectangle 4"/>
+          <p:cNvSpPr/>
+          <p:nvPr/>
+        </p:nvSpPr>
+        <p:spPr>
+          <a:xfrm>
+            <a:off x="956330" y="1462717"/>
+            <a:ext cx="4580100" cy="461665"/>
+          </a:xfrm>
+          <a:prstGeom prst="rect">
+            <a:avLst/>
+          </a:prstGeom>
+        </p:spPr>
+        <p:txBody>
+          <a:bodyPr wrap="none">
+            <a:spAutoFit/>
+          </a:bodyPr>
+          <a:lstStyle/>
+          <a:p>
+            <a:r>
+              <a:rPr lang="en-US" sz="2400" b="1" dirty="0">
+                <a:latin typeface="Helvetica Light" panose="020B0403020202020204" pitchFamily="34" charset="0"/>
+              </a:rPr>
+              <a:t>$ </a:t>
+            </a:r>
+            <a:r>
+              <a:rPr lang="en-US" sz="2400" b="1" dirty="0" err="1">
+                <a:latin typeface="Helvetica Light" panose="020B0403020202020204" pitchFamily="34" charset="0"/>
+              </a:rPr>
+              <a:t>awk</a:t>
+            </a:r>
+            <a:r>
+              <a:rPr lang="en-US" sz="2400" b="1" dirty="0">
+                <a:latin typeface="Helvetica Light" panose="020B0403020202020204" pitchFamily="34" charset="0"/>
+              </a:rPr>
+              <a:t> {'print'} </a:t>
+            </a:r>
+            <a:r>
+              <a:rPr lang="en-US" sz="2400" b="1" dirty="0" err="1">
+                <a:latin typeface="Helvetica Light" panose="020B0403020202020204" pitchFamily="34" charset="0"/>
+              </a:rPr>
+              <a:t>yeast_genome.gff</a:t>
+            </a:r>
+            <a:endParaRPr lang="en-US" sz="2400" b="1" dirty="0">
+              <a:latin typeface="Helvetica Light" panose="020B0403020202020204" pitchFamily="34" charset="0"/>
+            </a:endParaRPr>
+          </a:p>
+        </p:txBody>
+      </p:sp>
+      <p:sp>
+        <p:nvSpPr>
+          <p:cNvPr id="6" name="Rectangle 5"/>
+          <p:cNvSpPr/>
+          <p:nvPr/>
+        </p:nvSpPr>
+        <p:spPr>
+          <a:xfrm>
+            <a:off x="956330" y="3923406"/>
+            <a:ext cx="6752169" cy="461665"/>
+          </a:xfrm>
+          <a:prstGeom prst="rect">
+            <a:avLst/>
+          </a:prstGeom>
+        </p:spPr>
+        <p:txBody>
+          <a:bodyPr wrap="none">
+            <a:spAutoFit/>
+          </a:bodyPr>
+          <a:lstStyle/>
+          <a:p>
+            <a:r>
+              <a:rPr lang="en-US" sz="2400" b="1" dirty="0">
+                <a:latin typeface="Helvetica Light" panose="020B0403020202020204" pitchFamily="34" charset="0"/>
+              </a:rPr>
+              <a:t>$ </a:t>
+            </a:r>
+            <a:r>
+              <a:rPr lang="en-US" sz="2400" b="1" dirty="0" err="1">
+                <a:latin typeface="Helvetica Light" panose="020B0403020202020204" pitchFamily="34" charset="0"/>
+              </a:rPr>
+              <a:t>awk</a:t>
+            </a:r>
+            <a:r>
+              <a:rPr lang="en-US" sz="2400" b="1" dirty="0">
+                <a:latin typeface="Helvetica Light" panose="020B0403020202020204" pitchFamily="34" charset="0"/>
+              </a:rPr>
+              <a:t> '/</a:t>
+            </a:r>
+            <a:r>
+              <a:rPr lang="en-US" sz="2400" b="1" dirty="0" err="1">
+                <a:latin typeface="Helvetica Light" panose="020B0403020202020204" pitchFamily="34" charset="0"/>
+              </a:rPr>
+              <a:t>repeat_region</a:t>
+            </a:r>
+            <a:r>
+              <a:rPr lang="en-US" sz="2400" b="1" dirty="0">
+                <a:latin typeface="Helvetica Light" panose="020B0403020202020204" pitchFamily="34" charset="0"/>
+              </a:rPr>
+              <a:t>/ {print}' </a:t>
+            </a:r>
+            <a:r>
+              <a:rPr lang="en-US" sz="2400" b="1" dirty="0" err="1">
+                <a:latin typeface="Helvetica Light" panose="020B0403020202020204" pitchFamily="34" charset="0"/>
+              </a:rPr>
+              <a:t>yeast_genome.gff</a:t>
+            </a:r>
+            <a:endParaRPr lang="en-US" sz="2400" b="1" dirty="0">
+              <a:latin typeface="Helvetica Light" panose="020B0403020202020204" pitchFamily="34" charset="0"/>
+            </a:endParaRPr>
+          </a:p>
+        </p:txBody>
+      </p:sp>
+      <p:sp>
+        <p:nvSpPr>
+          <p:cNvPr id="3" name="TextBox 2"/>
+          <p:cNvSpPr txBox="1"/>
+          <p:nvPr/>
+        </p:nvSpPr>
+        <p:spPr>
+          <a:xfrm>
+            <a:off x="2585489" y="2063083"/>
+            <a:ext cx="5758308" cy="430887"/>
+          </a:xfrm>
+          <a:prstGeom prst="rect">
+            <a:avLst/>
+          </a:prstGeom>
+          <a:noFill/>
+        </p:spPr>
+        <p:txBody>
+          <a:bodyPr wrap="none" rtlCol="0">
+            <a:spAutoFit/>
+          </a:bodyPr>
+          <a:lstStyle/>
+          <a:p>
+            <a:r>
               <a:rPr lang="en-US" sz="2200" dirty="0">
                 <a:latin typeface="Helvetica Light" panose="020B0403020202020204" pitchFamily="34" charset="0"/>
               </a:rPr>
-              <a:t>Prints the second field of each line of the file</a:t>
+              <a:t># simplest use, prints the whole file contents</a:t>
+            </a:r>
+          </a:p>
+        </p:txBody>
+      </p:sp>
+      <p:sp>
+        <p:nvSpPr>
+          <p:cNvPr id="7" name="TextBox 6"/>
+          <p:cNvSpPr txBox="1"/>
+          <p:nvPr/>
+        </p:nvSpPr>
+        <p:spPr>
+          <a:xfrm>
+            <a:off x="2427834" y="3218076"/>
+            <a:ext cx="8685391" cy="430887"/>
+          </a:xfrm>
+          <a:prstGeom prst="rect">
+            <a:avLst/>
+          </a:prstGeom>
+          <a:noFill/>
+        </p:spPr>
+        <p:txBody>
+          <a:bodyPr wrap="none" rtlCol="0">
+            <a:spAutoFit/>
+          </a:bodyPr>
+          <a:lstStyle/>
+          <a:p>
+            <a:r>
+              <a:rPr lang="en-US" sz="2200" dirty="0">
+                <a:latin typeface="Helvetica Light" panose="020B0403020202020204" pitchFamily="34" charset="0"/>
+              </a:rPr>
+              <a:t>Prints the second field of each line </a:t>
+            </a:r>
+            <a:r>
+              <a:rPr lang="en-US" sz="1600" dirty="0">
+                <a:latin typeface="Helvetica Light" panose="020B0403020202020204" pitchFamily="34" charset="0"/>
+              </a:rPr>
+              <a:t>(whitespace [tab or space] default delimiter)</a:t>
             </a:r>
           </a:p>
         </p:txBody>
@@ -4978,7 +5614,7 @@
         <p:spPr>
           <a:xfrm>
             <a:off x="992748" y="5241515"/>
-            <a:ext cx="7414209" cy="461665"/>
+            <a:ext cx="7657866" cy="461665"/>
           </a:xfrm>
           <a:prstGeom prst="rect">
             <a:avLst/>
@@ -4994,19 +5630,7 @@
               <a:rPr lang="en-US" sz="2400" b="1" dirty="0">
                 <a:latin typeface="Helvetica Light" panose="020B0403020202020204" pitchFamily="34" charset="0"/>
               </a:rPr>
-              <a:t>$ </a:t>
-            </a:r>
-            <a:r>
-              <a:rPr lang="en-US" sz="2400" b="1" dirty="0" err="1">
-                <a:latin typeface="Helvetica Light" panose="020B0403020202020204" pitchFamily="34" charset="0"/>
-              </a:rPr>
-              <a:t>awk</a:t>
-            </a:r>
-            <a:r>
-              <a:rPr lang="en-US" sz="2400" b="1" dirty="0">
-                <a:latin typeface="Helvetica Light" panose="020B0403020202020204" pitchFamily="34" charset="0"/>
-              </a:rPr>
-              <a:t> {'if ($9 - $4 &gt; 100) print $1'} </a:t>
+              <a:t>$ awk {'if ($5 - $4 &gt; 100) print $1'} </a:t>
             </a:r>
             <a:r>
               <a:rPr lang="en-US" sz="2400" b="1" dirty="0" err="1">
@@ -5316,7 +5940,7 @@
 </p:sld>
 </file>
 
-<file path=ppt/slides/slide11.xml><?xml version="1.0" encoding="utf-8"?>
+<file path=ppt/slides/slide12.xml><?xml version="1.0" encoding="utf-8"?>
 <p:sld xmlns:a="http://schemas.openxmlformats.org/drawingml/2006/main" xmlns:r="http://schemas.openxmlformats.org/officeDocument/2006/relationships" xmlns:p="http://schemas.openxmlformats.org/presentationml/2006/main">
   <p:cSld>
     <p:spTree>
@@ -5555,7 +6179,7 @@
               <a:rPr lang="en-US" sz="2000" dirty="0">
                 <a:latin typeface="Helvetica Light" panose="020B0403020202020204" pitchFamily="34" charset="0"/>
               </a:rPr>
-              <a:t>Redirection to read the output to ‘</a:t>
+              <a:t>Redirection to send the output to ‘</a:t>
             </a:r>
             <a:r>
               <a:rPr lang="en-US" sz="2000" dirty="0" err="1">
@@ -5831,7 +6455,7 @@
 </p:sld>
 </file>
 
-<file path=ppt/slides/slide12.xml><?xml version="1.0" encoding="utf-8"?>
+<file path=ppt/slides/slide13.xml><?xml version="1.0" encoding="utf-8"?>
 <p:sld xmlns:a="http://schemas.openxmlformats.org/drawingml/2006/main" xmlns:r="http://schemas.openxmlformats.org/officeDocument/2006/relationships" xmlns:p="http://schemas.openxmlformats.org/presentationml/2006/main">
   <p:cSld>
     <p:spTree>
@@ -5973,7 +6597,7 @@
         <p:spPr>
           <a:xfrm>
             <a:off x="3478752" y="3429000"/>
-            <a:ext cx="4577089" cy="1200329"/>
+            <a:ext cx="5570655" cy="1200329"/>
           </a:xfrm>
           <a:prstGeom prst="rect">
             <a:avLst/>
@@ -6024,7 +6648,7 @@
               <a:rPr lang="en-US" sz="2400" dirty="0">
                 <a:latin typeface="Helvetica Light" panose="020B0403020202020204" pitchFamily="34" charset="0"/>
               </a:rPr>
-              <a:t>		Windows ending</a:t>
+              <a:t>		Windows/Dos ending</a:t>
             </a:r>
             <a:endParaRPr lang="en-US" sz="2200" dirty="0">
               <a:latin typeface="Helvetica Light" panose="020B0403020202020204" pitchFamily="34" charset="0"/>
@@ -6191,7 +6815,7 @@
 </p:sld>
 </file>
 
-<file path=ppt/slides/slide13.xml><?xml version="1.0" encoding="utf-8"?>
+<file path=ppt/slides/slide14.xml><?xml version="1.0" encoding="utf-8"?>
 <p:sld xmlns:a="http://schemas.openxmlformats.org/drawingml/2006/main" xmlns:r="http://schemas.openxmlformats.org/officeDocument/2006/relationships" xmlns:p="http://schemas.openxmlformats.org/presentationml/2006/main">
   <p:cSld>
     <p:spTree>
@@ -6654,7 +7278,19 @@
               <a:rPr lang="en-US" dirty="0">
                 <a:latin typeface="Helvetica Light" panose="020B0403020202020204" pitchFamily="34" charset="0"/>
               </a:rPr>
-              <a:t>is the first argument that comes from the command line, after the name of the program</a:t>
+              <a:t>is the first </a:t>
+            </a:r>
+            <a:r>
+              <a:rPr lang="en-US" b="1" i="1" dirty="0">
+                <a:latin typeface="Helvetica Light" panose="020B0403020202020204" pitchFamily="34" charset="0"/>
+              </a:rPr>
+              <a:t>argument</a:t>
+            </a:r>
+            <a:r>
+              <a:rPr lang="en-US" dirty="0">
+                <a:latin typeface="Helvetica Light" panose="020B0403020202020204" pitchFamily="34" charset="0"/>
+              </a:rPr>
+              <a:t> that comes from the command line, after the name of the program</a:t>
             </a:r>
           </a:p>
         </p:txBody>
@@ -6956,190 +7592,6 @@
 </p:sld>
 </file>
 
-<file path=ppt/slides/slide14.xml><?xml version="1.0" encoding="utf-8"?>
-<p:sld xmlns:a="http://schemas.openxmlformats.org/drawingml/2006/main" xmlns:r="http://schemas.openxmlformats.org/officeDocument/2006/relationships" xmlns:p="http://schemas.openxmlformats.org/presentationml/2006/main">
-  <p:cSld>
-    <p:spTree>
-      <p:nvGrpSpPr>
-        <p:cNvPr id="1" name=""/>
-        <p:cNvGrpSpPr/>
-        <p:nvPr/>
-      </p:nvGrpSpPr>
-      <p:grpSpPr>
-        <a:xfrm>
-          <a:off x="0" y="0"/>
-          <a:ext cx="0" cy="0"/>
-          <a:chOff x="0" y="0"/>
-          <a:chExt cx="0" cy="0"/>
-        </a:xfrm>
-      </p:grpSpPr>
-      <p:sp>
-        <p:nvSpPr>
-          <p:cNvPr id="4" name="TextBox 3"/>
-          <p:cNvSpPr txBox="1"/>
-          <p:nvPr/>
-        </p:nvSpPr>
-        <p:spPr>
-          <a:xfrm>
-            <a:off x="856648" y="728950"/>
-            <a:ext cx="8602663" cy="523220"/>
-          </a:xfrm>
-          <a:prstGeom prst="rect">
-            <a:avLst/>
-          </a:prstGeom>
-          <a:noFill/>
-        </p:spPr>
-        <p:txBody>
-          <a:bodyPr wrap="square" rtlCol="0">
-            <a:spAutoFit/>
-          </a:bodyPr>
-          <a:lstStyle/>
-          <a:p>
-            <a:r>
-              <a:rPr lang="en-US" sz="2800" dirty="0">
-                <a:latin typeface="Helvetica Light" panose="020B0403020202020204" pitchFamily="34" charset="0"/>
-              </a:rPr>
-              <a:t>Processing command line arguments in shell scripts</a:t>
-            </a:r>
-          </a:p>
-        </p:txBody>
-      </p:sp>
-      <p:sp>
-        <p:nvSpPr>
-          <p:cNvPr id="5" name="TextBox 4"/>
-          <p:cNvSpPr txBox="1"/>
-          <p:nvPr/>
-        </p:nvSpPr>
-        <p:spPr>
-          <a:xfrm>
-            <a:off x="1592371" y="2310741"/>
-            <a:ext cx="9424375" cy="1938992"/>
-          </a:xfrm>
-          <a:prstGeom prst="rect">
-            <a:avLst/>
-          </a:prstGeom>
-          <a:noFill/>
-        </p:spPr>
-        <p:txBody>
-          <a:bodyPr wrap="none" rtlCol="0">
-            <a:spAutoFit/>
-          </a:bodyPr>
-          <a:lstStyle/>
-          <a:p>
-            <a:r>
-              <a:rPr lang="en-US" sz="2400" b="1" dirty="0">
-                <a:latin typeface="Helvetica Light" panose="020B0403020202020204" pitchFamily="34" charset="0"/>
-              </a:rPr>
-              <a:t>$ bash </a:t>
-            </a:r>
-            <a:r>
-              <a:rPr lang="en-US" sz="2400" b="1" dirty="0" err="1">
-                <a:latin typeface="Helvetica Light" panose="020B0403020202020204" pitchFamily="34" charset="0"/>
-              </a:rPr>
-              <a:t>make_dup_files.sh</a:t>
-            </a:r>
-            <a:r>
-              <a:rPr lang="en-US" sz="2400" b="1" dirty="0">
-                <a:latin typeface="Helvetica Light" panose="020B0403020202020204" pitchFamily="34" charset="0"/>
-              </a:rPr>
-              <a:t> </a:t>
-            </a:r>
-            <a:r>
-              <a:rPr lang="en-US" sz="2400" b="1" dirty="0">
-                <a:solidFill>
-                  <a:srgbClr val="FF0000"/>
-                </a:solidFill>
-                <a:latin typeface="Helvetica Light" panose="020B0403020202020204" pitchFamily="34" charset="0"/>
-              </a:rPr>
-              <a:t>25		</a:t>
-            </a:r>
-            <a:r>
-              <a:rPr lang="en-US" sz="2400" b="1" dirty="0">
-                <a:latin typeface="Helvetica Light" panose="020B0403020202020204" pitchFamily="34" charset="0"/>
-              </a:rPr>
-              <a:t>(one value becomes $1)</a:t>
-            </a:r>
-          </a:p>
-          <a:p>
-            <a:endParaRPr lang="en-US" sz="2400" dirty="0">
-              <a:latin typeface="Helvetica Light" panose="020B0403020202020204" pitchFamily="34" charset="0"/>
-            </a:endParaRPr>
-          </a:p>
-          <a:p>
-            <a:r>
-              <a:rPr lang="en-US" sz="2400" b="1" dirty="0">
-                <a:latin typeface="Helvetica Light" panose="020B0403020202020204" pitchFamily="34" charset="0"/>
-              </a:rPr>
-              <a:t>$ bash mac2unix.sh </a:t>
-            </a:r>
-            <a:r>
-              <a:rPr lang="en-US" sz="2400" b="1" dirty="0" err="1">
-                <a:solidFill>
-                  <a:srgbClr val="FF0000"/>
-                </a:solidFill>
-                <a:latin typeface="Helvetica Light" panose="020B0403020202020204" pitchFamily="34" charset="0"/>
-              </a:rPr>
-              <a:t>example.txt</a:t>
-            </a:r>
-            <a:r>
-              <a:rPr lang="en-US" sz="2400" b="1" dirty="0">
-                <a:solidFill>
-                  <a:srgbClr val="FF0000"/>
-                </a:solidFill>
-                <a:latin typeface="Helvetica Light" panose="020B0403020202020204" pitchFamily="34" charset="0"/>
-              </a:rPr>
-              <a:t>		</a:t>
-            </a:r>
-            <a:r>
-              <a:rPr lang="en-US" sz="2400" b="1" dirty="0">
-                <a:latin typeface="Helvetica Light" panose="020B0403020202020204" pitchFamily="34" charset="0"/>
-              </a:rPr>
-              <a:t>(one file becomes $1)</a:t>
-            </a:r>
-          </a:p>
-          <a:p>
-            <a:endParaRPr lang="en-US" sz="2400" dirty="0">
-              <a:latin typeface="Helvetica Light" panose="020B0403020202020204" pitchFamily="34" charset="0"/>
-            </a:endParaRPr>
-          </a:p>
-          <a:p>
-            <a:r>
-              <a:rPr lang="en-US" sz="2400" b="1" dirty="0">
-                <a:latin typeface="Helvetica Light" panose="020B0403020202020204" pitchFamily="34" charset="0"/>
-              </a:rPr>
-              <a:t>$ bash mac2unix.sh </a:t>
-            </a:r>
-            <a:r>
-              <a:rPr lang="en-US" sz="2400" b="1" dirty="0">
-                <a:solidFill>
-                  <a:srgbClr val="FF0000"/>
-                </a:solidFill>
-                <a:latin typeface="Helvetica Light" panose="020B0403020202020204" pitchFamily="34" charset="0"/>
-              </a:rPr>
-              <a:t>*.txt			</a:t>
-            </a:r>
-            <a:r>
-              <a:rPr lang="en-US" sz="2400" b="1" dirty="0">
-                <a:latin typeface="Helvetica Light" panose="020B0403020202020204" pitchFamily="34" charset="0"/>
-              </a:rPr>
-              <a:t>(a list of files becomes $@)</a:t>
-            </a:r>
-          </a:p>
-        </p:txBody>
-      </p:sp>
-    </p:spTree>
-    <p:extLst>
-      <p:ext uri="{BB962C8B-B14F-4D97-AF65-F5344CB8AC3E}">
-        <p14:creationId xmlns:p14="http://schemas.microsoft.com/office/powerpoint/2010/main" val="479429650"/>
-      </p:ext>
-    </p:extLst>
-  </p:cSld>
-  <p:clrMapOvr>
-    <a:masterClrMapping/>
-  </p:clrMapOvr>
-</p:sld>
-</file>
-
 <file path=ppt/slides/slide15.xml><?xml version="1.0" encoding="utf-8"?>
 <p:sld xmlns:a="http://schemas.openxmlformats.org/drawingml/2006/main" xmlns:r="http://schemas.openxmlformats.org/officeDocument/2006/relationships" xmlns:p="http://schemas.openxmlformats.org/presentationml/2006/main">
   <p:cSld>
@@ -7159,20 +7611,14 @@
       </p:grpSpPr>
       <p:sp>
         <p:nvSpPr>
-          <p:cNvPr id="2" name="TextBox 1">
-            <a:extLst>
-              <a:ext uri="{FF2B5EF4-FFF2-40B4-BE49-F238E27FC236}">
-                <a16:creationId xmlns:a16="http://schemas.microsoft.com/office/drawing/2014/main" id="{166E0E4B-3E4D-EB44-AAE0-FB3A6BB4B518}"/>
-              </a:ext>
-            </a:extLst>
-          </p:cNvPr>
+          <p:cNvPr id="4" name="TextBox 3"/>
           <p:cNvSpPr txBox="1"/>
           <p:nvPr/>
         </p:nvSpPr>
         <p:spPr>
           <a:xfrm>
-            <a:off x="958388" y="291826"/>
-            <a:ext cx="9513800" cy="1077218"/>
+            <a:off x="856648" y="728950"/>
+            <a:ext cx="8602663" cy="523220"/>
           </a:xfrm>
           <a:prstGeom prst="rect">
             <a:avLst/>
@@ -7186,52 +7632,32 @@
           <a:lstStyle/>
           <a:p>
             <a:r>
-              <a:rPr lang="en-US" sz="3200" dirty="0">
-                <a:latin typeface="Helvetica Light" panose="020B0403020202020204" pitchFamily="34" charset="0"/>
-              </a:rPr>
-              <a:t>Lists of arguments are stored in a special list variable: </a:t>
-            </a:r>
-            <a:r>
-              <a:rPr lang="en-US" sz="3200" b="1" dirty="0">
-                <a:latin typeface="Helvetica Light" panose="020B0403020202020204" pitchFamily="34" charset="0"/>
-              </a:rPr>
-              <a:t>$@</a:t>
-            </a:r>
-          </a:p>
-        </p:txBody>
-      </p:sp>
-      <p:sp>
-        <p:nvSpPr>
-          <p:cNvPr id="3" name="TextBox 2">
-            <a:extLst>
-              <a:ext uri="{FF2B5EF4-FFF2-40B4-BE49-F238E27FC236}">
-                <a16:creationId xmlns:a16="http://schemas.microsoft.com/office/drawing/2014/main" id="{C38EB622-D205-F745-AF19-FD09A8ABA00D}"/>
-              </a:ext>
-            </a:extLst>
-          </p:cNvPr>
+              <a:rPr lang="en-US" sz="2800" dirty="0">
+                <a:latin typeface="Helvetica Light" panose="020B0403020202020204" pitchFamily="34" charset="0"/>
+              </a:rPr>
+              <a:t>Processing command line arguments in shell scripts</a:t>
+            </a:r>
+          </a:p>
+        </p:txBody>
+      </p:sp>
+      <p:sp>
+        <p:nvSpPr>
+          <p:cNvPr id="5" name="TextBox 4"/>
           <p:cNvSpPr txBox="1"/>
           <p:nvPr/>
         </p:nvSpPr>
         <p:spPr>
           <a:xfrm>
-            <a:off x="958388" y="2468707"/>
-            <a:ext cx="3842320" cy="2677656"/>
+            <a:off x="1592371" y="2310741"/>
+            <a:ext cx="9424375" cy="1938992"/>
           </a:xfrm>
           <a:prstGeom prst="rect">
             <a:avLst/>
           </a:prstGeom>
           <a:noFill/>
-          <a:ln w="25400">
-            <a:solidFill>
-              <a:schemeClr val="tx1">
-                <a:lumMod val="75000"/>
-                <a:lumOff val="25000"/>
-              </a:schemeClr>
-            </a:solidFill>
-          </a:ln>
-        </p:spPr>
-        <p:txBody>
-          <a:bodyPr wrap="square" rtlCol="0">
+        </p:spPr>
+        <p:txBody>
+          <a:bodyPr wrap="none" rtlCol="0">
             <a:spAutoFit/>
           </a:bodyPr>
           <a:lstStyle/>
@@ -7240,115 +7666,13 @@
               <a:rPr lang="en-US" sz="2400" b="1" dirty="0">
                 <a:latin typeface="Helvetica Light" panose="020B0403020202020204" pitchFamily="34" charset="0"/>
               </a:rPr>
-              <a:t>#!/bin/bash</a:t>
-            </a:r>
-          </a:p>
-          <a:p>
-            <a:r>
-              <a:rPr lang="en-US" sz="2400" b="1" dirty="0">
-                <a:latin typeface="Helvetica Light" panose="020B0403020202020204" pitchFamily="34" charset="0"/>
-              </a:rPr>
-              <a:t>#demonstration script,</a:t>
-            </a:r>
-          </a:p>
-          <a:p>
-            <a:r>
-              <a:rPr lang="en-US" sz="2400" b="1" dirty="0">
-                <a:latin typeface="Helvetica Light" panose="020B0403020202020204" pitchFamily="34" charset="0"/>
-              </a:rPr>
-              <a:t>#</a:t>
+              <a:t>$ bash </a:t>
             </a:r>
             <a:r>
               <a:rPr lang="en-US" sz="2400" b="1" dirty="0" err="1">
                 <a:latin typeface="Helvetica Light" panose="020B0403020202020204" pitchFamily="34" charset="0"/>
               </a:rPr>
-              <a:t>echo_stdin.sh</a:t>
-            </a:r>
-            <a:endParaRPr lang="en-US" sz="2400" b="1" dirty="0">
-              <a:latin typeface="Helvetica Light" panose="020B0403020202020204" pitchFamily="34" charset="0"/>
-            </a:endParaRPr>
-          </a:p>
-          <a:p>
-            <a:r>
-              <a:rPr lang="en-US" sz="2400" b="1" dirty="0">
-                <a:latin typeface="Helvetica Light" panose="020B0403020202020204" pitchFamily="34" charset="0"/>
-              </a:rPr>
-              <a:t>	</a:t>
-            </a:r>
-          </a:p>
-          <a:p>
-            <a:r>
-              <a:rPr lang="en-US" sz="2400" b="1" dirty="0">
-                <a:latin typeface="Helvetica Light" panose="020B0403020202020204" pitchFamily="34" charset="0"/>
-              </a:rPr>
-              <a:t>echo $@</a:t>
-            </a:r>
-          </a:p>
-          <a:p>
-            <a:r>
-              <a:rPr lang="en-US" sz="2400" b="1" dirty="0">
-                <a:latin typeface="Helvetica Light" panose="020B0403020202020204" pitchFamily="34" charset="0"/>
-              </a:rPr>
-              <a:t>echo $1</a:t>
-            </a:r>
-          </a:p>
-          <a:p>
-            <a:r>
-              <a:rPr lang="en-US" sz="2400" b="1" dirty="0">
-                <a:latin typeface="Helvetica Light" panose="020B0403020202020204" pitchFamily="34" charset="0"/>
-              </a:rPr>
-              <a:t>echo $2</a:t>
-            </a:r>
-          </a:p>
-        </p:txBody>
-      </p:sp>
-      <p:sp>
-        <p:nvSpPr>
-          <p:cNvPr id="4" name="TextBox 3">
-            <a:extLst>
-              <a:ext uri="{FF2B5EF4-FFF2-40B4-BE49-F238E27FC236}">
-                <a16:creationId xmlns:a16="http://schemas.microsoft.com/office/drawing/2014/main" id="{8096D306-8CD6-C848-80E8-55177B617D8C}"/>
-              </a:ext>
-            </a:extLst>
-          </p:cNvPr>
-          <p:cNvSpPr txBox="1"/>
-          <p:nvPr/>
-        </p:nvSpPr>
-        <p:spPr>
-          <a:xfrm>
-            <a:off x="6310675" y="3022705"/>
-            <a:ext cx="4746207" cy="1569660"/>
-          </a:xfrm>
-          <a:prstGeom prst="rect">
-            <a:avLst/>
-          </a:prstGeom>
-          <a:noFill/>
-          <a:ln w="25400">
-            <a:solidFill>
-              <a:schemeClr val="tx1">
-                <a:lumMod val="75000"/>
-                <a:lumOff val="25000"/>
-              </a:schemeClr>
-            </a:solidFill>
-          </a:ln>
-        </p:spPr>
-        <p:txBody>
-          <a:bodyPr wrap="square" rtlCol="0">
-            <a:spAutoFit/>
-          </a:bodyPr>
-          <a:lstStyle/>
-          <a:p>
-            <a:r>
-              <a:rPr lang="en-US" sz="2400" b="1" dirty="0">
-                <a:latin typeface="Helvetica Light" panose="020B0403020202020204" pitchFamily="34" charset="0"/>
-              </a:rPr>
-              <a:t>$ bash </a:t>
-            </a:r>
-            <a:r>
-              <a:rPr lang="en-US" sz="2400" b="1" dirty="0" err="1">
-                <a:latin typeface="Helvetica Light" panose="020B0403020202020204" pitchFamily="34" charset="0"/>
-              </a:rPr>
-              <a:t>echo_stdin.sh</a:t>
+              <a:t>make_dup_files.sh</a:t>
             </a:r>
             <a:r>
               <a:rPr lang="en-US" sz="2400" b="1" dirty="0">
@@ -7363,183 +7687,78 @@
                 </a:solidFill>
                 <a:latin typeface="Helvetica Light" panose="020B0403020202020204" pitchFamily="34" charset="0"/>
               </a:rPr>
-              <a:t>17 19 </a:t>
-            </a:r>
-          </a:p>
-          <a:p>
+              <a:t>25		</a:t>
+            </a:r>
             <a:r>
               <a:rPr lang="en-US" sz="2400" b="1" dirty="0">
                 <a:latin typeface="Helvetica Light" panose="020B0403020202020204" pitchFamily="34" charset="0"/>
               </a:rPr>
-              <a:t>17 19</a:t>
-            </a:r>
+              <a:t>(one value becomes $1)</a:t>
+            </a:r>
+          </a:p>
+          <a:p>
+            <a:endParaRPr lang="en-US" sz="2400" dirty="0">
+              <a:latin typeface="Helvetica Light" panose="020B0403020202020204" pitchFamily="34" charset="0"/>
+            </a:endParaRPr>
           </a:p>
           <a:p>
             <a:r>
               <a:rPr lang="en-US" sz="2400" b="1" dirty="0">
                 <a:latin typeface="Helvetica Light" panose="020B0403020202020204" pitchFamily="34" charset="0"/>
               </a:rPr>
-              <a:t>17</a:t>
-            </a:r>
-          </a:p>
-          <a:p>
+              <a:t>$ bash mac2unix.sh </a:t>
+            </a:r>
+            <a:r>
+              <a:rPr lang="en-US" sz="2400" b="1" dirty="0" err="1">
+                <a:solidFill>
+                  <a:srgbClr val="FF0000"/>
+                </a:solidFill>
+                <a:latin typeface="Helvetica Light" panose="020B0403020202020204" pitchFamily="34" charset="0"/>
+              </a:rPr>
+              <a:t>example.txt</a:t>
+            </a:r>
             <a:r>
               <a:rPr lang="en-US" sz="2400" b="1" dirty="0">
-                <a:latin typeface="Helvetica Light" panose="020B0403020202020204" pitchFamily="34" charset="0"/>
-              </a:rPr>
-              <a:t>19</a:t>
-            </a:r>
-          </a:p>
-        </p:txBody>
-      </p:sp>
-      <p:sp>
-        <p:nvSpPr>
-          <p:cNvPr id="5" name="TextBox 4">
-            <a:extLst>
-              <a:ext uri="{FF2B5EF4-FFF2-40B4-BE49-F238E27FC236}">
-                <a16:creationId xmlns:a16="http://schemas.microsoft.com/office/drawing/2014/main" id="{E96C3EFB-7617-744B-B51F-411E13CE1B91}"/>
-              </a:ext>
-            </a:extLst>
-          </p:cNvPr>
-          <p:cNvSpPr txBox="1"/>
-          <p:nvPr/>
-        </p:nvSpPr>
-        <p:spPr>
-          <a:xfrm>
-            <a:off x="6217920" y="1898810"/>
-            <a:ext cx="5462016" cy="830997"/>
-          </a:xfrm>
-          <a:prstGeom prst="rect">
-            <a:avLst/>
-          </a:prstGeom>
-          <a:noFill/>
-        </p:spPr>
-        <p:txBody>
-          <a:bodyPr wrap="square" rtlCol="0">
-            <a:spAutoFit/>
-          </a:bodyPr>
-          <a:lstStyle/>
-          <a:p>
-            <a:r>
-              <a:rPr lang="en-US" sz="2400" dirty="0">
-                <a:latin typeface="Helvetica Light" panose="020B0403020202020204" pitchFamily="34" charset="0"/>
-              </a:rPr>
-              <a:t>Executing script on the left from the command line gets:</a:t>
-            </a:r>
-          </a:p>
-        </p:txBody>
-      </p:sp>
-      <p:sp>
-        <p:nvSpPr>
-          <p:cNvPr id="6" name="TextBox 5">
-            <a:extLst>
-              <a:ext uri="{FF2B5EF4-FFF2-40B4-BE49-F238E27FC236}">
-                <a16:creationId xmlns:a16="http://schemas.microsoft.com/office/drawing/2014/main" id="{F82DFA78-C1EC-8A4B-9CE2-8AE6CEA36FA2}"/>
-              </a:ext>
-            </a:extLst>
-          </p:cNvPr>
-          <p:cNvSpPr txBox="1"/>
-          <p:nvPr/>
-        </p:nvSpPr>
-        <p:spPr>
-          <a:xfrm>
-            <a:off x="848660" y="1898810"/>
-            <a:ext cx="5462016" cy="461665"/>
-          </a:xfrm>
-          <a:prstGeom prst="rect">
-            <a:avLst/>
-          </a:prstGeom>
-          <a:noFill/>
-        </p:spPr>
-        <p:txBody>
-          <a:bodyPr wrap="square" rtlCol="0">
-            <a:spAutoFit/>
-          </a:bodyPr>
-          <a:lstStyle/>
-          <a:p>
-            <a:r>
-              <a:rPr lang="en-US" sz="2400" dirty="0">
-                <a:latin typeface="Helvetica Light" panose="020B0403020202020204" pitchFamily="34" charset="0"/>
-              </a:rPr>
-              <a:t>Example script:</a:t>
-            </a:r>
-          </a:p>
-        </p:txBody>
-      </p:sp>
-      <p:cxnSp>
-        <p:nvCxnSpPr>
-          <p:cNvPr id="8" name="Straight Arrow Connector 7">
-            <a:extLst>
-              <a:ext uri="{FF2B5EF4-FFF2-40B4-BE49-F238E27FC236}">
-                <a16:creationId xmlns:a16="http://schemas.microsoft.com/office/drawing/2014/main" id="{2793672C-98DE-D956-44F6-A53B79221005}"/>
-              </a:ext>
-            </a:extLst>
-          </p:cNvPr>
-          <p:cNvCxnSpPr>
-            <a:cxnSpLocks/>
-          </p:cNvCxnSpPr>
-          <p:nvPr/>
-        </p:nvCxnSpPr>
-        <p:spPr>
-          <a:xfrm flipH="1" flipV="1">
-            <a:off x="9829274" y="3626069"/>
-            <a:ext cx="180358" cy="1259194"/>
-          </a:xfrm>
-          <a:prstGeom prst="straightConnector1">
-            <a:avLst/>
-          </a:prstGeom>
-          <a:ln w="25400">
-            <a:tailEnd type="triangle"/>
-          </a:ln>
-        </p:spPr>
-        <p:style>
-          <a:lnRef idx="1">
-            <a:schemeClr val="accent1"/>
-          </a:lnRef>
-          <a:fillRef idx="0">
-            <a:schemeClr val="accent1"/>
-          </a:fillRef>
-          <a:effectRef idx="0">
-            <a:schemeClr val="accent1"/>
-          </a:effectRef>
-          <a:fontRef idx="minor">
-            <a:schemeClr val="tx1"/>
-          </a:fontRef>
-        </p:style>
-      </p:cxnSp>
-      <p:sp>
-        <p:nvSpPr>
-          <p:cNvPr id="12" name="TextBox 11">
-            <a:extLst>
-              <a:ext uri="{FF2B5EF4-FFF2-40B4-BE49-F238E27FC236}">
-                <a16:creationId xmlns:a16="http://schemas.microsoft.com/office/drawing/2014/main" id="{75344097-D101-2748-41B4-BAC0EBB4E7D3}"/>
-              </a:ext>
-            </a:extLst>
-          </p:cNvPr>
-          <p:cNvSpPr txBox="1"/>
-          <p:nvPr/>
-        </p:nvSpPr>
-        <p:spPr>
-          <a:xfrm>
-            <a:off x="8166018" y="5146363"/>
-            <a:ext cx="3687228" cy="430887"/>
-          </a:xfrm>
-          <a:prstGeom prst="rect">
-            <a:avLst/>
-          </a:prstGeom>
-          <a:noFill/>
-        </p:spPr>
-        <p:txBody>
-          <a:bodyPr wrap="none" rtlCol="0">
-            <a:spAutoFit/>
-          </a:bodyPr>
-          <a:lstStyle/>
-          <a:p>
-            <a:r>
-              <a:rPr lang="en-US" sz="2200" dirty="0">
-                <a:latin typeface="Helvetica Light" panose="020B0403020202020204" pitchFamily="34" charset="0"/>
-              </a:rPr>
-              <a:t>Arguments passed to script</a:t>
+                <a:solidFill>
+                  <a:srgbClr val="FF0000"/>
+                </a:solidFill>
+                <a:latin typeface="Helvetica Light" panose="020B0403020202020204" pitchFamily="34" charset="0"/>
+              </a:rPr>
+              <a:t>		</a:t>
+            </a:r>
+            <a:r>
+              <a:rPr lang="en-US" sz="2400" b="1" dirty="0">
+                <a:latin typeface="Helvetica Light" panose="020B0403020202020204" pitchFamily="34" charset="0"/>
+              </a:rPr>
+              <a:t>(one file becomes $1)</a:t>
+            </a:r>
+          </a:p>
+          <a:p>
+            <a:endParaRPr lang="en-US" sz="2400" dirty="0">
+              <a:latin typeface="Helvetica Light" panose="020B0403020202020204" pitchFamily="34" charset="0"/>
+            </a:endParaRPr>
+          </a:p>
+          <a:p>
+            <a:r>
+              <a:rPr lang="en-US" sz="2400" b="1" dirty="0">
+                <a:latin typeface="Helvetica Light" panose="020B0403020202020204" pitchFamily="34" charset="0"/>
+              </a:rPr>
+              <a:t>$ bash mac2unix.sh </a:t>
+            </a:r>
+            <a:r>
+              <a:rPr lang="en-US" sz="2400" b="1" dirty="0">
+                <a:solidFill>
+                  <a:srgbClr val="FF0000"/>
+                </a:solidFill>
+                <a:latin typeface="Helvetica Light" panose="020B0403020202020204" pitchFamily="34" charset="0"/>
+              </a:rPr>
+              <a:t>*.txt			</a:t>
+            </a:r>
+            <a:r>
+              <a:rPr lang="en-US" sz="2400" b="1" dirty="0">
+                <a:latin typeface="Helvetica Light" panose="020B0403020202020204" pitchFamily="34" charset="0"/>
+              </a:rPr>
+              <a:t>(a list of files becomes $@)</a:t>
             </a:r>
           </a:p>
         </p:txBody>
@@ -7547,7 +7766,7 @@
     </p:spTree>
     <p:extLst>
       <p:ext uri="{BB962C8B-B14F-4D97-AF65-F5344CB8AC3E}">
-        <p14:creationId xmlns:p14="http://schemas.microsoft.com/office/powerpoint/2010/main" val="2111321315"/>
+        <p14:creationId xmlns:p14="http://schemas.microsoft.com/office/powerpoint/2010/main" val="479429650"/>
       </p:ext>
     </p:extLst>
   </p:cSld>
@@ -7576,14 +7795,20 @@
       </p:grpSpPr>
       <p:sp>
         <p:nvSpPr>
-          <p:cNvPr id="4" name="TextBox 3"/>
+          <p:cNvPr id="2" name="TextBox 1">
+            <a:extLst>
+              <a:ext uri="{FF2B5EF4-FFF2-40B4-BE49-F238E27FC236}">
+                <a16:creationId xmlns:a16="http://schemas.microsoft.com/office/drawing/2014/main" id="{166E0E4B-3E4D-EB44-AAE0-FB3A6BB4B518}"/>
+              </a:ext>
+            </a:extLst>
+          </p:cNvPr>
           <p:cNvSpPr txBox="1"/>
           <p:nvPr/>
         </p:nvSpPr>
         <p:spPr>
           <a:xfrm>
-            <a:off x="2201971" y="370657"/>
-            <a:ext cx="8263472" cy="523220"/>
+            <a:off x="958388" y="291826"/>
+            <a:ext cx="9513800" cy="1077218"/>
           </a:xfrm>
           <a:prstGeom prst="rect">
             <a:avLst/>
@@ -7597,30 +7822,42 @@
           <a:lstStyle/>
           <a:p>
             <a:r>
-              <a:rPr lang="en-US" sz="2800" dirty="0">
-                <a:latin typeface="Helvetica Light" panose="020B0403020202020204" pitchFamily="34" charset="0"/>
-              </a:rPr>
-              <a:t>Looping through STDIN to perform tasks</a:t>
-            </a:r>
-          </a:p>
-        </p:txBody>
-      </p:sp>
-      <p:sp>
-        <p:nvSpPr>
-          <p:cNvPr id="5" name="TextBox 4"/>
+              <a:rPr lang="en-US" sz="3200" dirty="0">
+                <a:latin typeface="Helvetica Light" panose="020B0403020202020204" pitchFamily="34" charset="0"/>
+              </a:rPr>
+              <a:t>Lists of arguments are stored in a special list variable: </a:t>
+            </a:r>
+            <a:r>
+              <a:rPr lang="en-US" sz="3200" b="1" dirty="0">
+                <a:latin typeface="Helvetica Light" panose="020B0403020202020204" pitchFamily="34" charset="0"/>
+              </a:rPr>
+              <a:t>$@</a:t>
+            </a:r>
+          </a:p>
+        </p:txBody>
+      </p:sp>
+      <p:sp>
+        <p:nvSpPr>
+          <p:cNvPr id="3" name="TextBox 2">
+            <a:extLst>
+              <a:ext uri="{FF2B5EF4-FFF2-40B4-BE49-F238E27FC236}">
+                <a16:creationId xmlns:a16="http://schemas.microsoft.com/office/drawing/2014/main" id="{C38EB622-D205-F745-AF19-FD09A8ABA00D}"/>
+              </a:ext>
+            </a:extLst>
+          </p:cNvPr>
           <p:cNvSpPr txBox="1"/>
           <p:nvPr/>
         </p:nvSpPr>
         <p:spPr>
           <a:xfrm>
-            <a:off x="1434715" y="1272221"/>
-            <a:ext cx="8087659" cy="2800767"/>
+            <a:off x="958388" y="2468707"/>
+            <a:ext cx="3842320" cy="2677656"/>
           </a:xfrm>
           <a:prstGeom prst="rect">
             <a:avLst/>
           </a:prstGeom>
           <a:noFill/>
-          <a:ln>
+          <a:ln w="25400">
             <a:solidFill>
               <a:schemeClr val="tx1">
                 <a:lumMod val="75000"/>
@@ -7636,7 +7873,7 @@
           <a:lstStyle/>
           <a:p>
             <a:r>
-              <a:rPr lang="en-US" sz="2200" dirty="0">
+              <a:rPr lang="en-US" sz="2400" b="1" dirty="0">
                 <a:latin typeface="Helvetica Light" panose="020B0403020202020204" pitchFamily="34" charset="0"/>
               </a:rPr>
               <a:t>#!/bin/bash</a:t>
@@ -7644,100 +7881,91 @@
           </a:p>
           <a:p>
             <a:r>
-              <a:rPr lang="en-US" sz="2200" dirty="0">
-                <a:latin typeface="Helvetica Light" panose="020B0403020202020204" pitchFamily="34" charset="0"/>
-              </a:rPr>
-              <a:t>## cut_column7.sh </a:t>
-            </a:r>
-          </a:p>
-          <a:p>
-            <a:r>
-              <a:rPr lang="en-US" sz="2200" dirty="0">
-                <a:latin typeface="Helvetica Light" panose="020B0403020202020204" pitchFamily="34" charset="0"/>
-              </a:rPr>
-              <a:t>## description: cuts 7th column from any number of input files</a:t>
-            </a:r>
-          </a:p>
-          <a:p>
-            <a:r>
-              <a:rPr lang="en-US" sz="2200" dirty="0">
-                <a:latin typeface="Helvetica Light" panose="020B0403020202020204" pitchFamily="34" charset="0"/>
-              </a:rPr>
-              <a:t>## usage: bash cut_column7.sh STDIN</a:t>
-            </a:r>
-          </a:p>
-          <a:p>
-            <a:endParaRPr lang="en-US" sz="2200" dirty="0">
+              <a:rPr lang="en-US" sz="2400" b="1" dirty="0">
+                <a:latin typeface="Helvetica Light" panose="020B0403020202020204" pitchFamily="34" charset="0"/>
+              </a:rPr>
+              <a:t>#demonstration script,</a:t>
+            </a:r>
+          </a:p>
+          <a:p>
+            <a:r>
+              <a:rPr lang="en-US" sz="2400" b="1" dirty="0">
+                <a:latin typeface="Helvetica Light" panose="020B0403020202020204" pitchFamily="34" charset="0"/>
+              </a:rPr>
+              <a:t>#</a:t>
+            </a:r>
+            <a:r>
+              <a:rPr lang="en-US" sz="2400" b="1" dirty="0" err="1">
+                <a:latin typeface="Helvetica Light" panose="020B0403020202020204" pitchFamily="34" charset="0"/>
+              </a:rPr>
+              <a:t>echo_stdin.sh</a:t>
+            </a:r>
+            <a:endParaRPr lang="en-US" sz="2400" b="1" dirty="0">
               <a:latin typeface="Helvetica Light" panose="020B0403020202020204" pitchFamily="34" charset="0"/>
             </a:endParaRPr>
           </a:p>
           <a:p>
             <a:r>
-              <a:rPr lang="en-US" sz="2200" b="1" dirty="0">
-                <a:latin typeface="Helvetica Light" panose="020B0403020202020204" pitchFamily="34" charset="0"/>
-              </a:rPr>
-              <a:t>for </a:t>
-            </a:r>
-            <a:r>
-              <a:rPr lang="en-US" sz="2200" b="1" dirty="0" err="1">
-                <a:latin typeface="Helvetica Light" panose="020B0403020202020204" pitchFamily="34" charset="0"/>
-              </a:rPr>
-              <a:t>myfile</a:t>
-            </a:r>
-            <a:r>
-              <a:rPr lang="en-US" sz="2200" b="1" dirty="0">
-                <a:latin typeface="Helvetica Light" panose="020B0403020202020204" pitchFamily="34" charset="0"/>
-              </a:rPr>
-              <a:t> in $@; do</a:t>
-            </a:r>
-          </a:p>
-          <a:p>
-            <a:r>
-              <a:rPr lang="en-US" sz="2200" b="1" dirty="0">
-                <a:latin typeface="Helvetica Light" panose="020B0403020202020204" pitchFamily="34" charset="0"/>
-              </a:rPr>
-              <a:t>	cut -f 7 $</a:t>
-            </a:r>
-            <a:r>
-              <a:rPr lang="en-US" sz="2200" b="1" dirty="0" err="1">
-                <a:latin typeface="Helvetica Light" panose="020B0403020202020204" pitchFamily="34" charset="0"/>
-              </a:rPr>
-              <a:t>myfile</a:t>
-            </a:r>
-            <a:r>
-              <a:rPr lang="en-US" sz="2200" b="1" dirty="0">
-                <a:latin typeface="Helvetica Light" panose="020B0403020202020204" pitchFamily="34" charset="0"/>
-              </a:rPr>
-              <a:t> &amp;&gt; $myfile.column7.txt</a:t>
-            </a:r>
-          </a:p>
-          <a:p>
-            <a:r>
-              <a:rPr lang="en-US" sz="2200" b="1" dirty="0">
-                <a:latin typeface="Helvetica Light" panose="020B0403020202020204" pitchFamily="34" charset="0"/>
-              </a:rPr>
-              <a:t>done</a:t>
-            </a:r>
-          </a:p>
-        </p:txBody>
-      </p:sp>
-      <p:sp>
-        <p:nvSpPr>
-          <p:cNvPr id="2" name="TextBox 1"/>
+              <a:rPr lang="en-US" sz="2400" b="1" dirty="0">
+                <a:latin typeface="Helvetica Light" panose="020B0403020202020204" pitchFamily="34" charset="0"/>
+              </a:rPr>
+              <a:t>	</a:t>
+            </a:r>
+          </a:p>
+          <a:p>
+            <a:r>
+              <a:rPr lang="en-US" sz="2400" b="1" dirty="0">
+                <a:latin typeface="Helvetica Light" panose="020B0403020202020204" pitchFamily="34" charset="0"/>
+              </a:rPr>
+              <a:t>echo $@</a:t>
+            </a:r>
+          </a:p>
+          <a:p>
+            <a:r>
+              <a:rPr lang="en-US" sz="2400" b="1" dirty="0">
+                <a:latin typeface="Helvetica Light" panose="020B0403020202020204" pitchFamily="34" charset="0"/>
+              </a:rPr>
+              <a:t>echo $1</a:t>
+            </a:r>
+          </a:p>
+          <a:p>
+            <a:r>
+              <a:rPr lang="en-US" sz="2400" b="1" dirty="0">
+                <a:latin typeface="Helvetica Light" panose="020B0403020202020204" pitchFamily="34" charset="0"/>
+              </a:rPr>
+              <a:t>echo $2</a:t>
+            </a:r>
+          </a:p>
+        </p:txBody>
+      </p:sp>
+      <p:sp>
+        <p:nvSpPr>
+          <p:cNvPr id="4" name="TextBox 3">
+            <a:extLst>
+              <a:ext uri="{FF2B5EF4-FFF2-40B4-BE49-F238E27FC236}">
+                <a16:creationId xmlns:a16="http://schemas.microsoft.com/office/drawing/2014/main" id="{8096D306-8CD6-C848-80E8-55177B617D8C}"/>
+              </a:ext>
+            </a:extLst>
+          </p:cNvPr>
           <p:cNvSpPr txBox="1"/>
           <p:nvPr/>
         </p:nvSpPr>
         <p:spPr>
           <a:xfrm>
-            <a:off x="1434715" y="4592624"/>
-            <a:ext cx="4012219" cy="1446550"/>
+            <a:off x="6310675" y="3022705"/>
+            <a:ext cx="4746207" cy="1569660"/>
           </a:xfrm>
           <a:prstGeom prst="rect">
             <a:avLst/>
           </a:prstGeom>
           <a:noFill/>
-          <a:ln>
-            <a:noFill/>
+          <a:ln w="25400">
+            <a:solidFill>
+              <a:schemeClr val="tx1">
+                <a:lumMod val="75000"/>
+                <a:lumOff val="25000"/>
+              </a:schemeClr>
+            </a:solidFill>
           </a:ln>
         </p:spPr>
         <p:txBody>
@@ -7747,62 +7975,80 @@
           <a:lstStyle/>
           <a:p>
             <a:r>
-              <a:rPr lang="en-US" sz="2200" b="1" dirty="0">
-                <a:latin typeface="Helvetica Light" panose="020B0403020202020204" pitchFamily="34" charset="0"/>
-              </a:rPr>
-              <a:t>Note 1</a:t>
-            </a:r>
-            <a:r>
-              <a:rPr lang="en-US" sz="2200" dirty="0">
-                <a:latin typeface="Helvetica Light" panose="020B0403020202020204" pitchFamily="34" charset="0"/>
-              </a:rPr>
-              <a:t>: $</a:t>
-            </a:r>
-            <a:r>
-              <a:rPr lang="en-US" sz="2200" dirty="0" err="1">
-                <a:latin typeface="Helvetica Light" panose="020B0403020202020204" pitchFamily="34" charset="0"/>
-              </a:rPr>
-              <a:t>myfile</a:t>
-            </a:r>
-            <a:r>
-              <a:rPr lang="en-US" sz="2200" dirty="0">
-                <a:latin typeface="Helvetica Light" panose="020B0403020202020204" pitchFamily="34" charset="0"/>
-              </a:rPr>
-              <a:t> holds the contents of $@ in the loop. Note that </a:t>
-            </a:r>
-            <a:r>
-              <a:rPr lang="en-US" sz="2200" dirty="0" err="1">
-                <a:latin typeface="Helvetica Light" panose="020B0403020202020204" pitchFamily="34" charset="0"/>
-              </a:rPr>
-              <a:t>myfile</a:t>
-            </a:r>
-            <a:r>
-              <a:rPr lang="en-US" sz="2200" dirty="0">
-                <a:latin typeface="Helvetica Light" panose="020B0403020202020204" pitchFamily="34" charset="0"/>
-              </a:rPr>
-              <a:t> doesn’t have a $ on the first line </a:t>
-            </a:r>
-          </a:p>
-        </p:txBody>
-      </p:sp>
-      <p:sp>
-        <p:nvSpPr>
-          <p:cNvPr id="9" name="TextBox 8"/>
+              <a:rPr lang="en-US" sz="2400" b="1" dirty="0">
+                <a:latin typeface="Helvetica Light" panose="020B0403020202020204" pitchFamily="34" charset="0"/>
+              </a:rPr>
+              <a:t>$ bash </a:t>
+            </a:r>
+            <a:r>
+              <a:rPr lang="en-US" sz="2400" b="1" dirty="0" err="1">
+                <a:latin typeface="Helvetica Light" panose="020B0403020202020204" pitchFamily="34" charset="0"/>
+              </a:rPr>
+              <a:t>echo_stdin.sh</a:t>
+            </a:r>
+            <a:r>
+              <a:rPr lang="en-US" sz="2400" b="1" dirty="0">
+                <a:latin typeface="Helvetica Light" panose="020B0403020202020204" pitchFamily="34" charset="0"/>
+              </a:rPr>
+              <a:t> </a:t>
+            </a:r>
+            <a:r>
+              <a:rPr lang="en-US" sz="2400" b="1" dirty="0">
+                <a:solidFill>
+                  <a:srgbClr val="FF0000"/>
+                </a:solidFill>
+                <a:latin typeface="Helvetica Light" panose="020B0403020202020204" pitchFamily="34" charset="0"/>
+              </a:rPr>
+              <a:t>17 19 </a:t>
+            </a:r>
+          </a:p>
+          <a:p>
+            <a:r>
+              <a:rPr lang="en-US" sz="2400" b="1" dirty="0">
+                <a:latin typeface="Helvetica Light" panose="020B0403020202020204" pitchFamily="34" charset="0"/>
+              </a:rPr>
+              <a:t>17 19</a:t>
+            </a:r>
+          </a:p>
+          <a:p>
+            <a:r>
+              <a:rPr lang="en-US" sz="2400" b="1" dirty="0">
+                <a:latin typeface="Helvetica Light" panose="020B0403020202020204" pitchFamily="34" charset="0"/>
+              </a:rPr>
+              <a:t>17</a:t>
+            </a:r>
+          </a:p>
+          <a:p>
+            <a:r>
+              <a:rPr lang="en-US" sz="2400" b="1" dirty="0">
+                <a:latin typeface="Helvetica Light" panose="020B0403020202020204" pitchFamily="34" charset="0"/>
+              </a:rPr>
+              <a:t>19</a:t>
+            </a:r>
+          </a:p>
+        </p:txBody>
+      </p:sp>
+      <p:sp>
+        <p:nvSpPr>
+          <p:cNvPr id="5" name="TextBox 4">
+            <a:extLst>
+              <a:ext uri="{FF2B5EF4-FFF2-40B4-BE49-F238E27FC236}">
+                <a16:creationId xmlns:a16="http://schemas.microsoft.com/office/drawing/2014/main" id="{E96C3EFB-7617-744B-B51F-411E13CE1B91}"/>
+              </a:ext>
+            </a:extLst>
+          </p:cNvPr>
           <p:cNvSpPr txBox="1"/>
           <p:nvPr/>
         </p:nvSpPr>
         <p:spPr>
           <a:xfrm>
-            <a:off x="6096000" y="4603134"/>
-            <a:ext cx="5087007" cy="1446550"/>
+            <a:off x="6217920" y="1898810"/>
+            <a:ext cx="5462016" cy="830997"/>
           </a:xfrm>
           <a:prstGeom prst="rect">
             <a:avLst/>
           </a:prstGeom>
           <a:noFill/>
-          <a:ln>
-            <a:noFill/>
-          </a:ln>
         </p:spPr>
         <p:txBody>
           <a:bodyPr wrap="square" rtlCol="0">
@@ -7811,28 +8057,125 @@
           <a:lstStyle/>
           <a:p>
             <a:r>
-              <a:rPr lang="en-US" sz="2200" b="1" dirty="0">
-                <a:latin typeface="Helvetica Light" panose="020B0403020202020204" pitchFamily="34" charset="0"/>
-              </a:rPr>
-              <a:t>Note 2:  </a:t>
-            </a:r>
+              <a:rPr lang="en-US" sz="2400" dirty="0">
+                <a:latin typeface="Helvetica Light" panose="020B0403020202020204" pitchFamily="34" charset="0"/>
+              </a:rPr>
+              <a:t>Executing script on the left from the command line gets:</a:t>
+            </a:r>
+          </a:p>
+        </p:txBody>
+      </p:sp>
+      <p:sp>
+        <p:nvSpPr>
+          <p:cNvPr id="6" name="TextBox 5">
+            <a:extLst>
+              <a:ext uri="{FF2B5EF4-FFF2-40B4-BE49-F238E27FC236}">
+                <a16:creationId xmlns:a16="http://schemas.microsoft.com/office/drawing/2014/main" id="{F82DFA78-C1EC-8A4B-9CE2-8AE6CEA36FA2}"/>
+              </a:ext>
+            </a:extLst>
+          </p:cNvPr>
+          <p:cNvSpPr txBox="1"/>
+          <p:nvPr/>
+        </p:nvSpPr>
+        <p:spPr>
+          <a:xfrm>
+            <a:off x="848660" y="1898810"/>
+            <a:ext cx="5462016" cy="461665"/>
+          </a:xfrm>
+          <a:prstGeom prst="rect">
+            <a:avLst/>
+          </a:prstGeom>
+          <a:noFill/>
+        </p:spPr>
+        <p:txBody>
+          <a:bodyPr wrap="square" rtlCol="0">
+            <a:spAutoFit/>
+          </a:bodyPr>
+          <a:lstStyle/>
+          <a:p>
+            <a:r>
+              <a:rPr lang="en-US" sz="2400" dirty="0">
+                <a:latin typeface="Helvetica Light" panose="020B0403020202020204" pitchFamily="34" charset="0"/>
+              </a:rPr>
+              <a:t>Example script:</a:t>
+            </a:r>
+          </a:p>
+        </p:txBody>
+      </p:sp>
+      <p:cxnSp>
+        <p:nvCxnSpPr>
+          <p:cNvPr id="8" name="Straight Arrow Connector 7">
+            <a:extLst>
+              <a:ext uri="{FF2B5EF4-FFF2-40B4-BE49-F238E27FC236}">
+                <a16:creationId xmlns:a16="http://schemas.microsoft.com/office/drawing/2014/main" id="{2793672C-98DE-D956-44F6-A53B79221005}"/>
+              </a:ext>
+            </a:extLst>
+          </p:cNvPr>
+          <p:cNvCxnSpPr>
+            <a:cxnSpLocks/>
+          </p:cNvCxnSpPr>
+          <p:nvPr/>
+        </p:nvCxnSpPr>
+        <p:spPr>
+          <a:xfrm flipH="1" flipV="1">
+            <a:off x="9829274" y="3626069"/>
+            <a:ext cx="180358" cy="1259194"/>
+          </a:xfrm>
+          <a:prstGeom prst="straightConnector1">
+            <a:avLst/>
+          </a:prstGeom>
+          <a:ln w="25400">
+            <a:tailEnd type="triangle"/>
+          </a:ln>
+        </p:spPr>
+        <p:style>
+          <a:lnRef idx="1">
+            <a:schemeClr val="accent1"/>
+          </a:lnRef>
+          <a:fillRef idx="0">
+            <a:schemeClr val="accent1"/>
+          </a:fillRef>
+          <a:effectRef idx="0">
+            <a:schemeClr val="accent1"/>
+          </a:effectRef>
+          <a:fontRef idx="minor">
+            <a:schemeClr val="tx1"/>
+          </a:fontRef>
+        </p:style>
+      </p:cxnSp>
+      <p:sp>
+        <p:nvSpPr>
+          <p:cNvPr id="12" name="TextBox 11">
+            <a:extLst>
+              <a:ext uri="{FF2B5EF4-FFF2-40B4-BE49-F238E27FC236}">
+                <a16:creationId xmlns:a16="http://schemas.microsoft.com/office/drawing/2014/main" id="{75344097-D101-2748-41B4-BAC0EBB4E7D3}"/>
+              </a:ext>
+            </a:extLst>
+          </p:cNvPr>
+          <p:cNvSpPr txBox="1"/>
+          <p:nvPr/>
+        </p:nvSpPr>
+        <p:spPr>
+          <a:xfrm>
+            <a:off x="8166018" y="5146363"/>
+            <a:ext cx="3687228" cy="430887"/>
+          </a:xfrm>
+          <a:prstGeom prst="rect">
+            <a:avLst/>
+          </a:prstGeom>
+          <a:noFill/>
+        </p:spPr>
+        <p:txBody>
+          <a:bodyPr wrap="none" rtlCol="0">
+            <a:spAutoFit/>
+          </a:bodyPr>
+          <a:lstStyle/>
+          <a:p>
             <a:r>
               <a:rPr lang="en-US" sz="2200" dirty="0">
                 <a:latin typeface="Helvetica Light" panose="020B0403020202020204" pitchFamily="34" charset="0"/>
               </a:rPr>
-              <a:t>&amp;&gt; is used to create a new file </a:t>
-            </a:r>
-            <a:r>
-              <a:rPr lang="en-US" sz="2200">
-                <a:latin typeface="Helvetica Light" panose="020B0403020202020204" pitchFamily="34" charset="0"/>
-              </a:rPr>
-              <a:t>via redirection </a:t>
-            </a:r>
-            <a:r>
-              <a:rPr lang="en-US" sz="2200" dirty="0">
-                <a:latin typeface="Helvetica Light" panose="020B0403020202020204" pitchFamily="34" charset="0"/>
-              </a:rPr>
-              <a:t>for the output. Because it is inside the loop, a new file will be created for each object in STDIN</a:t>
+              <a:t>Arguments passed to script</a:t>
             </a:r>
           </a:p>
         </p:txBody>
@@ -7840,7 +8183,7 @@
     </p:spTree>
     <p:extLst>
       <p:ext uri="{BB962C8B-B14F-4D97-AF65-F5344CB8AC3E}">
-        <p14:creationId xmlns:p14="http://schemas.microsoft.com/office/powerpoint/2010/main" val="3138492856"/>
+        <p14:creationId xmlns:p14="http://schemas.microsoft.com/office/powerpoint/2010/main" val="2111321315"/>
       </p:ext>
     </p:extLst>
   </p:cSld>
@@ -7869,20 +8212,14 @@
       </p:grpSpPr>
       <p:sp>
         <p:nvSpPr>
-          <p:cNvPr id="2" name="TextBox 1">
-            <a:extLst>
-              <a:ext uri="{FF2B5EF4-FFF2-40B4-BE49-F238E27FC236}">
-                <a16:creationId xmlns:a16="http://schemas.microsoft.com/office/drawing/2014/main" id="{14DB713A-FC87-2A49-AFF2-27ECBC84D063}"/>
-              </a:ext>
-            </a:extLst>
-          </p:cNvPr>
+          <p:cNvPr id="4" name="TextBox 3"/>
           <p:cNvSpPr txBox="1"/>
           <p:nvPr/>
         </p:nvSpPr>
         <p:spPr>
           <a:xfrm>
-            <a:off x="1217100" y="492533"/>
-            <a:ext cx="9757799" cy="600164"/>
+            <a:off x="2201971" y="370657"/>
+            <a:ext cx="8263472" cy="523220"/>
           </a:xfrm>
           <a:prstGeom prst="rect">
             <a:avLst/>
@@ -7890,219 +8227,256 @@
           <a:noFill/>
         </p:spPr>
         <p:txBody>
-          <a:bodyPr wrap="none" rtlCol="0">
+          <a:bodyPr wrap="square" rtlCol="0">
             <a:spAutoFit/>
           </a:bodyPr>
           <a:lstStyle/>
           <a:p>
             <a:r>
-              <a:rPr lang="en-US" sz="3200" dirty="0">
-                <a:latin typeface="Helvetica Light" panose="020B0403020202020204" pitchFamily="34" charset="0"/>
-              </a:rPr>
-              <a:t>Installing software packages on Mac Unix systems</a:t>
-            </a:r>
-          </a:p>
-        </p:txBody>
-      </p:sp>
-      <p:sp>
-        <p:nvSpPr>
-          <p:cNvPr id="4" name="Rectangle 3">
-            <a:extLst>
-              <a:ext uri="{FF2B5EF4-FFF2-40B4-BE49-F238E27FC236}">
-                <a16:creationId xmlns:a16="http://schemas.microsoft.com/office/drawing/2014/main" id="{8A5E173C-8799-6C43-815D-A5102D4C9D62}"/>
-              </a:ext>
-            </a:extLst>
-          </p:cNvPr>
-          <p:cNvSpPr/>
+              <a:rPr lang="en-US" sz="2800" dirty="0">
+                <a:latin typeface="Helvetica Light" panose="020B0403020202020204" pitchFamily="34" charset="0"/>
+              </a:rPr>
+              <a:t>Looping through STDIN to perform tasks</a:t>
+            </a:r>
+          </a:p>
+        </p:txBody>
+      </p:sp>
+      <p:sp>
+        <p:nvSpPr>
+          <p:cNvPr id="5" name="TextBox 4"/>
+          <p:cNvSpPr txBox="1"/>
           <p:nvPr/>
         </p:nvSpPr>
         <p:spPr>
           <a:xfrm>
-            <a:off x="730435" y="1588326"/>
-            <a:ext cx="11178030" cy="1384995"/>
+            <a:off x="1434715" y="1272221"/>
+            <a:ext cx="8087659" cy="2800767"/>
           </a:xfrm>
           <a:prstGeom prst="rect">
             <a:avLst/>
           </a:prstGeom>
-        </p:spPr>
-        <p:txBody>
-          <a:bodyPr wrap="square">
+          <a:noFill/>
+          <a:ln>
+            <a:solidFill>
+              <a:schemeClr val="tx1">
+                <a:lumMod val="75000"/>
+                <a:lumOff val="25000"/>
+              </a:schemeClr>
+            </a:solidFill>
+          </a:ln>
+        </p:spPr>
+        <p:txBody>
+          <a:bodyPr wrap="square" rtlCol="0">
             <a:spAutoFit/>
           </a:bodyPr>
           <a:lstStyle/>
           <a:p>
             <a:r>
-              <a:rPr lang="en-US" sz="2800" b="1" dirty="0">
-                <a:latin typeface="Helvetica Light" panose="020B0403020202020204" pitchFamily="34" charset="0"/>
-              </a:rPr>
-              <a:t>Homebrew (brew)</a:t>
-            </a:r>
-            <a:r>
-              <a:rPr lang="en-US" sz="2800" dirty="0">
-                <a:latin typeface="Helvetica Light" panose="020B0403020202020204" pitchFamily="34" charset="0"/>
-              </a:rPr>
-              <a:t>: installation, management, updates, and removal of software, without having to install from source code for Mac OS Unix. Super helpful, and easy</a:t>
-            </a:r>
-          </a:p>
-        </p:txBody>
-      </p:sp>
-      <p:sp>
-        <p:nvSpPr>
-          <p:cNvPr id="6" name="Rectangle 5">
-            <a:extLst>
-              <a:ext uri="{FF2B5EF4-FFF2-40B4-BE49-F238E27FC236}">
-                <a16:creationId xmlns:a16="http://schemas.microsoft.com/office/drawing/2014/main" id="{4B76C6D8-5578-064E-B3CD-76C5D07F6059}"/>
-              </a:ext>
-            </a:extLst>
-          </p:cNvPr>
-          <p:cNvSpPr/>
+              <a:rPr lang="en-US" sz="2200" dirty="0">
+                <a:latin typeface="Helvetica Light" panose="020B0403020202020204" pitchFamily="34" charset="0"/>
+              </a:rPr>
+              <a:t>#!/bin/bash</a:t>
+            </a:r>
+          </a:p>
+          <a:p>
+            <a:r>
+              <a:rPr lang="en-US" sz="2200" dirty="0">
+                <a:latin typeface="Helvetica Light" panose="020B0403020202020204" pitchFamily="34" charset="0"/>
+              </a:rPr>
+              <a:t>## cut_column7.sh </a:t>
+            </a:r>
+          </a:p>
+          <a:p>
+            <a:r>
+              <a:rPr lang="en-US" sz="2200" dirty="0">
+                <a:latin typeface="Helvetica Light" panose="020B0403020202020204" pitchFamily="34" charset="0"/>
+              </a:rPr>
+              <a:t>## description: cuts 7th column from any number of input files</a:t>
+            </a:r>
+          </a:p>
+          <a:p>
+            <a:r>
+              <a:rPr lang="en-US" sz="2200" dirty="0">
+                <a:latin typeface="Helvetica Light" panose="020B0403020202020204" pitchFamily="34" charset="0"/>
+              </a:rPr>
+              <a:t>## usage: bash cut_column7.sh STDIN</a:t>
+            </a:r>
+          </a:p>
+          <a:p>
+            <a:endParaRPr lang="en-US" sz="2200" dirty="0">
+              <a:latin typeface="Helvetica Light" panose="020B0403020202020204" pitchFamily="34" charset="0"/>
+            </a:endParaRPr>
+          </a:p>
+          <a:p>
+            <a:r>
+              <a:rPr lang="en-US" sz="2200" b="1" dirty="0">
+                <a:latin typeface="Helvetica Light" panose="020B0403020202020204" pitchFamily="34" charset="0"/>
+              </a:rPr>
+              <a:t>for </a:t>
+            </a:r>
+            <a:r>
+              <a:rPr lang="en-US" sz="2200" b="1" dirty="0" err="1">
+                <a:latin typeface="Helvetica Light" panose="020B0403020202020204" pitchFamily="34" charset="0"/>
+              </a:rPr>
+              <a:t>myfile</a:t>
+            </a:r>
+            <a:r>
+              <a:rPr lang="en-US" sz="2200" b="1" dirty="0">
+                <a:latin typeface="Helvetica Light" panose="020B0403020202020204" pitchFamily="34" charset="0"/>
+              </a:rPr>
+              <a:t> in $@; do</a:t>
+            </a:r>
+          </a:p>
+          <a:p>
+            <a:r>
+              <a:rPr lang="en-US" sz="2200" b="1" dirty="0">
+                <a:latin typeface="Helvetica Light" panose="020B0403020202020204" pitchFamily="34" charset="0"/>
+              </a:rPr>
+              <a:t>	cut -f 7 $</a:t>
+            </a:r>
+            <a:r>
+              <a:rPr lang="en-US" sz="2200" b="1" dirty="0" err="1">
+                <a:latin typeface="Helvetica Light" panose="020B0403020202020204" pitchFamily="34" charset="0"/>
+              </a:rPr>
+              <a:t>myfile</a:t>
+            </a:r>
+            <a:r>
+              <a:rPr lang="en-US" sz="2200" b="1" dirty="0">
+                <a:latin typeface="Helvetica Light" panose="020B0403020202020204" pitchFamily="34" charset="0"/>
+              </a:rPr>
+              <a:t> &amp;&gt; $myfile.column7.txt</a:t>
+            </a:r>
+          </a:p>
+          <a:p>
+            <a:r>
+              <a:rPr lang="en-US" sz="2200" b="1" dirty="0">
+                <a:latin typeface="Helvetica Light" panose="020B0403020202020204" pitchFamily="34" charset="0"/>
+              </a:rPr>
+              <a:t>done</a:t>
+            </a:r>
+          </a:p>
+        </p:txBody>
+      </p:sp>
+      <p:sp>
+        <p:nvSpPr>
+          <p:cNvPr id="2" name="TextBox 1"/>
+          <p:cNvSpPr txBox="1"/>
           <p:nvPr/>
         </p:nvSpPr>
         <p:spPr>
           <a:xfrm>
-            <a:off x="730435" y="3364416"/>
-            <a:ext cx="10403457" cy="492443"/>
+            <a:off x="1434715" y="4592624"/>
+            <a:ext cx="4012219" cy="1446550"/>
           </a:xfrm>
           <a:prstGeom prst="rect">
             <a:avLst/>
           </a:prstGeom>
-        </p:spPr>
-        <p:txBody>
-          <a:bodyPr wrap="square">
+          <a:noFill/>
+          <a:ln>
+            <a:noFill/>
+          </a:ln>
+        </p:spPr>
+        <p:txBody>
+          <a:bodyPr wrap="square" rtlCol="0">
             <a:spAutoFit/>
           </a:bodyPr>
           <a:lstStyle/>
           <a:p>
             <a:r>
-              <a:rPr lang="en-US" sz="2600" dirty="0">
-                <a:latin typeface="Helvetica Light" panose="020B0403020202020204" pitchFamily="34" charset="0"/>
-              </a:rPr>
-              <a:t>-    Installation instructions in </a:t>
-            </a:r>
-            <a:r>
-              <a:rPr lang="en-US" sz="2600" dirty="0" err="1">
-                <a:latin typeface="Helvetica Light" panose="020B0403020202020204" pitchFamily="34" charset="0"/>
-              </a:rPr>
-              <a:t>unixIV</a:t>
-            </a:r>
-            <a:r>
-              <a:rPr lang="en-US" sz="2600" dirty="0">
-                <a:latin typeface="Helvetica Light" panose="020B0403020202020204" pitchFamily="34" charset="0"/>
-              </a:rPr>
-              <a:t> primer</a:t>
-            </a:r>
-          </a:p>
-        </p:txBody>
-      </p:sp>
-      <p:sp>
-        <p:nvSpPr>
-          <p:cNvPr id="7" name="Rectangle 6">
-            <a:extLst>
-              <a:ext uri="{FF2B5EF4-FFF2-40B4-BE49-F238E27FC236}">
-                <a16:creationId xmlns:a16="http://schemas.microsoft.com/office/drawing/2014/main" id="{28F71618-B7AC-8742-B007-EF674B2AF606}"/>
-              </a:ext>
-            </a:extLst>
-          </p:cNvPr>
-          <p:cNvSpPr/>
+              <a:rPr lang="en-US" sz="2200" b="1" dirty="0">
+                <a:latin typeface="Helvetica Light" panose="020B0403020202020204" pitchFamily="34" charset="0"/>
+              </a:rPr>
+              <a:t>Note 1</a:t>
+            </a:r>
+            <a:r>
+              <a:rPr lang="en-US" sz="2200" dirty="0">
+                <a:latin typeface="Helvetica Light" panose="020B0403020202020204" pitchFamily="34" charset="0"/>
+              </a:rPr>
+              <a:t>: $</a:t>
+            </a:r>
+            <a:r>
+              <a:rPr lang="en-US" sz="2200" dirty="0" err="1">
+                <a:latin typeface="Helvetica Light" panose="020B0403020202020204" pitchFamily="34" charset="0"/>
+              </a:rPr>
+              <a:t>myfile</a:t>
+            </a:r>
+            <a:r>
+              <a:rPr lang="en-US" sz="2200" dirty="0">
+                <a:latin typeface="Helvetica Light" panose="020B0403020202020204" pitchFamily="34" charset="0"/>
+              </a:rPr>
+              <a:t> holds the contents of $@ in the loop. Note that </a:t>
+            </a:r>
+            <a:r>
+              <a:rPr lang="en-US" sz="2200" dirty="0" err="1">
+                <a:latin typeface="Helvetica Light" panose="020B0403020202020204" pitchFamily="34" charset="0"/>
+              </a:rPr>
+              <a:t>myfile</a:t>
+            </a:r>
+            <a:r>
+              <a:rPr lang="en-US" sz="2200" dirty="0">
+                <a:latin typeface="Helvetica Light" panose="020B0403020202020204" pitchFamily="34" charset="0"/>
+              </a:rPr>
+              <a:t> doesn’t have a $ on the first line </a:t>
+            </a:r>
+          </a:p>
+        </p:txBody>
+      </p:sp>
+      <p:sp>
+        <p:nvSpPr>
+          <p:cNvPr id="9" name="TextBox 8"/>
+          <p:cNvSpPr txBox="1"/>
           <p:nvPr/>
         </p:nvSpPr>
         <p:spPr>
           <a:xfrm>
-            <a:off x="506984" y="4449973"/>
-            <a:ext cx="11178030" cy="2554545"/>
+            <a:off x="6096000" y="4603134"/>
+            <a:ext cx="5087007" cy="1446550"/>
           </a:xfrm>
           <a:prstGeom prst="rect">
             <a:avLst/>
           </a:prstGeom>
-        </p:spPr>
-        <p:txBody>
-          <a:bodyPr wrap="square">
+          <a:noFill/>
+          <a:ln>
+            <a:noFill/>
+          </a:ln>
+        </p:spPr>
+        <p:txBody>
+          <a:bodyPr wrap="square" rtlCol="0">
             <a:spAutoFit/>
           </a:bodyPr>
           <a:lstStyle/>
           <a:p>
             <a:r>
-              <a:rPr lang="en-US" sz="2400" b="1" dirty="0">
-                <a:latin typeface="Helvetica Light" panose="020B0403020202020204" pitchFamily="34" charset="0"/>
-              </a:rPr>
-              <a:t>Useful tutorials at: </a:t>
-            </a:r>
-            <a:endParaRPr lang="en-US" sz="2600" b="1" dirty="0">
-              <a:latin typeface="Helvetica Light" panose="020B0403020202020204" pitchFamily="34" charset="0"/>
-            </a:endParaRPr>
-          </a:p>
-          <a:p>
+              <a:rPr lang="en-US" sz="2200" b="1" dirty="0">
+                <a:latin typeface="Helvetica Light" panose="020B0403020202020204" pitchFamily="34" charset="0"/>
+              </a:rPr>
+              <a:t>Note 2:  </a:t>
+            </a:r>
             <a:r>
               <a:rPr lang="en-US" sz="2200" dirty="0">
                 <a:latin typeface="Helvetica Light" panose="020B0403020202020204" pitchFamily="34" charset="0"/>
               </a:rPr>
-              <a:t>https://</a:t>
-            </a:r>
-            <a:r>
-              <a:rPr lang="en-US" sz="2200" dirty="0" err="1">
-                <a:latin typeface="Helvetica Light" panose="020B0403020202020204" pitchFamily="34" charset="0"/>
-              </a:rPr>
-              <a:t>www.infoworld.com</a:t>
+              <a:t>&amp;&gt; is used to create a new file </a:t>
+            </a:r>
+            <a:r>
+              <a:rPr lang="en-US" sz="2200">
+                <a:latin typeface="Helvetica Light" panose="020B0403020202020204" pitchFamily="34" charset="0"/>
+              </a:rPr>
+              <a:t>via redirection </a:t>
             </a:r>
             <a:r>
               <a:rPr lang="en-US" sz="2200" dirty="0">
                 <a:latin typeface="Helvetica Light" panose="020B0403020202020204" pitchFamily="34" charset="0"/>
               </a:rPr>
-              <a:t>/article/3328824/homebrew-tutorial-how-to-use-homebrew-for-</a:t>
-            </a:r>
-            <a:r>
-              <a:rPr lang="en-US" sz="2200" dirty="0" err="1">
-                <a:latin typeface="Helvetica Light" panose="020B0403020202020204" pitchFamily="34" charset="0"/>
-              </a:rPr>
-              <a:t>macos.html</a:t>
-            </a:r>
-            <a:endParaRPr lang="en-US" sz="2200" dirty="0">
-              <a:latin typeface="Helvetica Light" panose="020B0403020202020204" pitchFamily="34" charset="0"/>
-            </a:endParaRPr>
-          </a:p>
-          <a:p>
-            <a:r>
-              <a:rPr lang="en-US" sz="2200" dirty="0">
-                <a:latin typeface="Helvetica Light" panose="020B0403020202020204" pitchFamily="34" charset="0"/>
-              </a:rPr>
-              <a:t>     </a:t>
-            </a:r>
-          </a:p>
-          <a:p>
-            <a:r>
-              <a:rPr lang="en-US" sz="2200" dirty="0">
-                <a:latin typeface="Helvetica Light" panose="020B0403020202020204" pitchFamily="34" charset="0"/>
-              </a:rPr>
-              <a:t>https://</a:t>
-            </a:r>
-            <a:r>
-              <a:rPr lang="en-US" sz="2200" dirty="0" err="1">
-                <a:latin typeface="Helvetica Light" panose="020B0403020202020204" pitchFamily="34" charset="0"/>
-              </a:rPr>
-              <a:t>www.howtogeek.com</a:t>
-            </a:r>
-            <a:r>
-              <a:rPr lang="en-US" sz="2200" dirty="0">
-                <a:latin typeface="Helvetica Light" panose="020B0403020202020204" pitchFamily="34" charset="0"/>
-              </a:rPr>
-              <a:t>/211541/homebrew-for-os-x-easily-installs-desktop-apps-and-terminal-utilities/</a:t>
-            </a:r>
-          </a:p>
-          <a:p>
-            <a:pPr marL="457200" indent="-457200">
-              <a:buFontTx/>
-              <a:buChar char="-"/>
-            </a:pPr>
-            <a:endParaRPr lang="en-US" sz="2600" dirty="0">
-              <a:latin typeface="Helvetica Light" panose="020B0403020202020204" pitchFamily="34" charset="0"/>
-            </a:endParaRPr>
+              <a:t>for the output. Because it is inside the loop, a new file will be created for each object in STDIN</a:t>
+            </a:r>
           </a:p>
         </p:txBody>
       </p:sp>
     </p:spTree>
     <p:extLst>
       <p:ext uri="{BB962C8B-B14F-4D97-AF65-F5344CB8AC3E}">
-        <p14:creationId xmlns:p14="http://schemas.microsoft.com/office/powerpoint/2010/main" val="2381475697"/>
+        <p14:creationId xmlns:p14="http://schemas.microsoft.com/office/powerpoint/2010/main" val="3138492856"/>
       </p:ext>
     </p:extLst>
   </p:cSld>
@@ -8134,7 +8508,7 @@
           <p:cNvPr id="2" name="TextBox 1">
             <a:extLst>
               <a:ext uri="{FF2B5EF4-FFF2-40B4-BE49-F238E27FC236}">
-                <a16:creationId xmlns:a16="http://schemas.microsoft.com/office/drawing/2014/main" id="{56BFBCD1-DE4B-6B4B-B08C-2804422C0D53}"/>
+                <a16:creationId xmlns:a16="http://schemas.microsoft.com/office/drawing/2014/main" id="{14DB713A-FC87-2A49-AFF2-27ECBC84D063}"/>
               </a:ext>
             </a:extLst>
           </p:cNvPr>
@@ -8143,8 +8517,8 @@
         </p:nvSpPr>
         <p:spPr>
           <a:xfrm>
-            <a:off x="2028688" y="436336"/>
-            <a:ext cx="7806945" cy="600164"/>
+            <a:off x="1217100" y="492533"/>
+            <a:ext cx="9757799" cy="600164"/>
           </a:xfrm>
           <a:prstGeom prst="rect">
             <a:avLst/>
@@ -8158,20 +8532,11 @@
           <a:lstStyle/>
           <a:p>
             <a:r>
-              <a:rPr lang="en-US" sz="3300" dirty="0">
-                <a:latin typeface="Helvetica Light" panose="020B0403020202020204" pitchFamily="34" charset="0"/>
-              </a:rPr>
-              <a:t>Installing software packages using </a:t>
-            </a:r>
-            <a:r>
-              <a:rPr lang="en-US" sz="3300" b="1" dirty="0">
-                <a:latin typeface="Helvetica Light" panose="020B0403020202020204" pitchFamily="34" charset="0"/>
-              </a:rPr>
-              <a:t>brew</a:t>
-            </a:r>
-            <a:endParaRPr lang="en-US" sz="3300" dirty="0">
-              <a:latin typeface="Helvetica Light" panose="020B0403020202020204" pitchFamily="34" charset="0"/>
-            </a:endParaRPr>
+              <a:rPr lang="en-US" sz="3200" dirty="0">
+                <a:latin typeface="Helvetica Light" panose="020B0403020202020204" pitchFamily="34" charset="0"/>
+              </a:rPr>
+              <a:t>Installing software packages on Mac Unix systems</a:t>
+            </a:r>
           </a:p>
         </p:txBody>
       </p:sp>
@@ -8180,7 +8545,7 @@
           <p:cNvPr id="4" name="Rectangle 3">
             <a:extLst>
               <a:ext uri="{FF2B5EF4-FFF2-40B4-BE49-F238E27FC236}">
-                <a16:creationId xmlns:a16="http://schemas.microsoft.com/office/drawing/2014/main" id="{78F9D977-986C-DB42-9DED-595A715F7972}"/>
+                <a16:creationId xmlns:a16="http://schemas.microsoft.com/office/drawing/2014/main" id="{8A5E173C-8799-6C43-815D-A5102D4C9D62}"/>
               </a:ext>
             </a:extLst>
           </p:cNvPr>
@@ -8189,8 +8554,8 @@
         </p:nvSpPr>
         <p:spPr>
           <a:xfrm>
-            <a:off x="751697" y="2192645"/>
-            <a:ext cx="10403457" cy="892552"/>
+            <a:off x="730435" y="1588326"/>
+            <a:ext cx="11178030" cy="1384995"/>
           </a:xfrm>
           <a:prstGeom prst="rect">
             <a:avLst/>
@@ -8203,45 +8568,16 @@
           <a:lstStyle/>
           <a:p>
             <a:r>
-              <a:rPr lang="en-US" sz="2600" b="1" dirty="0">
-                <a:latin typeface="Helvetica Light" panose="020B0403020202020204" pitchFamily="34" charset="0"/>
-              </a:rPr>
-              <a:t>$ brew install </a:t>
-            </a:r>
-            <a:r>
-              <a:rPr lang="en-US" sz="2600" b="1" dirty="0" err="1">
-                <a:latin typeface="Helvetica Light" panose="020B0403020202020204" pitchFamily="34" charset="0"/>
-              </a:rPr>
-              <a:t>htop</a:t>
-            </a:r>
-            <a:endParaRPr lang="en-US" sz="2600" b="1" dirty="0">
-              <a:latin typeface="Helvetica Light" panose="020B0403020202020204" pitchFamily="34" charset="0"/>
-            </a:endParaRPr>
-          </a:p>
-          <a:p>
-            <a:r>
-              <a:rPr lang="en-US" sz="2600" b="1" dirty="0">
-                <a:latin typeface="Helvetica Light" panose="020B0403020202020204" pitchFamily="34" charset="0"/>
-              </a:rPr>
-              <a:t>	#</a:t>
-            </a:r>
-            <a:r>
-              <a:rPr lang="en-US" sz="2600" b="1" dirty="0" err="1">
-                <a:latin typeface="Helvetica Light" panose="020B0403020202020204" pitchFamily="34" charset="0"/>
-              </a:rPr>
-              <a:t>htop</a:t>
-            </a:r>
-            <a:r>
-              <a:rPr lang="en-US" sz="2600" b="1" dirty="0">
-                <a:latin typeface="Helvetica Light" panose="020B0403020202020204" pitchFamily="34" charset="0"/>
-              </a:rPr>
-              <a:t> </a:t>
-            </a:r>
-            <a:r>
-              <a:rPr lang="en-US" sz="2600" dirty="0">
-                <a:latin typeface="Helvetica Light" panose="020B0403020202020204" pitchFamily="34" charset="0"/>
-              </a:rPr>
-              <a:t>is not installed in base Mac Unix, yet very useful to have</a:t>
+              <a:rPr lang="en-US" sz="2800" b="1" dirty="0">
+                <a:latin typeface="Helvetica Light" panose="020B0403020202020204" pitchFamily="34" charset="0"/>
+              </a:rPr>
+              <a:t>Homebrew (brew)</a:t>
+            </a:r>
+            <a:r>
+              <a:rPr lang="en-US" sz="2800" dirty="0">
+                <a:latin typeface="Helvetica Light" panose="020B0403020202020204" pitchFamily="34" charset="0"/>
+              </a:rPr>
+              <a:t>: installation, management, updates, and removal of software, without having to install from source code for Mac OS Unix. Super helpful, and easy</a:t>
             </a:r>
           </a:p>
         </p:txBody>
@@ -8251,7 +8587,7 @@
           <p:cNvPr id="6" name="Rectangle 5">
             <a:extLst>
               <a:ext uri="{FF2B5EF4-FFF2-40B4-BE49-F238E27FC236}">
-                <a16:creationId xmlns:a16="http://schemas.microsoft.com/office/drawing/2014/main" id="{7A9F3758-94D5-8945-9D58-90A592CB2E36}"/>
+                <a16:creationId xmlns:a16="http://schemas.microsoft.com/office/drawing/2014/main" id="{4B76C6D8-5578-064E-B3CD-76C5D07F6059}"/>
               </a:ext>
             </a:extLst>
           </p:cNvPr>
@@ -8260,8 +8596,8 @@
         </p:nvSpPr>
         <p:spPr>
           <a:xfrm>
-            <a:off x="751696" y="3843670"/>
-            <a:ext cx="10403457" cy="892552"/>
+            <a:off x="730435" y="3364416"/>
+            <a:ext cx="10403457" cy="492443"/>
           </a:xfrm>
           <a:prstGeom prst="rect">
             <a:avLst/>
@@ -8274,16 +8610,58 @@
           <a:lstStyle/>
           <a:p>
             <a:r>
-              <a:rPr lang="en-US" sz="2600" b="1" dirty="0">
-                <a:latin typeface="Helvetica Light" panose="020B0403020202020204" pitchFamily="34" charset="0"/>
-              </a:rPr>
-              <a:t>$ brew install </a:t>
-            </a:r>
-            <a:r>
-              <a:rPr lang="en-US" sz="2600" b="1" dirty="0" err="1">
-                <a:latin typeface="Helvetica Light" panose="020B0403020202020204" pitchFamily="34" charset="0"/>
-              </a:rPr>
-              <a:t>wget</a:t>
+              <a:rPr lang="en-US" sz="2600" dirty="0">
+                <a:latin typeface="Helvetica Light" panose="020B0403020202020204" pitchFamily="34" charset="0"/>
+              </a:rPr>
+              <a:t>-    Installation instructions in </a:t>
+            </a:r>
+            <a:r>
+              <a:rPr lang="en-US" sz="2600" dirty="0" err="1">
+                <a:latin typeface="Helvetica Light" panose="020B0403020202020204" pitchFamily="34" charset="0"/>
+              </a:rPr>
+              <a:t>unixIV</a:t>
+            </a:r>
+            <a:r>
+              <a:rPr lang="en-US" sz="2600" dirty="0">
+                <a:latin typeface="Helvetica Light" panose="020B0403020202020204" pitchFamily="34" charset="0"/>
+              </a:rPr>
+              <a:t> primer</a:t>
+            </a:r>
+          </a:p>
+        </p:txBody>
+      </p:sp>
+      <p:sp>
+        <p:nvSpPr>
+          <p:cNvPr id="7" name="Rectangle 6">
+            <a:extLst>
+              <a:ext uri="{FF2B5EF4-FFF2-40B4-BE49-F238E27FC236}">
+                <a16:creationId xmlns:a16="http://schemas.microsoft.com/office/drawing/2014/main" id="{28F71618-B7AC-8742-B007-EF674B2AF606}"/>
+              </a:ext>
+            </a:extLst>
+          </p:cNvPr>
+          <p:cNvSpPr/>
+          <p:nvPr/>
+        </p:nvSpPr>
+        <p:spPr>
+          <a:xfrm>
+            <a:off x="506984" y="4449973"/>
+            <a:ext cx="11178030" cy="2554545"/>
+          </a:xfrm>
+          <a:prstGeom prst="rect">
+            <a:avLst/>
+          </a:prstGeom>
+        </p:spPr>
+        <p:txBody>
+          <a:bodyPr wrap="square">
+            <a:spAutoFit/>
+          </a:bodyPr>
+          <a:lstStyle/>
+          <a:p>
+            <a:r>
+              <a:rPr lang="en-US" sz="2400" b="1" dirty="0">
+                <a:latin typeface="Helvetica Light" panose="020B0403020202020204" pitchFamily="34" charset="0"/>
+              </a:rPr>
+              <a:t>Useful tutorials at: </a:t>
             </a:r>
             <a:endParaRPr lang="en-US" sz="2600" b="1" dirty="0">
               <a:latin typeface="Helvetica Light" panose="020B0403020202020204" pitchFamily="34" charset="0"/>
@@ -8291,36 +8669,76 @@
           </a:p>
           <a:p>
             <a:r>
-              <a:rPr lang="en-US" sz="2600" b="1" dirty="0">
-                <a:latin typeface="Helvetica Light" panose="020B0403020202020204" pitchFamily="34" charset="0"/>
-              </a:rPr>
-              <a:t>	#</a:t>
-            </a:r>
-            <a:r>
-              <a:rPr lang="en-US" sz="2600" b="1" dirty="0" err="1">
-                <a:latin typeface="Helvetica Light" panose="020B0403020202020204" pitchFamily="34" charset="0"/>
-              </a:rPr>
-              <a:t>wget</a:t>
-            </a:r>
-            <a:r>
-              <a:rPr lang="en-US" sz="2600" b="1" dirty="0">
-                <a:latin typeface="Helvetica Light" panose="020B0403020202020204" pitchFamily="34" charset="0"/>
-              </a:rPr>
-              <a:t> </a:t>
-            </a:r>
-            <a:r>
-              <a:rPr lang="en-US" sz="2600" dirty="0">
-                <a:latin typeface="Helvetica Light" panose="020B0403020202020204" pitchFamily="34" charset="0"/>
-              </a:rPr>
-              <a:t>is not installed in base Mac Unix, yet very useful to have</a:t>
-            </a:r>
+              <a:rPr lang="en-US" sz="2200" dirty="0">
+                <a:latin typeface="Helvetica Light" panose="020B0403020202020204" pitchFamily="34" charset="0"/>
+              </a:rPr>
+              <a:t>https://</a:t>
+            </a:r>
+            <a:r>
+              <a:rPr lang="en-US" sz="2200" dirty="0" err="1">
+                <a:latin typeface="Helvetica Light" panose="020B0403020202020204" pitchFamily="34" charset="0"/>
+              </a:rPr>
+              <a:t>www.infoworld.com</a:t>
+            </a:r>
+            <a:r>
+              <a:rPr lang="en-US" sz="2200" dirty="0">
+                <a:latin typeface="Helvetica Light" panose="020B0403020202020204" pitchFamily="34" charset="0"/>
+              </a:rPr>
+              <a:t>/article/3328824/homebrew-tutorial-how-to-use-homebrew-for-</a:t>
+            </a:r>
+            <a:r>
+              <a:rPr lang="en-US" sz="2200" dirty="0" err="1">
+                <a:latin typeface="Helvetica Light" panose="020B0403020202020204" pitchFamily="34" charset="0"/>
+              </a:rPr>
+              <a:t>macos.html</a:t>
+            </a:r>
+            <a:endParaRPr lang="en-US" sz="2200" dirty="0">
+              <a:latin typeface="Helvetica Light" panose="020B0403020202020204" pitchFamily="34" charset="0"/>
+            </a:endParaRPr>
+          </a:p>
+          <a:p>
+            <a:r>
+              <a:rPr lang="en-US" sz="2200" dirty="0">
+                <a:latin typeface="Helvetica Light" panose="020B0403020202020204" pitchFamily="34" charset="0"/>
+              </a:rPr>
+              <a:t>     </a:t>
+            </a:r>
+          </a:p>
+          <a:p>
+            <a:r>
+              <a:rPr lang="en-US" sz="2200" dirty="0">
+                <a:latin typeface="Helvetica Light" panose="020B0403020202020204" pitchFamily="34" charset="0"/>
+              </a:rPr>
+              <a:t>https://</a:t>
+            </a:r>
+            <a:r>
+              <a:rPr lang="en-US" sz="2200" dirty="0" err="1">
+                <a:latin typeface="Helvetica Light" panose="020B0403020202020204" pitchFamily="34" charset="0"/>
+              </a:rPr>
+              <a:t>www.howtogeek.com</a:t>
+            </a:r>
+            <a:r>
+              <a:rPr lang="en-US" sz="2200" dirty="0">
+                <a:latin typeface="Helvetica Light" panose="020B0403020202020204" pitchFamily="34" charset="0"/>
+              </a:rPr>
+              <a:t>/211541/homebrew-for-os-x-easily-installs-desktop-apps-and-terminal-utilities/</a:t>
+            </a:r>
+          </a:p>
+          <a:p>
+            <a:pPr marL="457200" indent="-457200">
+              <a:buFontTx/>
+              <a:buChar char="-"/>
+            </a:pPr>
+            <a:endParaRPr lang="en-US" sz="2600" dirty="0">
+              <a:latin typeface="Helvetica Light" panose="020B0403020202020204" pitchFamily="34" charset="0"/>
+            </a:endParaRPr>
           </a:p>
         </p:txBody>
       </p:sp>
     </p:spTree>
     <p:extLst>
       <p:ext uri="{BB962C8B-B14F-4D97-AF65-F5344CB8AC3E}">
-        <p14:creationId xmlns:p14="http://schemas.microsoft.com/office/powerpoint/2010/main" val="2981836796"/>
+        <p14:creationId xmlns:p14="http://schemas.microsoft.com/office/powerpoint/2010/main" val="2381475697"/>
       </p:ext>
     </p:extLst>
   </p:cSld>
@@ -8352,7 +8770,7 @@
           <p:cNvPr id="2" name="TextBox 1">
             <a:extLst>
               <a:ext uri="{FF2B5EF4-FFF2-40B4-BE49-F238E27FC236}">
-                <a16:creationId xmlns:a16="http://schemas.microsoft.com/office/drawing/2014/main" id="{14DB713A-FC87-2A49-AFF2-27ECBC84D063}"/>
+                <a16:creationId xmlns:a16="http://schemas.microsoft.com/office/drawing/2014/main" id="{F2506A35-DA43-FB4C-BEF3-FE4EEC3D95B4}"/>
               </a:ext>
             </a:extLst>
           </p:cNvPr>
@@ -8361,8 +8779,8 @@
         </p:nvSpPr>
         <p:spPr>
           <a:xfrm>
-            <a:off x="852417" y="431858"/>
-            <a:ext cx="10487166" cy="600164"/>
+            <a:off x="4070445" y="393404"/>
+            <a:ext cx="4051109" cy="553998"/>
           </a:xfrm>
           <a:prstGeom prst="rect">
             <a:avLst/>
@@ -8376,161 +8794,345 @@
           <a:lstStyle/>
           <a:p>
             <a:r>
-              <a:rPr lang="en-US" sz="3300" dirty="0">
-                <a:latin typeface="Helvetica Light" panose="020B0403020202020204" pitchFamily="34" charset="0"/>
-              </a:rPr>
-              <a:t>Installing software packages on Ubuntu Linux systems</a:t>
-            </a:r>
-          </a:p>
-        </p:txBody>
-      </p:sp>
-      <p:sp>
-        <p:nvSpPr>
-          <p:cNvPr id="4" name="Rectangle 3">
+              <a:rPr lang="en-US" sz="3000" b="1" dirty="0">
+                <a:latin typeface="HELVETICA LIGHT" panose="020B0403020202020204" pitchFamily="34" charset="0"/>
+                <a:cs typeface="Calibri Light" panose="020F0302020204030204" pitchFamily="34" charset="0"/>
+              </a:rPr>
+              <a:t>For this week and next</a:t>
+            </a:r>
+          </a:p>
+        </p:txBody>
+      </p:sp>
+      <p:sp>
+        <p:nvSpPr>
+          <p:cNvPr id="4" name="TextBox 3">
             <a:extLst>
               <a:ext uri="{FF2B5EF4-FFF2-40B4-BE49-F238E27FC236}">
-                <a16:creationId xmlns:a16="http://schemas.microsoft.com/office/drawing/2014/main" id="{8A5E173C-8799-6C43-815D-A5102D4C9D62}"/>
+                <a16:creationId xmlns:a16="http://schemas.microsoft.com/office/drawing/2014/main" id="{EBDD1052-3689-9D4C-B252-FC90951F8684}"/>
               </a:ext>
             </a:extLst>
           </p:cNvPr>
-          <p:cNvSpPr/>
+          <p:cNvSpPr txBox="1"/>
           <p:nvPr/>
         </p:nvSpPr>
         <p:spPr>
           <a:xfrm>
-            <a:off x="936126" y="1789254"/>
-            <a:ext cx="10403457" cy="954107"/>
+            <a:off x="904514" y="1361584"/>
+            <a:ext cx="4463081" cy="461665"/>
           </a:xfrm>
           <a:prstGeom prst="rect">
             <a:avLst/>
           </a:prstGeom>
-        </p:spPr>
-        <p:txBody>
-          <a:bodyPr wrap="square">
+          <a:noFill/>
+          <a:ln>
+            <a:solidFill>
+              <a:schemeClr val="tx1"/>
+            </a:solidFill>
+          </a:ln>
+        </p:spPr>
+        <p:txBody>
+          <a:bodyPr wrap="none" rtlCol="0">
             <a:spAutoFit/>
           </a:bodyPr>
           <a:lstStyle/>
           <a:p>
             <a:r>
-              <a:rPr lang="en-US" sz="2800" b="1" dirty="0">
-                <a:latin typeface="Helvetica Light" panose="020B0403020202020204" pitchFamily="34" charset="0"/>
-              </a:rPr>
-              <a:t>apt-get</a:t>
-            </a:r>
-            <a:r>
-              <a:rPr lang="en-US" sz="2800" dirty="0">
-                <a:latin typeface="Helvetica Light" panose="020B0403020202020204" pitchFamily="34" charset="0"/>
-              </a:rPr>
-              <a:t>: installation, management, updates, and removal of software, without having to install from source code</a:t>
-            </a:r>
-          </a:p>
-        </p:txBody>
-      </p:sp>
-      <p:sp>
-        <p:nvSpPr>
-          <p:cNvPr id="5" name="Rectangle 4">
+              <a:rPr lang="en-US" sz="2400" dirty="0">
+                <a:ln>
+                  <a:solidFill>
+                    <a:schemeClr val="tx1"/>
+                  </a:solidFill>
+                </a:ln>
+                <a:latin typeface="Helvetica Light" panose="020B0403020202020204" pitchFamily="34" charset="0"/>
+                <a:cs typeface="Calibri Light" panose="020F0302020204030204" pitchFamily="34" charset="0"/>
+              </a:rPr>
+              <a:t>Haddock and Dunn chapter 16</a:t>
+            </a:r>
+          </a:p>
+        </p:txBody>
+      </p:sp>
+      <p:sp>
+        <p:nvSpPr>
+          <p:cNvPr id="5" name="TextBox 4">
             <a:extLst>
               <a:ext uri="{FF2B5EF4-FFF2-40B4-BE49-F238E27FC236}">
-                <a16:creationId xmlns:a16="http://schemas.microsoft.com/office/drawing/2014/main" id="{BCD17DE8-A0C2-2D4B-908B-F81AA3D3821E}"/>
+                <a16:creationId xmlns:a16="http://schemas.microsoft.com/office/drawing/2014/main" id="{BA866975-1518-7843-B51A-EE316B249A9E}"/>
               </a:ext>
             </a:extLst>
           </p:cNvPr>
-          <p:cNvSpPr/>
+          <p:cNvSpPr txBox="1"/>
           <p:nvPr/>
         </p:nvSpPr>
         <p:spPr>
           <a:xfrm>
-            <a:off x="3175249" y="4677039"/>
-            <a:ext cx="6855125" cy="1384995"/>
+            <a:off x="904514" y="2073115"/>
+            <a:ext cx="5009705" cy="461665"/>
           </a:xfrm>
           <a:prstGeom prst="rect">
             <a:avLst/>
           </a:prstGeom>
-        </p:spPr>
-        <p:txBody>
-          <a:bodyPr wrap="square">
+          <a:noFill/>
+          <a:ln>
+            <a:solidFill>
+              <a:schemeClr val="tx1"/>
+            </a:solidFill>
+          </a:ln>
+        </p:spPr>
+        <p:txBody>
+          <a:bodyPr wrap="none" rtlCol="0">
             <a:spAutoFit/>
           </a:bodyPr>
           <a:lstStyle/>
           <a:p>
             <a:r>
-              <a:rPr lang="en-US" sz="2800" dirty="0">
-                <a:latin typeface="Helvetica Light" panose="020B0403020202020204" pitchFamily="34" charset="0"/>
-              </a:rPr>
-              <a:t>To update package database:</a:t>
-            </a:r>
-          </a:p>
-          <a:p>
-            <a:endParaRPr lang="en-US" sz="2800" dirty="0">
-              <a:latin typeface="Helvetica Light" panose="020B0403020202020204" pitchFamily="34" charset="0"/>
-            </a:endParaRPr>
-          </a:p>
-          <a:p>
-            <a:r>
-              <a:rPr lang="en-US" sz="2800" b="1" dirty="0">
-                <a:latin typeface="Helvetica Light" panose="020B0403020202020204" pitchFamily="34" charset="0"/>
-              </a:rPr>
-              <a:t>$ </a:t>
-            </a:r>
-            <a:r>
-              <a:rPr lang="en-US" sz="2800" b="1" dirty="0" err="1">
-                <a:latin typeface="Helvetica Light" panose="020B0403020202020204" pitchFamily="34" charset="0"/>
-              </a:rPr>
-              <a:t>sudo</a:t>
-            </a:r>
-            <a:r>
-              <a:rPr lang="en-US" sz="2800" b="1" dirty="0">
-                <a:latin typeface="Helvetica Light" panose="020B0403020202020204" pitchFamily="34" charset="0"/>
-              </a:rPr>
-              <a:t> apt-get update</a:t>
-            </a:r>
-          </a:p>
-        </p:txBody>
-      </p:sp>
-      <p:sp>
-        <p:nvSpPr>
-          <p:cNvPr id="6" name="Rectangle 5">
+              <a:rPr lang="en-US" sz="2400" dirty="0" err="1">
+                <a:ln>
+                  <a:solidFill>
+                    <a:schemeClr val="tx1"/>
+                  </a:solidFill>
+                </a:ln>
+                <a:latin typeface="Helvetica Light" panose="020B0403020202020204" pitchFamily="34" charset="0"/>
+                <a:cs typeface="Calibri Light" panose="020F0302020204030204" pitchFamily="34" charset="0"/>
+              </a:rPr>
+              <a:t>Bradnam</a:t>
+            </a:r>
+            <a:r>
+              <a:rPr lang="en-US" sz="2400" dirty="0">
+                <a:ln>
+                  <a:solidFill>
+                    <a:schemeClr val="tx1"/>
+                  </a:solidFill>
+                </a:ln>
+                <a:latin typeface="Helvetica Light" panose="020B0403020202020204" pitchFamily="34" charset="0"/>
+                <a:cs typeface="Calibri Light" panose="020F0302020204030204" pitchFamily="34" charset="0"/>
+              </a:rPr>
+              <a:t> and Korf primer U29-U40</a:t>
+            </a:r>
+          </a:p>
+        </p:txBody>
+      </p:sp>
+      <p:sp>
+        <p:nvSpPr>
+          <p:cNvPr id="6" name="TextBox 5">
             <a:extLst>
               <a:ext uri="{FF2B5EF4-FFF2-40B4-BE49-F238E27FC236}">
-                <a16:creationId xmlns:a16="http://schemas.microsoft.com/office/drawing/2014/main" id="{4B76C6D8-5578-064E-B3CD-76C5D07F6059}"/>
+                <a16:creationId xmlns:a16="http://schemas.microsoft.com/office/drawing/2014/main" id="{B07C33E8-89FF-C24C-96A3-232B9316C0F1}"/>
               </a:ext>
             </a:extLst>
           </p:cNvPr>
-          <p:cNvSpPr/>
+          <p:cNvSpPr txBox="1"/>
           <p:nvPr/>
         </p:nvSpPr>
         <p:spPr>
           <a:xfrm>
-            <a:off x="977981" y="3213514"/>
-            <a:ext cx="10403457" cy="954107"/>
+            <a:off x="904514" y="2948963"/>
+            <a:ext cx="11081683" cy="2785378"/>
           </a:xfrm>
           <a:prstGeom prst="rect">
             <a:avLst/>
           </a:prstGeom>
-        </p:spPr>
-        <p:txBody>
-          <a:bodyPr wrap="square">
+          <a:noFill/>
+          <a:ln>
+            <a:noFill/>
+          </a:ln>
+        </p:spPr>
+        <p:txBody>
+          <a:bodyPr wrap="square" rtlCol="0">
             <a:spAutoFit/>
           </a:bodyPr>
           <a:lstStyle/>
           <a:p>
-            <a:r>
-              <a:rPr lang="en-US" sz="2800" dirty="0">
-                <a:latin typeface="Helvetica Light" panose="020B0403020202020204" pitchFamily="34" charset="0"/>
-              </a:rPr>
-              <a:t>Using apt-get requires superuser privileges (</a:t>
-            </a:r>
-            <a:r>
-              <a:rPr lang="en-US" sz="2800" dirty="0" err="1">
-                <a:latin typeface="Helvetica Light" panose="020B0403020202020204" pitchFamily="34" charset="0"/>
-              </a:rPr>
-              <a:t>sudo</a:t>
-            </a:r>
-            <a:r>
-              <a:rPr lang="en-US" sz="2800" dirty="0">
-                <a:latin typeface="Helvetica Light" panose="020B0403020202020204" pitchFamily="34" charset="0"/>
-              </a:rPr>
-              <a:t>), and will require password entry.</a:t>
+            <a:pPr marL="342900" indent="-342900">
+              <a:buFontTx/>
+              <a:buChar char="-"/>
+            </a:pPr>
+            <a:r>
+              <a:rPr lang="en-US" sz="2400" dirty="0">
+                <a:ln>
+                  <a:solidFill>
+                    <a:schemeClr val="tx1"/>
+                  </a:solidFill>
+                </a:ln>
+                <a:latin typeface="Helvetica Light" panose="020B0403020202020204" pitchFamily="34" charset="0"/>
+                <a:cs typeface="Calibri Light" panose="020F0302020204030204" pitchFamily="34" charset="0"/>
+              </a:rPr>
+              <a:t>Work through </a:t>
+            </a:r>
+            <a:r>
+              <a:rPr lang="en-US" sz="2400" dirty="0" err="1">
+                <a:ln>
+                  <a:solidFill>
+                    <a:schemeClr val="tx1"/>
+                  </a:solidFill>
+                </a:ln>
+                <a:latin typeface="Helvetica Light" panose="020B0403020202020204" pitchFamily="34" charset="0"/>
+                <a:cs typeface="Calibri Light" panose="020F0302020204030204" pitchFamily="34" charset="0"/>
+              </a:rPr>
+              <a:t>linuxIV_</a:t>
+            </a:r>
+            <a:r>
+              <a:rPr lang="en-US" sz="2600" dirty="0" err="1">
+                <a:ln>
+                  <a:solidFill>
+                    <a:schemeClr val="tx1"/>
+                  </a:solidFill>
+                </a:ln>
+                <a:latin typeface="Helvetica Light" panose="020B0403020202020204" pitchFamily="34" charset="0"/>
+                <a:cs typeface="Calibri Light" panose="020F0302020204030204" pitchFamily="34" charset="0"/>
+              </a:rPr>
+              <a:t>primer</a:t>
+            </a:r>
+            <a:r>
+              <a:rPr lang="en-US" sz="2400" dirty="0" err="1">
+                <a:ln>
+                  <a:solidFill>
+                    <a:schemeClr val="tx1"/>
+                  </a:solidFill>
+                </a:ln>
+                <a:latin typeface="Helvetica Light" panose="020B0403020202020204" pitchFamily="34" charset="0"/>
+                <a:cs typeface="Calibri Light" panose="020F0302020204030204" pitchFamily="34" charset="0"/>
+              </a:rPr>
+              <a:t>.md</a:t>
+            </a:r>
+            <a:r>
+              <a:rPr lang="en-US" sz="2400" dirty="0">
+                <a:ln>
+                  <a:solidFill>
+                    <a:schemeClr val="tx1"/>
+                  </a:solidFill>
+                </a:ln>
+                <a:latin typeface="Helvetica Light" panose="020B0403020202020204" pitchFamily="34" charset="0"/>
+                <a:cs typeface="Calibri Light" panose="020F0302020204030204" pitchFamily="34" charset="0"/>
+              </a:rPr>
+              <a:t> </a:t>
+            </a:r>
+          </a:p>
+          <a:p>
+            <a:pPr marL="342900" indent="-342900">
+              <a:buFontTx/>
+              <a:buChar char="-"/>
+            </a:pPr>
+            <a:endParaRPr lang="en-US" sz="2400" dirty="0">
+              <a:ln>
+                <a:solidFill>
+                  <a:schemeClr val="tx1"/>
+                </a:solidFill>
+              </a:ln>
+              <a:latin typeface="Helvetica Light" panose="020B0403020202020204" pitchFamily="34" charset="0"/>
+              <a:cs typeface="Calibri Light" panose="020F0302020204030204" pitchFamily="34" charset="0"/>
+            </a:endParaRPr>
+          </a:p>
+          <a:p>
+            <a:pPr marL="342900" indent="-342900">
+              <a:buFontTx/>
+              <a:buChar char="-"/>
+            </a:pPr>
+            <a:r>
+              <a:rPr lang="en-US" sz="2400" dirty="0">
+                <a:ln>
+                  <a:solidFill>
+                    <a:schemeClr val="tx1"/>
+                  </a:solidFill>
+                </a:ln>
+                <a:latin typeface="Helvetica Light" panose="020B0403020202020204" pitchFamily="34" charset="0"/>
+                <a:cs typeface="Calibri Light" panose="020F0302020204030204" pitchFamily="34" charset="0"/>
+              </a:rPr>
+              <a:t>Work through, and email me code from </a:t>
+            </a:r>
+            <a:r>
+              <a:rPr lang="en-US" sz="2900" dirty="0">
+                <a:ln>
+                  <a:solidFill>
+                    <a:schemeClr val="tx1"/>
+                  </a:solidFill>
+                </a:ln>
+                <a:latin typeface="Helvetica Light" panose="020B0403020202020204" pitchFamily="34" charset="0"/>
+                <a:cs typeface="Calibri Light" panose="020F0302020204030204" pitchFamily="34" charset="0"/>
+              </a:rPr>
+              <a:t>#3</a:t>
+            </a:r>
+            <a:r>
+              <a:rPr lang="en-US" sz="2400" dirty="0">
+                <a:ln>
+                  <a:solidFill>
+                    <a:schemeClr val="tx1"/>
+                  </a:solidFill>
+                </a:ln>
+                <a:latin typeface="Helvetica Light" panose="020B0403020202020204" pitchFamily="34" charset="0"/>
+                <a:cs typeface="Calibri Light" panose="020F0302020204030204" pitchFamily="34" charset="0"/>
+              </a:rPr>
+              <a:t> (bash script), unix_assignment_4.md </a:t>
+            </a:r>
+          </a:p>
+          <a:p>
+            <a:pPr marL="342900" indent="-342900">
+              <a:buFontTx/>
+              <a:buChar char="-"/>
+            </a:pPr>
+            <a:endParaRPr lang="en-US" sz="2400" dirty="0">
+              <a:ln>
+                <a:solidFill>
+                  <a:schemeClr val="tx1"/>
+                </a:solidFill>
+              </a:ln>
+              <a:latin typeface="Helvetica Light" panose="020B0403020202020204" pitchFamily="34" charset="0"/>
+              <a:cs typeface="Calibri Light" panose="020F0302020204030204" pitchFamily="34" charset="0"/>
+            </a:endParaRPr>
+          </a:p>
+          <a:p>
+            <a:pPr marL="342900" indent="-342900">
+              <a:buFontTx/>
+              <a:buChar char="-"/>
+            </a:pPr>
+            <a:r>
+              <a:rPr lang="en-US" sz="2400" dirty="0">
+                <a:ln>
+                  <a:solidFill>
+                    <a:schemeClr val="tx1"/>
+                  </a:solidFill>
+                </a:ln>
+                <a:latin typeface="Helvetica Light" panose="020B0403020202020204" pitchFamily="34" charset="0"/>
+                <a:cs typeface="Calibri Light" panose="020F0302020204030204" pitchFamily="34" charset="0"/>
+              </a:rPr>
+              <a:t>Follow instructions for updating to python3 and installing anaconda navigator (in unix_assignment_4.md)</a:t>
+            </a:r>
+          </a:p>
+        </p:txBody>
+      </p:sp>
+      <p:sp>
+        <p:nvSpPr>
+          <p:cNvPr id="7" name="TextBox 6">
+            <a:extLst>
+              <a:ext uri="{FF2B5EF4-FFF2-40B4-BE49-F238E27FC236}">
+                <a16:creationId xmlns:a16="http://schemas.microsoft.com/office/drawing/2014/main" id="{BAB8C560-E936-0843-9E3A-8FE468250552}"/>
+              </a:ext>
+            </a:extLst>
+          </p:cNvPr>
+          <p:cNvSpPr txBox="1"/>
+          <p:nvPr/>
+        </p:nvSpPr>
+        <p:spPr>
+          <a:xfrm>
+            <a:off x="904514" y="6082007"/>
+            <a:ext cx="7217040" cy="461665"/>
+          </a:xfrm>
+          <a:prstGeom prst="rect">
+            <a:avLst/>
+          </a:prstGeom>
+          <a:noFill/>
+        </p:spPr>
+        <p:txBody>
+          <a:bodyPr wrap="none" rtlCol="0">
+            <a:spAutoFit/>
+          </a:bodyPr>
+          <a:lstStyle/>
+          <a:p>
+            <a:r>
+              <a:rPr lang="en-US" sz="2400" dirty="0">
+                <a:latin typeface="Helvetica Light" panose="020B0403020202020204" pitchFamily="34" charset="0"/>
+                <a:cs typeface="Calibri Light" panose="020F0302020204030204" pitchFamily="34" charset="0"/>
+              </a:rPr>
+              <a:t>For next Tuesday: Chapter 7 in Haddock and Dunn</a:t>
             </a:r>
           </a:p>
         </p:txBody>
@@ -8538,7 +9140,7 @@
     </p:spTree>
     <p:extLst>
       <p:ext uri="{BB962C8B-B14F-4D97-AF65-F5344CB8AC3E}">
-        <p14:creationId xmlns:p14="http://schemas.microsoft.com/office/powerpoint/2010/main" val="753900716"/>
+        <p14:creationId xmlns:p14="http://schemas.microsoft.com/office/powerpoint/2010/main" val="1633021312"/>
       </p:ext>
     </p:extLst>
   </p:cSld>
@@ -9033,638 +9635,6 @@
 </p:sld>
 </file>
 
-<file path=ppt/slides/slide20.xml><?xml version="1.0" encoding="utf-8"?>
-<p:sld xmlns:a="http://schemas.openxmlformats.org/drawingml/2006/main" xmlns:r="http://schemas.openxmlformats.org/officeDocument/2006/relationships" xmlns:p="http://schemas.openxmlformats.org/presentationml/2006/main">
-  <p:cSld>
-    <p:spTree>
-      <p:nvGrpSpPr>
-        <p:cNvPr id="1" name=""/>
-        <p:cNvGrpSpPr/>
-        <p:nvPr/>
-      </p:nvGrpSpPr>
-      <p:grpSpPr>
-        <a:xfrm>
-          <a:off x="0" y="0"/>
-          <a:ext cx="0" cy="0"/>
-          <a:chOff x="0" y="0"/>
-          <a:chExt cx="0" cy="0"/>
-        </a:xfrm>
-      </p:grpSpPr>
-      <p:sp>
-        <p:nvSpPr>
-          <p:cNvPr id="2" name="TextBox 1">
-            <a:extLst>
-              <a:ext uri="{FF2B5EF4-FFF2-40B4-BE49-F238E27FC236}">
-                <a16:creationId xmlns:a16="http://schemas.microsoft.com/office/drawing/2014/main" id="{14DB713A-FC87-2A49-AFF2-27ECBC84D063}"/>
-              </a:ext>
-            </a:extLst>
-          </p:cNvPr>
-          <p:cNvSpPr txBox="1"/>
-          <p:nvPr/>
-        </p:nvSpPr>
-        <p:spPr>
-          <a:xfrm>
-            <a:off x="1293963" y="638355"/>
-            <a:ext cx="8981946" cy="600164"/>
-          </a:xfrm>
-          <a:prstGeom prst="rect">
-            <a:avLst/>
-          </a:prstGeom>
-          <a:noFill/>
-        </p:spPr>
-        <p:txBody>
-          <a:bodyPr wrap="none" rtlCol="0">
-            <a:spAutoFit/>
-          </a:bodyPr>
-          <a:lstStyle/>
-          <a:p>
-            <a:r>
-              <a:rPr lang="en-US" sz="3300" dirty="0">
-                <a:latin typeface="Helvetica Light" panose="020B0403020202020204" pitchFamily="34" charset="0"/>
-              </a:rPr>
-              <a:t>Installing software packages on Linux systems</a:t>
-            </a:r>
-          </a:p>
-        </p:txBody>
-      </p:sp>
-      <p:sp>
-        <p:nvSpPr>
-          <p:cNvPr id="3" name="Rectangle 2">
-            <a:extLst>
-              <a:ext uri="{FF2B5EF4-FFF2-40B4-BE49-F238E27FC236}">
-                <a16:creationId xmlns:a16="http://schemas.microsoft.com/office/drawing/2014/main" id="{1DE691A2-CFB0-C645-BDC4-2442DDA50F03}"/>
-              </a:ext>
-            </a:extLst>
-          </p:cNvPr>
-          <p:cNvSpPr/>
-          <p:nvPr/>
-        </p:nvSpPr>
-        <p:spPr>
-          <a:xfrm>
-            <a:off x="1293963" y="1888729"/>
-            <a:ext cx="6855125" cy="1384995"/>
-          </a:xfrm>
-          <a:prstGeom prst="rect">
-            <a:avLst/>
-          </a:prstGeom>
-        </p:spPr>
-        <p:txBody>
-          <a:bodyPr wrap="square">
-            <a:spAutoFit/>
-          </a:bodyPr>
-          <a:lstStyle/>
-          <a:p>
-            <a:r>
-              <a:rPr lang="en-US" sz="2800" dirty="0">
-                <a:latin typeface="Helvetica Light" panose="020B0403020202020204" pitchFamily="34" charset="0"/>
-              </a:rPr>
-              <a:t>To install software using </a:t>
-            </a:r>
-            <a:r>
-              <a:rPr lang="en-US" sz="2800" b="1" dirty="0">
-                <a:latin typeface="Helvetica Light" panose="020B0403020202020204" pitchFamily="34" charset="0"/>
-              </a:rPr>
-              <a:t>apt-get</a:t>
-            </a:r>
-            <a:r>
-              <a:rPr lang="en-US" sz="2800" dirty="0">
-                <a:latin typeface="Helvetica Light" panose="020B0403020202020204" pitchFamily="34" charset="0"/>
-              </a:rPr>
-              <a:t>:</a:t>
-            </a:r>
-          </a:p>
-          <a:p>
-            <a:endParaRPr lang="en-US" sz="2800" dirty="0">
-              <a:latin typeface="Helvetica Light" panose="020B0403020202020204" pitchFamily="34" charset="0"/>
-            </a:endParaRPr>
-          </a:p>
-          <a:p>
-            <a:r>
-              <a:rPr lang="en-US" sz="2800" b="1" dirty="0">
-                <a:latin typeface="Helvetica Light" panose="020B0403020202020204" pitchFamily="34" charset="0"/>
-              </a:rPr>
-              <a:t>$ </a:t>
-            </a:r>
-            <a:r>
-              <a:rPr lang="en-US" sz="2800" b="1" dirty="0" err="1">
-                <a:latin typeface="Helvetica Light" panose="020B0403020202020204" pitchFamily="34" charset="0"/>
-              </a:rPr>
-              <a:t>sudo</a:t>
-            </a:r>
-            <a:r>
-              <a:rPr lang="en-US" sz="2800" b="1" dirty="0">
-                <a:latin typeface="Helvetica Light" panose="020B0403020202020204" pitchFamily="34" charset="0"/>
-              </a:rPr>
-              <a:t> apt-get install &lt;</a:t>
-            </a:r>
-            <a:r>
-              <a:rPr lang="en-US" sz="2800" b="1" dirty="0" err="1">
-                <a:latin typeface="Helvetica Light" panose="020B0403020202020204" pitchFamily="34" charset="0"/>
-              </a:rPr>
-              <a:t>package_name</a:t>
-            </a:r>
-            <a:r>
-              <a:rPr lang="en-US" sz="2800" b="1" dirty="0">
-                <a:latin typeface="Helvetica Light" panose="020B0403020202020204" pitchFamily="34" charset="0"/>
-              </a:rPr>
-              <a:t>&gt;</a:t>
-            </a:r>
-          </a:p>
-        </p:txBody>
-      </p:sp>
-      <p:sp>
-        <p:nvSpPr>
-          <p:cNvPr id="6" name="Rectangle 5">
-            <a:extLst>
-              <a:ext uri="{FF2B5EF4-FFF2-40B4-BE49-F238E27FC236}">
-                <a16:creationId xmlns:a16="http://schemas.microsoft.com/office/drawing/2014/main" id="{91B537C8-6E0C-734D-ADDC-911B7C92C35A}"/>
-              </a:ext>
-            </a:extLst>
-          </p:cNvPr>
-          <p:cNvSpPr/>
-          <p:nvPr/>
-        </p:nvSpPr>
-        <p:spPr>
-          <a:xfrm>
-            <a:off x="1293963" y="3923934"/>
-            <a:ext cx="6855125" cy="1384995"/>
-          </a:xfrm>
-          <a:prstGeom prst="rect">
-            <a:avLst/>
-          </a:prstGeom>
-        </p:spPr>
-        <p:txBody>
-          <a:bodyPr wrap="square">
-            <a:spAutoFit/>
-          </a:bodyPr>
-          <a:lstStyle/>
-          <a:p>
-            <a:r>
-              <a:rPr lang="en-US" sz="2800" dirty="0">
-                <a:latin typeface="Helvetica Light" panose="020B0403020202020204" pitchFamily="34" charset="0"/>
-              </a:rPr>
-              <a:t>To remove software using </a:t>
-            </a:r>
-            <a:r>
-              <a:rPr lang="en-US" sz="2800" b="1" dirty="0">
-                <a:latin typeface="Helvetica Light" panose="020B0403020202020204" pitchFamily="34" charset="0"/>
-              </a:rPr>
-              <a:t>apt-get</a:t>
-            </a:r>
-            <a:r>
-              <a:rPr lang="en-US" sz="2800" dirty="0">
-                <a:latin typeface="Helvetica Light" panose="020B0403020202020204" pitchFamily="34" charset="0"/>
-              </a:rPr>
-              <a:t>:</a:t>
-            </a:r>
-          </a:p>
-          <a:p>
-            <a:endParaRPr lang="en-US" sz="2800" dirty="0">
-              <a:latin typeface="Helvetica Light" panose="020B0403020202020204" pitchFamily="34" charset="0"/>
-            </a:endParaRPr>
-          </a:p>
-          <a:p>
-            <a:r>
-              <a:rPr lang="en-US" sz="2800" b="1" dirty="0">
-                <a:latin typeface="Helvetica Light" panose="020B0403020202020204" pitchFamily="34" charset="0"/>
-              </a:rPr>
-              <a:t>$ </a:t>
-            </a:r>
-            <a:r>
-              <a:rPr lang="en-US" sz="2800" b="1" dirty="0" err="1">
-                <a:latin typeface="Helvetica Light" panose="020B0403020202020204" pitchFamily="34" charset="0"/>
-              </a:rPr>
-              <a:t>sudo</a:t>
-            </a:r>
-            <a:r>
-              <a:rPr lang="en-US" sz="2800" b="1" dirty="0">
-                <a:latin typeface="Helvetica Light" panose="020B0403020202020204" pitchFamily="34" charset="0"/>
-              </a:rPr>
-              <a:t> apt-get remove &lt;</a:t>
-            </a:r>
-            <a:r>
-              <a:rPr lang="en-US" sz="2800" b="1" dirty="0" err="1">
-                <a:latin typeface="Helvetica Light" panose="020B0403020202020204" pitchFamily="34" charset="0"/>
-              </a:rPr>
-              <a:t>package_name</a:t>
-            </a:r>
-            <a:r>
-              <a:rPr lang="en-US" sz="2800" b="1" dirty="0">
-                <a:latin typeface="Helvetica Light" panose="020B0403020202020204" pitchFamily="34" charset="0"/>
-              </a:rPr>
-              <a:t>&gt;</a:t>
-            </a:r>
-          </a:p>
-        </p:txBody>
-      </p:sp>
-      <p:sp>
-        <p:nvSpPr>
-          <p:cNvPr id="7" name="Rectangle 6">
-            <a:extLst>
-              <a:ext uri="{FF2B5EF4-FFF2-40B4-BE49-F238E27FC236}">
-                <a16:creationId xmlns:a16="http://schemas.microsoft.com/office/drawing/2014/main" id="{F04E7E94-5EA0-134B-81AC-815340C72808}"/>
-              </a:ext>
-            </a:extLst>
-          </p:cNvPr>
-          <p:cNvSpPr/>
-          <p:nvPr/>
-        </p:nvSpPr>
-        <p:spPr>
-          <a:xfrm>
-            <a:off x="6639216" y="6280030"/>
-            <a:ext cx="5349926" cy="369332"/>
-          </a:xfrm>
-          <a:prstGeom prst="rect">
-            <a:avLst/>
-          </a:prstGeom>
-        </p:spPr>
-        <p:txBody>
-          <a:bodyPr wrap="none">
-            <a:spAutoFit/>
-          </a:bodyPr>
-          <a:lstStyle/>
-          <a:p>
-            <a:r>
-              <a:rPr lang="en-US" dirty="0"/>
-              <a:t>Useful tutorial: https://</a:t>
-            </a:r>
-            <a:r>
-              <a:rPr lang="en-US" dirty="0" err="1"/>
-              <a:t>itsfoss.com</a:t>
-            </a:r>
-            <a:r>
-              <a:rPr lang="en-US" dirty="0"/>
-              <a:t>/apt-get-</a:t>
-            </a:r>
-            <a:r>
-              <a:rPr lang="en-US" dirty="0" err="1"/>
-              <a:t>linux</a:t>
-            </a:r>
-            <a:r>
-              <a:rPr lang="en-US" dirty="0"/>
-              <a:t>-guide/</a:t>
-            </a:r>
-          </a:p>
-        </p:txBody>
-      </p:sp>
-    </p:spTree>
-    <p:extLst>
-      <p:ext uri="{BB962C8B-B14F-4D97-AF65-F5344CB8AC3E}">
-        <p14:creationId xmlns:p14="http://schemas.microsoft.com/office/powerpoint/2010/main" val="4277512269"/>
-      </p:ext>
-    </p:extLst>
-  </p:cSld>
-  <p:clrMapOvr>
-    <a:masterClrMapping/>
-  </p:clrMapOvr>
-</p:sld>
-</file>
-
-<file path=ppt/slides/slide21.xml><?xml version="1.0" encoding="utf-8"?>
-<p:sld xmlns:a="http://schemas.openxmlformats.org/drawingml/2006/main" xmlns:r="http://schemas.openxmlformats.org/officeDocument/2006/relationships" xmlns:p="http://schemas.openxmlformats.org/presentationml/2006/main">
-  <p:cSld>
-    <p:spTree>
-      <p:nvGrpSpPr>
-        <p:cNvPr id="1" name=""/>
-        <p:cNvGrpSpPr/>
-        <p:nvPr/>
-      </p:nvGrpSpPr>
-      <p:grpSpPr>
-        <a:xfrm>
-          <a:off x="0" y="0"/>
-          <a:ext cx="0" cy="0"/>
-          <a:chOff x="0" y="0"/>
-          <a:chExt cx="0" cy="0"/>
-        </a:xfrm>
-      </p:grpSpPr>
-      <p:sp>
-        <p:nvSpPr>
-          <p:cNvPr id="2" name="TextBox 1">
-            <a:extLst>
-              <a:ext uri="{FF2B5EF4-FFF2-40B4-BE49-F238E27FC236}">
-                <a16:creationId xmlns:a16="http://schemas.microsoft.com/office/drawing/2014/main" id="{F2506A35-DA43-FB4C-BEF3-FE4EEC3D95B4}"/>
-              </a:ext>
-            </a:extLst>
-          </p:cNvPr>
-          <p:cNvSpPr txBox="1"/>
-          <p:nvPr/>
-        </p:nvSpPr>
-        <p:spPr>
-          <a:xfrm>
-            <a:off x="4070445" y="393404"/>
-            <a:ext cx="4051109" cy="553998"/>
-          </a:xfrm>
-          <a:prstGeom prst="rect">
-            <a:avLst/>
-          </a:prstGeom>
-          <a:noFill/>
-        </p:spPr>
-        <p:txBody>
-          <a:bodyPr wrap="none" rtlCol="0">
-            <a:spAutoFit/>
-          </a:bodyPr>
-          <a:lstStyle/>
-          <a:p>
-            <a:r>
-              <a:rPr lang="en-US" sz="3000" b="1" dirty="0">
-                <a:latin typeface="HELVETICA LIGHT" panose="020B0403020202020204" pitchFamily="34" charset="0"/>
-                <a:cs typeface="Calibri Light" panose="020F0302020204030204" pitchFamily="34" charset="0"/>
-              </a:rPr>
-              <a:t>For this week and next</a:t>
-            </a:r>
-          </a:p>
-        </p:txBody>
-      </p:sp>
-      <p:sp>
-        <p:nvSpPr>
-          <p:cNvPr id="4" name="TextBox 3">
-            <a:extLst>
-              <a:ext uri="{FF2B5EF4-FFF2-40B4-BE49-F238E27FC236}">
-                <a16:creationId xmlns:a16="http://schemas.microsoft.com/office/drawing/2014/main" id="{EBDD1052-3689-9D4C-B252-FC90951F8684}"/>
-              </a:ext>
-            </a:extLst>
-          </p:cNvPr>
-          <p:cNvSpPr txBox="1"/>
-          <p:nvPr/>
-        </p:nvSpPr>
-        <p:spPr>
-          <a:xfrm>
-            <a:off x="1184730" y="1428101"/>
-            <a:ext cx="4463081" cy="461665"/>
-          </a:xfrm>
-          <a:prstGeom prst="rect">
-            <a:avLst/>
-          </a:prstGeom>
-          <a:noFill/>
-          <a:ln>
-            <a:solidFill>
-              <a:schemeClr val="tx1"/>
-            </a:solidFill>
-          </a:ln>
-        </p:spPr>
-        <p:txBody>
-          <a:bodyPr wrap="none" rtlCol="0">
-            <a:spAutoFit/>
-          </a:bodyPr>
-          <a:lstStyle/>
-          <a:p>
-            <a:r>
-              <a:rPr lang="en-US" sz="2400" dirty="0">
-                <a:ln>
-                  <a:solidFill>
-                    <a:schemeClr val="tx1"/>
-                  </a:solidFill>
-                </a:ln>
-                <a:latin typeface="Helvetica Light" panose="020B0403020202020204" pitchFamily="34" charset="0"/>
-                <a:cs typeface="Calibri Light" panose="020F0302020204030204" pitchFamily="34" charset="0"/>
-              </a:rPr>
-              <a:t>Haddock and Dunn chapter 16</a:t>
-            </a:r>
-          </a:p>
-        </p:txBody>
-      </p:sp>
-      <p:sp>
-        <p:nvSpPr>
-          <p:cNvPr id="5" name="TextBox 4">
-            <a:extLst>
-              <a:ext uri="{FF2B5EF4-FFF2-40B4-BE49-F238E27FC236}">
-                <a16:creationId xmlns:a16="http://schemas.microsoft.com/office/drawing/2014/main" id="{BA866975-1518-7843-B51A-EE316B249A9E}"/>
-              </a:ext>
-            </a:extLst>
-          </p:cNvPr>
-          <p:cNvSpPr txBox="1"/>
-          <p:nvPr/>
-        </p:nvSpPr>
-        <p:spPr>
-          <a:xfrm>
-            <a:off x="1184730" y="2139632"/>
-            <a:ext cx="5009705" cy="461665"/>
-          </a:xfrm>
-          <a:prstGeom prst="rect">
-            <a:avLst/>
-          </a:prstGeom>
-          <a:noFill/>
-          <a:ln>
-            <a:solidFill>
-              <a:schemeClr val="tx1"/>
-            </a:solidFill>
-          </a:ln>
-        </p:spPr>
-        <p:txBody>
-          <a:bodyPr wrap="none" rtlCol="0">
-            <a:spAutoFit/>
-          </a:bodyPr>
-          <a:lstStyle/>
-          <a:p>
-            <a:r>
-              <a:rPr lang="en-US" sz="2400" dirty="0" err="1">
-                <a:ln>
-                  <a:solidFill>
-                    <a:schemeClr val="tx1"/>
-                  </a:solidFill>
-                </a:ln>
-                <a:latin typeface="Helvetica Light" panose="020B0403020202020204" pitchFamily="34" charset="0"/>
-                <a:cs typeface="Calibri Light" panose="020F0302020204030204" pitchFamily="34" charset="0"/>
-              </a:rPr>
-              <a:t>Bradnam</a:t>
-            </a:r>
-            <a:r>
-              <a:rPr lang="en-US" sz="2400" dirty="0">
-                <a:ln>
-                  <a:solidFill>
-                    <a:schemeClr val="tx1"/>
-                  </a:solidFill>
-                </a:ln>
-                <a:latin typeface="Helvetica Light" panose="020B0403020202020204" pitchFamily="34" charset="0"/>
-                <a:cs typeface="Calibri Light" panose="020F0302020204030204" pitchFamily="34" charset="0"/>
-              </a:rPr>
-              <a:t> and Korf primer U29-U40</a:t>
-            </a:r>
-          </a:p>
-        </p:txBody>
-      </p:sp>
-      <p:sp>
-        <p:nvSpPr>
-          <p:cNvPr id="6" name="TextBox 5">
-            <a:extLst>
-              <a:ext uri="{FF2B5EF4-FFF2-40B4-BE49-F238E27FC236}">
-                <a16:creationId xmlns:a16="http://schemas.microsoft.com/office/drawing/2014/main" id="{B07C33E8-89FF-C24C-96A3-232B9316C0F1}"/>
-              </a:ext>
-            </a:extLst>
-          </p:cNvPr>
-          <p:cNvSpPr txBox="1"/>
-          <p:nvPr/>
-        </p:nvSpPr>
-        <p:spPr>
-          <a:xfrm>
-            <a:off x="1026234" y="3193362"/>
-            <a:ext cx="9323386" cy="1231106"/>
-          </a:xfrm>
-          <a:prstGeom prst="rect">
-            <a:avLst/>
-          </a:prstGeom>
-          <a:noFill/>
-          <a:ln>
-            <a:noFill/>
-          </a:ln>
-        </p:spPr>
-        <p:txBody>
-          <a:bodyPr wrap="none" rtlCol="0">
-            <a:spAutoFit/>
-          </a:bodyPr>
-          <a:lstStyle/>
-          <a:p>
-            <a:pPr marL="342900" indent="-342900">
-              <a:buFontTx/>
-              <a:buChar char="-"/>
-            </a:pPr>
-            <a:r>
-              <a:rPr lang="en-US" sz="2400" dirty="0">
-                <a:ln>
-                  <a:solidFill>
-                    <a:schemeClr val="tx1"/>
-                  </a:solidFill>
-                </a:ln>
-                <a:latin typeface="Helvetica Light" panose="020B0403020202020204" pitchFamily="34" charset="0"/>
-                <a:cs typeface="Calibri Light" panose="020F0302020204030204" pitchFamily="34" charset="0"/>
-              </a:rPr>
-              <a:t>Work through </a:t>
-            </a:r>
-            <a:r>
-              <a:rPr lang="en-US" sz="2400" dirty="0" err="1">
-                <a:ln>
-                  <a:solidFill>
-                    <a:schemeClr val="tx1"/>
-                  </a:solidFill>
-                </a:ln>
-                <a:latin typeface="Helvetica Light" panose="020B0403020202020204" pitchFamily="34" charset="0"/>
-                <a:cs typeface="Calibri Light" panose="020F0302020204030204" pitchFamily="34" charset="0"/>
-              </a:rPr>
-              <a:t>UnixIV_</a:t>
-            </a:r>
-            <a:r>
-              <a:rPr lang="en-US" sz="2600" dirty="0" err="1">
-                <a:ln>
-                  <a:solidFill>
-                    <a:schemeClr val="tx1"/>
-                  </a:solidFill>
-                </a:ln>
-                <a:latin typeface="Helvetica Light" panose="020B0403020202020204" pitchFamily="34" charset="0"/>
-                <a:cs typeface="Calibri Light" panose="020F0302020204030204" pitchFamily="34" charset="0"/>
-              </a:rPr>
-              <a:t>primer</a:t>
-            </a:r>
-            <a:r>
-              <a:rPr lang="en-US" sz="2400" dirty="0" err="1">
-                <a:ln>
-                  <a:solidFill>
-                    <a:schemeClr val="tx1"/>
-                  </a:solidFill>
-                </a:ln>
-                <a:latin typeface="Helvetica Light" panose="020B0403020202020204" pitchFamily="34" charset="0"/>
-                <a:cs typeface="Calibri Light" panose="020F0302020204030204" pitchFamily="34" charset="0"/>
-              </a:rPr>
-              <a:t>.md</a:t>
-            </a:r>
-            <a:r>
-              <a:rPr lang="en-US" sz="2400" dirty="0">
-                <a:ln>
-                  <a:solidFill>
-                    <a:schemeClr val="tx1"/>
-                  </a:solidFill>
-                </a:ln>
-                <a:latin typeface="Helvetica Light" panose="020B0403020202020204" pitchFamily="34" charset="0"/>
-                <a:cs typeface="Calibri Light" panose="020F0302020204030204" pitchFamily="34" charset="0"/>
-              </a:rPr>
-              <a:t> </a:t>
-            </a:r>
-          </a:p>
-          <a:p>
-            <a:pPr marL="342900" indent="-342900">
-              <a:buFontTx/>
-              <a:buChar char="-"/>
-            </a:pPr>
-            <a:endParaRPr lang="en-US" sz="2400" dirty="0">
-              <a:ln>
-                <a:solidFill>
-                  <a:schemeClr val="tx1"/>
-                </a:solidFill>
-              </a:ln>
-              <a:latin typeface="Helvetica Light" panose="020B0403020202020204" pitchFamily="34" charset="0"/>
-              <a:cs typeface="Calibri Light" panose="020F0302020204030204" pitchFamily="34" charset="0"/>
-            </a:endParaRPr>
-          </a:p>
-          <a:p>
-            <a:pPr marL="342900" indent="-342900">
-              <a:buFontTx/>
-              <a:buChar char="-"/>
-            </a:pPr>
-            <a:r>
-              <a:rPr lang="en-US" sz="2400" dirty="0">
-                <a:ln>
-                  <a:solidFill>
-                    <a:schemeClr val="tx1"/>
-                  </a:solidFill>
-                </a:ln>
-                <a:latin typeface="Helvetica Light" panose="020B0403020202020204" pitchFamily="34" charset="0"/>
-                <a:cs typeface="Calibri Light" panose="020F0302020204030204" pitchFamily="34" charset="0"/>
-              </a:rPr>
-              <a:t>Work through, and email me code from, unix_assignment_4.md </a:t>
-            </a:r>
-          </a:p>
-        </p:txBody>
-      </p:sp>
-      <p:sp>
-        <p:nvSpPr>
-          <p:cNvPr id="7" name="TextBox 6">
-            <a:extLst>
-              <a:ext uri="{FF2B5EF4-FFF2-40B4-BE49-F238E27FC236}">
-                <a16:creationId xmlns:a16="http://schemas.microsoft.com/office/drawing/2014/main" id="{BAB8C560-E936-0843-9E3A-8FE468250552}"/>
-              </a:ext>
-            </a:extLst>
-          </p:cNvPr>
-          <p:cNvSpPr txBox="1"/>
-          <p:nvPr/>
-        </p:nvSpPr>
-        <p:spPr>
-          <a:xfrm>
-            <a:off x="1038781" y="5060567"/>
-            <a:ext cx="7217040" cy="461665"/>
-          </a:xfrm>
-          <a:prstGeom prst="rect">
-            <a:avLst/>
-          </a:prstGeom>
-          <a:noFill/>
-        </p:spPr>
-        <p:txBody>
-          <a:bodyPr wrap="none" rtlCol="0">
-            <a:spAutoFit/>
-          </a:bodyPr>
-          <a:lstStyle/>
-          <a:p>
-            <a:r>
-              <a:rPr lang="en-US" sz="2400" dirty="0">
-                <a:latin typeface="Helvetica Light" panose="020B0403020202020204" pitchFamily="34" charset="0"/>
-                <a:cs typeface="Calibri Light" panose="020F0302020204030204" pitchFamily="34" charset="0"/>
-              </a:rPr>
-              <a:t>For next Tuesday: Chapter 7 in Haddock and Dunn</a:t>
-            </a:r>
-          </a:p>
-        </p:txBody>
-      </p:sp>
-    </p:spTree>
-    <p:extLst>
-      <p:ext uri="{BB962C8B-B14F-4D97-AF65-F5344CB8AC3E}">
-        <p14:creationId xmlns:p14="http://schemas.microsoft.com/office/powerpoint/2010/main" val="1633021312"/>
-      </p:ext>
-    </p:extLst>
-  </p:cSld>
-  <p:clrMapOvr>
-    <a:masterClrMapping/>
-  </p:clrMapOvr>
-</p:sld>
-</file>
-
 <file path=ppt/slides/slide3.xml><?xml version="1.0" encoding="utf-8"?>
 <p:sld xmlns:a="http://schemas.openxmlformats.org/drawingml/2006/main" xmlns:r="http://schemas.openxmlformats.org/officeDocument/2006/relationships" xmlns:p="http://schemas.openxmlformats.org/presentationml/2006/main">
   <p:cSld>
@@ -9733,7 +9703,7 @@
         </p:nvSpPr>
         <p:spPr>
           <a:xfrm>
-            <a:off x="1780001" y="3053494"/>
+            <a:off x="1716433" y="2454404"/>
             <a:ext cx="8759129" cy="1384995"/>
           </a:xfrm>
           <a:prstGeom prst="rect">
@@ -9759,15 +9729,24 @@
               <a:rPr lang="en-US" sz="2800" dirty="0">
                 <a:latin typeface="Helvetica Light" panose="020B0403020202020204" pitchFamily="34" charset="0"/>
               </a:rPr>
-              <a:t>#!/bin/bash</a:t>
-            </a:r>
-          </a:p>
-          <a:p>
+              <a:t>#!/bin/</a:t>
+            </a:r>
+            <a:r>
+              <a:rPr lang="en-US" sz="2800" dirty="0" err="1">
+                <a:latin typeface="Helvetica Light" panose="020B0403020202020204" pitchFamily="34" charset="0"/>
+              </a:rPr>
+              <a:t>zsh</a:t>
+            </a:r>
             <a:endParaRPr lang="en-US" sz="2800" dirty="0">
               <a:latin typeface="Helvetica Light" panose="020B0403020202020204" pitchFamily="34" charset="0"/>
             </a:endParaRPr>
           </a:p>
           <a:p>
+            <a:endParaRPr lang="en-US" sz="2800" dirty="0">
+              <a:latin typeface="Helvetica Light" panose="020B0403020202020204" pitchFamily="34" charset="0"/>
+            </a:endParaRPr>
+          </a:p>
+          <a:p>
             <a:r>
               <a:rPr lang="en-US" sz="2800" dirty="0" err="1">
                 <a:latin typeface="Helvetica Light" panose="020B0403020202020204" pitchFamily="34" charset="0"/>
@@ -9787,16 +9766,10 @@
               <a:t>homedirectory</a:t>
             </a:r>
             <a:r>
-              <a:rPr lang="en-US" sz="2800">
-                <a:latin typeface="Helvetica Light" panose="020B0403020202020204" pitchFamily="34" charset="0"/>
-              </a:rPr>
-              <a:t> /</a:t>
-            </a:r>
-            <a:r>
               <a:rPr lang="en-US" sz="2800" dirty="0">
                 <a:latin typeface="Helvetica Light" panose="020B0403020202020204" pitchFamily="34" charset="0"/>
               </a:rPr>
-              <a:t>Volumes/MYDRIVE/</a:t>
+              <a:t> /Volumes/MYDRIVE/</a:t>
             </a:r>
           </a:p>
         </p:txBody>
@@ -9875,14 +9848,20 @@
       </p:grpSpPr>
       <p:sp>
         <p:nvSpPr>
-          <p:cNvPr id="2" name="TextBox 1"/>
+          <p:cNvPr id="3" name="TextBox 2">
+            <a:extLst>
+              <a:ext uri="{FF2B5EF4-FFF2-40B4-BE49-F238E27FC236}">
+                <a16:creationId xmlns:a16="http://schemas.microsoft.com/office/drawing/2014/main" id="{DBDA8306-665F-D67B-2175-5DF9EECD1FDB}"/>
+              </a:ext>
+            </a:extLst>
+          </p:cNvPr>
           <p:cNvSpPr txBox="1"/>
           <p:nvPr/>
         </p:nvSpPr>
         <p:spPr>
           <a:xfrm>
-            <a:off x="3885288" y="381119"/>
-            <a:ext cx="4652651" cy="553998"/>
+            <a:off x="1008993" y="464203"/>
+            <a:ext cx="9448800" cy="4031873"/>
           </a:xfrm>
           <a:prstGeom prst="rect">
             <a:avLst/>
@@ -9890,6 +9869,418 @@
           <a:noFill/>
         </p:spPr>
         <p:txBody>
+          <a:bodyPr wrap="square">
+            <a:spAutoFit/>
+          </a:bodyPr>
+          <a:lstStyle/>
+          <a:p>
+            <a:pPr algn="l">
+              <a:buNone/>
+            </a:pPr>
+            <a:r>
+              <a:rPr lang="en-US" sz="2000" b="0" i="0" u="none" strike="noStrike" dirty="0">
+                <a:solidFill>
+                  <a:srgbClr val="000000"/>
+                </a:solidFill>
+                <a:effectLst/>
+                <a:latin typeface="+mj-lt"/>
+              </a:rPr>
+              <a:t>Here is my shell script as a plain text in this email and as a </a:t>
+            </a:r>
+            <a:r>
+              <a:rPr lang="en-US" sz="2000" b="0" i="0" u="none" strike="noStrike" dirty="0" err="1">
+                <a:solidFill>
+                  <a:srgbClr val="000000"/>
+                </a:solidFill>
+                <a:effectLst/>
+                <a:latin typeface="+mj-lt"/>
+              </a:rPr>
+              <a:t>sh</a:t>
+            </a:r>
+            <a:r>
+              <a:rPr lang="en-US" sz="2000" b="0" i="0" u="none" strike="noStrike" dirty="0">
+                <a:solidFill>
+                  <a:srgbClr val="000000"/>
+                </a:solidFill>
+                <a:effectLst/>
+                <a:latin typeface="+mj-lt"/>
+              </a:rPr>
+              <a:t> file attached. I made the script with the hopes to back up a directory or file easily to the server you gave us access to. I have not run the script yet because I have a question/concern: if you sync a directory to the server, will it delete an existing directory with the same exact name or make a duplicate? Thank you!</a:t>
+            </a:r>
+          </a:p>
+          <a:p>
+            <a:pPr algn="l">
+              <a:buNone/>
+            </a:pPr>
+            <a:br>
+              <a:rPr lang="en-US" sz="2000" b="0" i="0" u="none" strike="noStrike" dirty="0">
+                <a:solidFill>
+                  <a:srgbClr val="000000"/>
+                </a:solidFill>
+                <a:effectLst/>
+                <a:latin typeface="+mj-lt"/>
+              </a:rPr>
+            </a:br>
+            <a:endParaRPr lang="en-US" sz="2000" b="0" i="0" u="none" strike="noStrike" dirty="0">
+              <a:solidFill>
+                <a:srgbClr val="000000"/>
+              </a:solidFill>
+              <a:effectLst/>
+              <a:latin typeface="+mj-lt"/>
+            </a:endParaRPr>
+          </a:p>
+          <a:p>
+            <a:pPr algn="l">
+              <a:buNone/>
+            </a:pPr>
+            <a:endParaRPr lang="en-US" sz="2000" b="0" i="0" u="none" strike="noStrike" dirty="0">
+              <a:solidFill>
+                <a:srgbClr val="000000"/>
+              </a:solidFill>
+              <a:effectLst/>
+              <a:latin typeface="+mj-lt"/>
+            </a:endParaRPr>
+          </a:p>
+          <a:p>
+            <a:pPr algn="l">
+              <a:buNone/>
+            </a:pPr>
+            <a:r>
+              <a:rPr lang="en-US" sz="2400" b="0" i="0" u="none" strike="noStrike" dirty="0">
+                <a:solidFill>
+                  <a:srgbClr val="000000"/>
+                </a:solidFill>
+                <a:effectLst/>
+                <a:latin typeface="+mj-lt"/>
+              </a:rPr>
+              <a:t>#!/bin/bash</a:t>
+            </a:r>
+            <a:br>
+              <a:rPr lang="en-US" sz="2400" b="0" i="0" u="none" strike="noStrike" dirty="0">
+                <a:solidFill>
+                  <a:srgbClr val="000000"/>
+                </a:solidFill>
+                <a:effectLst/>
+                <a:latin typeface="+mj-lt"/>
+              </a:rPr>
+            </a:br>
+            <a:r>
+              <a:rPr lang="en-US" sz="2400" b="0" i="0" u="none" strike="noStrike" dirty="0">
+                <a:solidFill>
+                  <a:srgbClr val="000000"/>
+                </a:solidFill>
+                <a:effectLst/>
+                <a:latin typeface="+mj-lt"/>
+              </a:rPr>
+              <a:t>SOURCE="$1"</a:t>
+            </a:r>
+            <a:br>
+              <a:rPr lang="en-US" sz="2400" b="0" i="0" u="none" strike="noStrike" dirty="0">
+                <a:solidFill>
+                  <a:srgbClr val="000000"/>
+                </a:solidFill>
+                <a:effectLst/>
+                <a:latin typeface="+mj-lt"/>
+              </a:rPr>
+            </a:br>
+            <a:r>
+              <a:rPr lang="en-US" sz="2400" b="0" i="0" u="none" strike="noStrike" dirty="0">
+                <a:solidFill>
+                  <a:srgbClr val="000000"/>
+                </a:solidFill>
+                <a:effectLst/>
+                <a:latin typeface="+mj-lt"/>
+              </a:rPr>
+              <a:t>DESTINATION="</a:t>
+            </a:r>
+            <a:r>
+              <a:rPr lang="en-US" sz="2400" b="0" i="0" u="none" strike="noStrike" dirty="0" err="1">
+                <a:solidFill>
+                  <a:srgbClr val="000000"/>
+                </a:solidFill>
+                <a:effectLst/>
+                <a:latin typeface="+mj-lt"/>
+              </a:rPr>
+              <a:t>gpugh@ponderosa.biology.unr.edu</a:t>
+            </a:r>
+            <a:r>
+              <a:rPr lang="en-US" sz="2400" b="0" i="0" u="none" strike="noStrike" dirty="0">
+                <a:solidFill>
+                  <a:srgbClr val="000000"/>
+                </a:solidFill>
+                <a:effectLst/>
+                <a:latin typeface="+mj-lt"/>
+              </a:rPr>
+              <a:t>:/home/</a:t>
+            </a:r>
+            <a:r>
+              <a:rPr lang="en-US" sz="2400" b="0" i="0" u="none" strike="noStrike" dirty="0" err="1">
+                <a:solidFill>
+                  <a:srgbClr val="000000"/>
+                </a:solidFill>
+                <a:effectLst/>
+                <a:latin typeface="+mj-lt"/>
+              </a:rPr>
+              <a:t>gpugh</a:t>
+            </a:r>
+            <a:r>
+              <a:rPr lang="en-US" sz="2400" b="0" i="0" u="none" strike="noStrike" dirty="0">
+                <a:solidFill>
+                  <a:srgbClr val="000000"/>
+                </a:solidFill>
+                <a:effectLst/>
+                <a:latin typeface="+mj-lt"/>
+              </a:rPr>
+              <a:t>/"</a:t>
+            </a:r>
+            <a:br>
+              <a:rPr lang="en-US" sz="2400" b="0" i="0" u="none" strike="noStrike" dirty="0">
+                <a:solidFill>
+                  <a:srgbClr val="000000"/>
+                </a:solidFill>
+                <a:effectLst/>
+                <a:latin typeface="+mj-lt"/>
+              </a:rPr>
+            </a:br>
+            <a:r>
+              <a:rPr lang="en-US" sz="2400" b="0" i="0" u="none" strike="noStrike" dirty="0" err="1">
+                <a:solidFill>
+                  <a:srgbClr val="000000"/>
+                </a:solidFill>
+                <a:effectLst/>
+                <a:latin typeface="+mj-lt"/>
+              </a:rPr>
+              <a:t>rsync</a:t>
+            </a:r>
+            <a:r>
+              <a:rPr lang="en-US" sz="2400" b="0" i="0" u="none" strike="noStrike" dirty="0">
+                <a:solidFill>
+                  <a:srgbClr val="000000"/>
+                </a:solidFill>
+                <a:effectLst/>
+                <a:latin typeface="+mj-lt"/>
+              </a:rPr>
+              <a:t> -av "$SOURCE" "$DESTINATION"</a:t>
+            </a:r>
+          </a:p>
+        </p:txBody>
+      </p:sp>
+      <p:sp>
+        <p:nvSpPr>
+          <p:cNvPr id="4" name="Rectangle 3">
+            <a:extLst>
+              <a:ext uri="{FF2B5EF4-FFF2-40B4-BE49-F238E27FC236}">
+                <a16:creationId xmlns:a16="http://schemas.microsoft.com/office/drawing/2014/main" id="{9DAE1EE0-C387-D2E2-38B5-F5121B366226}"/>
+              </a:ext>
+            </a:extLst>
+          </p:cNvPr>
+          <p:cNvSpPr/>
+          <p:nvPr/>
+        </p:nvSpPr>
+        <p:spPr>
+          <a:xfrm>
+            <a:off x="2743200" y="4885334"/>
+            <a:ext cx="6078908" cy="1384995"/>
+          </a:xfrm>
+          <a:prstGeom prst="rect">
+            <a:avLst/>
+          </a:prstGeom>
+          <a:noFill/>
+          <a:ln>
+            <a:solidFill>
+              <a:schemeClr val="tx1">
+                <a:lumMod val="65000"/>
+                <a:lumOff val="35000"/>
+              </a:schemeClr>
+            </a:solidFill>
+          </a:ln>
+        </p:spPr>
+        <p:txBody>
+          <a:bodyPr wrap="none">
+            <a:spAutoFit/>
+          </a:bodyPr>
+          <a:lstStyle/>
+          <a:p>
+            <a:r>
+              <a:rPr lang="en-US" sz="2800" dirty="0">
+                <a:latin typeface="Helvetica Light" panose="020B0403020202020204" pitchFamily="34" charset="0"/>
+              </a:rPr>
+              <a:t>From command line:</a:t>
+            </a:r>
+          </a:p>
+          <a:p>
+            <a:endParaRPr lang="en-US" sz="2800" dirty="0">
+              <a:latin typeface="Helvetica Light" panose="020B0403020202020204" pitchFamily="34" charset="0"/>
+            </a:endParaRPr>
+          </a:p>
+          <a:p>
+            <a:r>
+              <a:rPr lang="en-US" sz="2800" dirty="0">
+                <a:latin typeface="Helvetica Light" panose="020B0403020202020204" pitchFamily="34" charset="0"/>
+              </a:rPr>
+              <a:t>$ </a:t>
+            </a:r>
+            <a:r>
+              <a:rPr lang="en-US" sz="2800" dirty="0" err="1">
+                <a:latin typeface="Helvetica Light" panose="020B0403020202020204" pitchFamily="34" charset="0"/>
+              </a:rPr>
+              <a:t>zsh</a:t>
+            </a:r>
+            <a:r>
+              <a:rPr lang="en-US" sz="2800" dirty="0">
+                <a:latin typeface="Helvetica Light" panose="020B0403020202020204" pitchFamily="34" charset="0"/>
+              </a:rPr>
+              <a:t> </a:t>
+            </a:r>
+            <a:r>
+              <a:rPr lang="en-US" sz="2800" dirty="0" err="1">
+                <a:latin typeface="Helvetica Light" panose="020B0403020202020204" pitchFamily="34" charset="0"/>
+              </a:rPr>
+              <a:t>gpugh_sync.sh</a:t>
+            </a:r>
+            <a:r>
+              <a:rPr lang="en-US" sz="2800" dirty="0">
+                <a:latin typeface="Helvetica Light" panose="020B0403020202020204" pitchFamily="34" charset="0"/>
+              </a:rPr>
+              <a:t> </a:t>
+            </a:r>
+            <a:r>
+              <a:rPr lang="en-US" sz="2800" dirty="0">
+                <a:solidFill>
+                  <a:srgbClr val="FF0000"/>
+                </a:solidFill>
+                <a:latin typeface="Helvetica Light" panose="020B0403020202020204" pitchFamily="34" charset="0"/>
+              </a:rPr>
+              <a:t>BIOL792_work</a:t>
+            </a:r>
+          </a:p>
+        </p:txBody>
+      </p:sp>
+    </p:spTree>
+    <p:extLst>
+      <p:ext uri="{BB962C8B-B14F-4D97-AF65-F5344CB8AC3E}">
+        <p14:creationId xmlns:p14="http://schemas.microsoft.com/office/powerpoint/2010/main" val="2820365388"/>
+      </p:ext>
+    </p:extLst>
+  </p:cSld>
+  <p:clrMapOvr>
+    <a:masterClrMapping/>
+  </p:clrMapOvr>
+  <p:timing>
+    <p:tnLst>
+      <p:par>
+        <p:cTn id="1" dur="indefinite" restart="never" nodeType="tmRoot">
+          <p:childTnLst>
+            <p:seq concurrent="1" nextAc="seek">
+              <p:cTn id="2" dur="indefinite" nodeType="mainSeq">
+                <p:childTnLst>
+                  <p:par>
+                    <p:cTn id="3" fill="hold">
+                      <p:stCondLst>
+                        <p:cond delay="indefinite"/>
+                      </p:stCondLst>
+                      <p:childTnLst>
+                        <p:par>
+                          <p:cTn id="4" fill="hold">
+                            <p:stCondLst>
+                              <p:cond delay="0"/>
+                            </p:stCondLst>
+                            <p:childTnLst>
+                              <p:par>
+                                <p:cTn id="5" presetID="1" presetClass="entr" presetSubtype="0" fill="hold" grpId="0" nodeType="clickEffect">
+                                  <p:stCondLst>
+                                    <p:cond delay="0"/>
+                                  </p:stCondLst>
+                                  <p:childTnLst>
+                                    <p:set>
+                                      <p:cBhvr>
+                                        <p:cTn id="6" dur="1" fill="hold">
+                                          <p:stCondLst>
+                                            <p:cond delay="0"/>
+                                          </p:stCondLst>
+                                        </p:cTn>
+                                        <p:tgtEl>
+                                          <p:spTgt spid="4"/>
+                                        </p:tgtEl>
+                                        <p:attrNameLst>
+                                          <p:attrName>style.visibility</p:attrName>
+                                        </p:attrNameLst>
+                                      </p:cBhvr>
+                                      <p:to>
+                                        <p:strVal val="visible"/>
+                                      </p:to>
+                                    </p:set>
+                                  </p:childTnLst>
+                                </p:cTn>
+                              </p:par>
+                            </p:childTnLst>
+                          </p:cTn>
+                        </p:par>
+                      </p:childTnLst>
+                    </p:cTn>
+                  </p:par>
+                </p:childTnLst>
+              </p:cTn>
+              <p:prevCondLst>
+                <p:cond evt="onPrev" delay="0">
+                  <p:tgtEl>
+                    <p:sldTgt/>
+                  </p:tgtEl>
+                </p:cond>
+              </p:prevCondLst>
+              <p:nextCondLst>
+                <p:cond evt="onNext" delay="0">
+                  <p:tgtEl>
+                    <p:sldTgt/>
+                  </p:tgtEl>
+                </p:cond>
+              </p:nextCondLst>
+            </p:seq>
+          </p:childTnLst>
+        </p:cTn>
+      </p:par>
+    </p:tnLst>
+    <p:bldLst>
+      <p:bldP spid="4" grpId="0" animBg="1"/>
+    </p:bldLst>
+  </p:timing>
+</p:sld>
+</file>
+
+<file path=ppt/slides/slide5.xml><?xml version="1.0" encoding="utf-8"?>
+<p:sld xmlns:a="http://schemas.openxmlformats.org/drawingml/2006/main" xmlns:r="http://schemas.openxmlformats.org/officeDocument/2006/relationships" xmlns:p="http://schemas.openxmlformats.org/presentationml/2006/main">
+  <p:cSld>
+    <p:spTree>
+      <p:nvGrpSpPr>
+        <p:cNvPr id="1" name=""/>
+        <p:cNvGrpSpPr/>
+        <p:nvPr/>
+      </p:nvGrpSpPr>
+      <p:grpSpPr>
+        <a:xfrm>
+          <a:off x="0" y="0"/>
+          <a:ext cx="0" cy="0"/>
+          <a:chOff x="0" y="0"/>
+          <a:chExt cx="0" cy="0"/>
+        </a:xfrm>
+      </p:grpSpPr>
+      <p:sp>
+        <p:nvSpPr>
+          <p:cNvPr id="2" name="TextBox 1"/>
+          <p:cNvSpPr txBox="1"/>
+          <p:nvPr/>
+        </p:nvSpPr>
+        <p:spPr>
+          <a:xfrm>
+            <a:off x="3885288" y="381119"/>
+            <a:ext cx="4652651" cy="553998"/>
+          </a:xfrm>
+          <a:prstGeom prst="rect">
+            <a:avLst/>
+          </a:prstGeom>
+          <a:noFill/>
+        </p:spPr>
+        <p:txBody>
           <a:bodyPr wrap="square" rtlCol="0">
             <a:spAutoFit/>
           </a:bodyPr>
@@ -9912,7 +10303,7 @@
         </p:nvSpPr>
         <p:spPr>
           <a:xfrm>
-            <a:off x="922403" y="3665498"/>
+            <a:off x="922403" y="3686518"/>
             <a:ext cx="10578419" cy="2185214"/>
           </a:xfrm>
           <a:prstGeom prst="rect">
@@ -10191,7 +10582,7 @@
         </p:nvSpPr>
         <p:spPr>
           <a:xfrm>
-            <a:off x="922403" y="2856924"/>
+            <a:off x="922403" y="2867434"/>
             <a:ext cx="10015870" cy="461665"/>
           </a:xfrm>
           <a:prstGeom prst="rect">
@@ -10239,7 +10630,7 @@
 </p:sld>
 </file>
 
-<file path=ppt/slides/slide5.xml><?xml version="1.0" encoding="utf-8"?>
+<file path=ppt/slides/slide6.xml><?xml version="1.0" encoding="utf-8"?>
 <p:sld xmlns:a="http://schemas.openxmlformats.org/drawingml/2006/main" xmlns:r="http://schemas.openxmlformats.org/officeDocument/2006/relationships" xmlns:p="http://schemas.openxmlformats.org/presentationml/2006/main">
   <p:cSld>
     <p:spTree>
@@ -10610,7 +11001,7 @@
 </p:sld>
 </file>
 
-<file path=ppt/slides/slide6.xml><?xml version="1.0" encoding="utf-8"?>
+<file path=ppt/slides/slide7.xml><?xml version="1.0" encoding="utf-8"?>
 <p:sld xmlns:a="http://schemas.openxmlformats.org/drawingml/2006/main" xmlns:r="http://schemas.openxmlformats.org/officeDocument/2006/relationships" xmlns:p="http://schemas.openxmlformats.org/presentationml/2006/main">
   <p:cSld>
     <p:spTree>
@@ -10792,7 +11183,19 @@
               <a:rPr lang="en-US" sz="2600" b="1" dirty="0">
                 <a:latin typeface="Helvetica Light" panose="020B0403020202020204" pitchFamily="34" charset="0"/>
               </a:rPr>
-              <a:t>$ bash </a:t>
+              <a:t>$ </a:t>
+            </a:r>
+            <a:r>
+              <a:rPr lang="en-US" sz="2600" b="1" dirty="0" err="1">
+                <a:latin typeface="Helvetica Light" panose="020B0403020202020204" pitchFamily="34" charset="0"/>
+              </a:rPr>
+              <a:t>zsh</a:t>
+            </a:r>
+            <a:r>
+              <a:rPr lang="en-US" sz="2600" b="1" dirty="0">
+                <a:latin typeface="Helvetica Light" panose="020B0403020202020204" pitchFamily="34" charset="0"/>
+              </a:rPr>
+              <a:t> </a:t>
             </a:r>
             <a:r>
               <a:rPr lang="en-US" sz="2600" b="1" dirty="0" err="1">
@@ -10858,7 +11261,7 @@
 </p:sld>
 </file>
 
-<file path=ppt/slides/slide7.xml><?xml version="1.0" encoding="utf-8"?>
+<file path=ppt/slides/slide8.xml><?xml version="1.0" encoding="utf-8"?>
 <p:sld xmlns:a="http://schemas.openxmlformats.org/drawingml/2006/main" xmlns:r="http://schemas.openxmlformats.org/officeDocument/2006/relationships" xmlns:p="http://schemas.openxmlformats.org/presentationml/2006/main">
   <p:cSld>
     <p:spTree>
@@ -11204,7 +11607,7 @@
 </p:sld>
 </file>
 
-<file path=ppt/slides/slide8.xml><?xml version="1.0" encoding="utf-8"?>
+<file path=ppt/slides/slide9.xml><?xml version="1.0" encoding="utf-8"?>
 <p:sld xmlns:a="http://schemas.openxmlformats.org/drawingml/2006/main" xmlns:r="http://schemas.openxmlformats.org/officeDocument/2006/relationships" xmlns:p="http://schemas.openxmlformats.org/presentationml/2006/main">
   <p:cSld>
     <p:spTree>
@@ -11726,688 +12129,6 @@
       <p:bldP spid="3" grpId="0"/>
       <p:bldP spid="4" grpId="0"/>
       <p:bldP spid="11" grpId="0"/>
-    </p:bldLst>
-  </p:timing>
-</p:sld>
-</file>
-
-<file path=ppt/slides/slide9.xml><?xml version="1.0" encoding="utf-8"?>
-<p:sld xmlns:a="http://schemas.openxmlformats.org/drawingml/2006/main" xmlns:r="http://schemas.openxmlformats.org/officeDocument/2006/relationships" xmlns:p="http://schemas.openxmlformats.org/presentationml/2006/main">
-  <p:cSld>
-    <p:spTree>
-      <p:nvGrpSpPr>
-        <p:cNvPr id="1" name=""/>
-        <p:cNvGrpSpPr/>
-        <p:nvPr/>
-      </p:nvGrpSpPr>
-      <p:grpSpPr>
-        <a:xfrm>
-          <a:off x="0" y="0"/>
-          <a:ext cx="0" cy="0"/>
-          <a:chOff x="0" y="0"/>
-          <a:chExt cx="0" cy="0"/>
-        </a:xfrm>
-      </p:grpSpPr>
-      <p:sp>
-        <p:nvSpPr>
-          <p:cNvPr id="2" name="Rectangle 1"/>
-          <p:cNvSpPr/>
-          <p:nvPr/>
-        </p:nvSpPr>
-        <p:spPr>
-          <a:xfrm>
-            <a:off x="1089328" y="633417"/>
-            <a:ext cx="8337539" cy="584775"/>
-          </a:xfrm>
-          <a:prstGeom prst="rect">
-            <a:avLst/>
-          </a:prstGeom>
-        </p:spPr>
-        <p:txBody>
-          <a:bodyPr wrap="none">
-            <a:spAutoFit/>
-          </a:bodyPr>
-          <a:lstStyle/>
-          <a:p>
-            <a:r>
-              <a:rPr lang="en-US" sz="3200" b="1" dirty="0" err="1">
-                <a:latin typeface="Helvetica Light" panose="020B0403020202020204" pitchFamily="34" charset="0"/>
-              </a:rPr>
-              <a:t>awk</a:t>
-            </a:r>
-            <a:r>
-              <a:rPr lang="en-US" sz="3200" dirty="0">
-                <a:latin typeface="Helvetica Light" panose="020B0403020202020204" pitchFamily="34" charset="0"/>
-              </a:rPr>
-              <a:t>: versatile text extraction and processing</a:t>
-            </a:r>
-          </a:p>
-        </p:txBody>
-      </p:sp>
-      <p:sp>
-        <p:nvSpPr>
-          <p:cNvPr id="9" name="Rectangle 8">
-            <a:extLst>
-              <a:ext uri="{FF2B5EF4-FFF2-40B4-BE49-F238E27FC236}">
-                <a16:creationId xmlns:a16="http://schemas.microsoft.com/office/drawing/2014/main" id="{FC71CB22-96A2-CC49-B031-13E5BB1F412B}"/>
-              </a:ext>
-            </a:extLst>
-          </p:cNvPr>
-          <p:cNvSpPr/>
-          <p:nvPr/>
-        </p:nvSpPr>
-        <p:spPr>
-          <a:xfrm>
-            <a:off x="878319" y="2439837"/>
-            <a:ext cx="5782352" cy="3046988"/>
-          </a:xfrm>
-          <a:prstGeom prst="rect">
-            <a:avLst/>
-          </a:prstGeom>
-        </p:spPr>
-        <p:txBody>
-          <a:bodyPr wrap="square">
-            <a:spAutoFit/>
-          </a:bodyPr>
-          <a:lstStyle/>
-          <a:p>
-            <a:r>
-              <a:rPr lang="en-US" sz="2400" b="1" dirty="0">
-                <a:latin typeface="Helvetica Light" panose="020B0403020202020204" pitchFamily="34" charset="0"/>
-              </a:rPr>
-              <a:t>$0 </a:t>
-            </a:r>
-            <a:r>
-              <a:rPr lang="en-US" sz="2400" dirty="0">
-                <a:latin typeface="Helvetica Light" panose="020B0403020202020204" pitchFamily="34" charset="0"/>
-              </a:rPr>
-              <a:t>for the whole line.</a:t>
-            </a:r>
-          </a:p>
-          <a:p>
-            <a:r>
-              <a:rPr lang="en-US" sz="2400" b="1" dirty="0">
-                <a:latin typeface="Helvetica Light" panose="020B0403020202020204" pitchFamily="34" charset="0"/>
-              </a:rPr>
-              <a:t>$1 </a:t>
-            </a:r>
-            <a:r>
-              <a:rPr lang="en-US" sz="2400" dirty="0">
-                <a:latin typeface="Helvetica Light" panose="020B0403020202020204" pitchFamily="34" charset="0"/>
-              </a:rPr>
-              <a:t>for the first field.</a:t>
-            </a:r>
-          </a:p>
-          <a:p>
-            <a:r>
-              <a:rPr lang="en-US" sz="2400" b="1" dirty="0">
-                <a:latin typeface="Helvetica Light" panose="020B0403020202020204" pitchFamily="34" charset="0"/>
-              </a:rPr>
-              <a:t>$2 </a:t>
-            </a:r>
-            <a:r>
-              <a:rPr lang="en-US" sz="2400" dirty="0">
-                <a:latin typeface="Helvetica Light" panose="020B0403020202020204" pitchFamily="34" charset="0"/>
-              </a:rPr>
-              <a:t>for the second field.</a:t>
-            </a:r>
-          </a:p>
-          <a:p>
-            <a:r>
-              <a:rPr lang="en-US" sz="2400" b="1" dirty="0">
-                <a:latin typeface="Helvetica Light" panose="020B0403020202020204" pitchFamily="34" charset="0"/>
-              </a:rPr>
-              <a:t>$n </a:t>
-            </a:r>
-            <a:r>
-              <a:rPr lang="en-US" sz="2400" dirty="0">
-                <a:latin typeface="Helvetica Light" panose="020B0403020202020204" pitchFamily="34" charset="0"/>
-              </a:rPr>
-              <a:t>for the nth field.</a:t>
-            </a:r>
-          </a:p>
-          <a:p>
-            <a:endParaRPr lang="en-US" sz="2400" dirty="0">
-              <a:latin typeface="Helvetica Light" panose="020B0403020202020204" pitchFamily="34" charset="0"/>
-            </a:endParaRPr>
-          </a:p>
-          <a:p>
-            <a:r>
-              <a:rPr lang="en-US" sz="2400" dirty="0">
-                <a:latin typeface="Helvetica Light" panose="020B0403020202020204" pitchFamily="34" charset="0"/>
-              </a:rPr>
-              <a:t>-</a:t>
-            </a:r>
-            <a:r>
-              <a:rPr lang="en-US" sz="2400" b="1" dirty="0">
-                <a:latin typeface="Helvetica Light" panose="020B0403020202020204" pitchFamily="34" charset="0"/>
-              </a:rPr>
-              <a:t>F</a:t>
-            </a:r>
-            <a:r>
-              <a:rPr lang="en-US" sz="2400" dirty="0">
-                <a:latin typeface="Helvetica Light" panose="020B0403020202020204" pitchFamily="34" charset="0"/>
-              </a:rPr>
-              <a:t> option sets field delimiter, </a:t>
-            </a:r>
-          </a:p>
-          <a:p>
-            <a:r>
-              <a:rPr lang="en-US" sz="2400" b="1" dirty="0">
-                <a:latin typeface="Helvetica Light" panose="020B0403020202020204" pitchFamily="34" charset="0"/>
-              </a:rPr>
-              <a:t>e.g., -F ‘,’</a:t>
-            </a:r>
-          </a:p>
-          <a:p>
-            <a:endParaRPr lang="en-US" sz="2400" b="1" dirty="0">
-              <a:latin typeface="Helvetica Light" panose="020B0403020202020204" pitchFamily="34" charset="0"/>
-            </a:endParaRPr>
-          </a:p>
-        </p:txBody>
-      </p:sp>
-      <p:sp>
-        <p:nvSpPr>
-          <p:cNvPr id="10" name="TextBox 9">
-            <a:extLst>
-              <a:ext uri="{FF2B5EF4-FFF2-40B4-BE49-F238E27FC236}">
-                <a16:creationId xmlns:a16="http://schemas.microsoft.com/office/drawing/2014/main" id="{643918A5-F35A-344D-A9C1-1526374F249D}"/>
-              </a:ext>
-            </a:extLst>
-          </p:cNvPr>
-          <p:cNvSpPr txBox="1"/>
-          <p:nvPr/>
-        </p:nvSpPr>
-        <p:spPr>
-          <a:xfrm>
-            <a:off x="539281" y="1822918"/>
-            <a:ext cx="4717613" cy="461665"/>
-          </a:xfrm>
-          <a:prstGeom prst="rect">
-            <a:avLst/>
-          </a:prstGeom>
-          <a:noFill/>
-        </p:spPr>
-        <p:txBody>
-          <a:bodyPr wrap="square" rtlCol="0">
-            <a:spAutoFit/>
-          </a:bodyPr>
-          <a:lstStyle/>
-          <a:p>
-            <a:r>
-              <a:rPr lang="en-US" sz="2400" b="1" dirty="0">
-                <a:latin typeface="Helvetica Light" panose="020B0403020202020204" pitchFamily="34" charset="0"/>
-              </a:rPr>
-              <a:t>A.</a:t>
-            </a:r>
-            <a:r>
-              <a:rPr lang="en-US" sz="2400" dirty="0">
-                <a:latin typeface="Helvetica Light" panose="020B0403020202020204" pitchFamily="34" charset="0"/>
-              </a:rPr>
-              <a:t> </a:t>
-            </a:r>
-            <a:r>
-              <a:rPr lang="en-US" sz="2400" b="1" dirty="0">
-                <a:latin typeface="Helvetica Light" panose="020B0403020202020204" pitchFamily="34" charset="0"/>
-              </a:rPr>
-              <a:t>{'print'} </a:t>
-            </a:r>
-            <a:r>
-              <a:rPr lang="en-US" sz="2400" dirty="0">
-                <a:latin typeface="Helvetica Light" panose="020B0403020202020204" pitchFamily="34" charset="0"/>
-              </a:rPr>
-              <a:t>extracts lines or fields</a:t>
-            </a:r>
-          </a:p>
-        </p:txBody>
-      </p:sp>
-      <p:sp>
-        <p:nvSpPr>
-          <p:cNvPr id="12" name="TextBox 11">
-            <a:extLst>
-              <a:ext uri="{FF2B5EF4-FFF2-40B4-BE49-F238E27FC236}">
-                <a16:creationId xmlns:a16="http://schemas.microsoft.com/office/drawing/2014/main" id="{02D9C896-63E0-2E4C-8971-F5DD3722150B}"/>
-              </a:ext>
-            </a:extLst>
-          </p:cNvPr>
-          <p:cNvSpPr txBox="1"/>
-          <p:nvPr/>
-        </p:nvSpPr>
-        <p:spPr>
-          <a:xfrm>
-            <a:off x="5736128" y="1822918"/>
-            <a:ext cx="5782352" cy="461665"/>
-          </a:xfrm>
-          <a:prstGeom prst="rect">
-            <a:avLst/>
-          </a:prstGeom>
-          <a:noFill/>
-        </p:spPr>
-        <p:txBody>
-          <a:bodyPr wrap="none" rtlCol="0">
-            <a:spAutoFit/>
-          </a:bodyPr>
-          <a:lstStyle/>
-          <a:p>
-            <a:r>
-              <a:rPr lang="en-US" sz="2400" b="1" dirty="0">
-                <a:latin typeface="Helvetica Light" panose="020B0403020202020204" pitchFamily="34" charset="0"/>
-              </a:rPr>
-              <a:t>B.</a:t>
-            </a:r>
-            <a:r>
-              <a:rPr lang="en-US" sz="2400" dirty="0">
-                <a:latin typeface="Helvetica Light" panose="020B0403020202020204" pitchFamily="34" charset="0"/>
-              </a:rPr>
-              <a:t> Expression matching: enclosed with </a:t>
-            </a:r>
-            <a:r>
-              <a:rPr lang="en-US" sz="2400" b="1" dirty="0">
-                <a:latin typeface="Helvetica Light" panose="020B0403020202020204" pitchFamily="34" charset="0"/>
-              </a:rPr>
-              <a:t>//</a:t>
-            </a:r>
-          </a:p>
-        </p:txBody>
-      </p:sp>
-      <p:sp>
-        <p:nvSpPr>
-          <p:cNvPr id="13" name="Rectangle 12">
-            <a:extLst>
-              <a:ext uri="{FF2B5EF4-FFF2-40B4-BE49-F238E27FC236}">
-                <a16:creationId xmlns:a16="http://schemas.microsoft.com/office/drawing/2014/main" id="{47289BEB-FE4E-2340-A178-0A7356947CF4}"/>
-              </a:ext>
-            </a:extLst>
-          </p:cNvPr>
-          <p:cNvSpPr/>
-          <p:nvPr/>
-        </p:nvSpPr>
-        <p:spPr>
-          <a:xfrm>
-            <a:off x="6096000" y="2347634"/>
-            <a:ext cx="3018430" cy="461665"/>
-          </a:xfrm>
-          <a:prstGeom prst="rect">
-            <a:avLst/>
-          </a:prstGeom>
-        </p:spPr>
-        <p:txBody>
-          <a:bodyPr wrap="square">
-            <a:spAutoFit/>
-          </a:bodyPr>
-          <a:lstStyle/>
-          <a:p>
-            <a:r>
-              <a:rPr lang="en-US" sz="2400" b="1" dirty="0">
-                <a:latin typeface="Helvetica Light" panose="020B0403020202020204" pitchFamily="34" charset="0"/>
-              </a:rPr>
-              <a:t>/ATG/ </a:t>
-            </a:r>
-          </a:p>
-        </p:txBody>
-      </p:sp>
-      <p:sp>
-        <p:nvSpPr>
-          <p:cNvPr id="14" name="TextBox 13">
-            <a:extLst>
-              <a:ext uri="{FF2B5EF4-FFF2-40B4-BE49-F238E27FC236}">
-                <a16:creationId xmlns:a16="http://schemas.microsoft.com/office/drawing/2014/main" id="{036B978B-F6B6-9446-9C1E-9215ADAAF259}"/>
-              </a:ext>
-            </a:extLst>
-          </p:cNvPr>
-          <p:cNvSpPr txBox="1"/>
-          <p:nvPr/>
-        </p:nvSpPr>
-        <p:spPr>
-          <a:xfrm>
-            <a:off x="5736128" y="3874195"/>
-            <a:ext cx="4770858" cy="1200329"/>
-          </a:xfrm>
-          <a:prstGeom prst="rect">
-            <a:avLst/>
-          </a:prstGeom>
-          <a:noFill/>
-        </p:spPr>
-        <p:txBody>
-          <a:bodyPr wrap="none" rtlCol="0">
-            <a:spAutoFit/>
-          </a:bodyPr>
-          <a:lstStyle/>
-          <a:p>
-            <a:r>
-              <a:rPr lang="en-US" sz="2400" b="1" dirty="0">
-                <a:latin typeface="Helvetica Light" panose="020B0403020202020204" pitchFamily="34" charset="0"/>
-              </a:rPr>
-              <a:t>C</a:t>
-            </a:r>
-            <a:r>
-              <a:rPr lang="en-US" sz="2400" dirty="0">
-                <a:latin typeface="Helvetica Light" panose="020B0403020202020204" pitchFamily="34" charset="0"/>
-              </a:rPr>
-              <a:t>. Conditionals:</a:t>
-            </a:r>
-          </a:p>
-          <a:p>
-            <a:endParaRPr lang="en-US" sz="2400" dirty="0">
-              <a:latin typeface="Helvetica Light" panose="020B0403020202020204" pitchFamily="34" charset="0"/>
-            </a:endParaRPr>
-          </a:p>
-          <a:p>
-            <a:r>
-              <a:rPr lang="en-US" sz="2400" b="1" dirty="0" err="1">
-                <a:latin typeface="Helvetica Light" panose="020B0403020202020204" pitchFamily="34" charset="0"/>
-              </a:rPr>
-              <a:t>awk</a:t>
-            </a:r>
-            <a:r>
-              <a:rPr lang="en-US" sz="2400" b="1" dirty="0">
-                <a:latin typeface="Helvetica Light" panose="020B0403020202020204" pitchFamily="34" charset="0"/>
-              </a:rPr>
-              <a:t> {'if ($5 - $4 &gt; 400) print $1'}, </a:t>
-            </a:r>
-          </a:p>
-        </p:txBody>
-      </p:sp>
-      <p:sp>
-        <p:nvSpPr>
-          <p:cNvPr id="16" name="Rectangle 15">
-            <a:extLst>
-              <a:ext uri="{FF2B5EF4-FFF2-40B4-BE49-F238E27FC236}">
-                <a16:creationId xmlns:a16="http://schemas.microsoft.com/office/drawing/2014/main" id="{059C33CD-DBF3-EA48-AA75-58C92D907141}"/>
-              </a:ext>
-            </a:extLst>
-          </p:cNvPr>
-          <p:cNvSpPr/>
-          <p:nvPr/>
-        </p:nvSpPr>
-        <p:spPr>
-          <a:xfrm>
-            <a:off x="5927426" y="2918953"/>
-            <a:ext cx="4017446" cy="461665"/>
-          </a:xfrm>
-          <a:prstGeom prst="rect">
-            <a:avLst/>
-          </a:prstGeom>
-        </p:spPr>
-        <p:txBody>
-          <a:bodyPr wrap="none">
-            <a:spAutoFit/>
-          </a:bodyPr>
-          <a:lstStyle/>
-          <a:p>
-            <a:r>
-              <a:rPr lang="en-US" sz="2400" b="1" dirty="0">
-                <a:latin typeface="Helvetica Light" panose="020B0403020202020204" pitchFamily="34" charset="0"/>
-              </a:rPr>
-              <a:t>$ </a:t>
-            </a:r>
-            <a:r>
-              <a:rPr lang="en-US" sz="2400" b="1" dirty="0" err="1">
-                <a:latin typeface="Helvetica Light" panose="020B0403020202020204" pitchFamily="34" charset="0"/>
-              </a:rPr>
-              <a:t>awk</a:t>
-            </a:r>
-            <a:r>
-              <a:rPr lang="en-US" sz="2400" b="1" dirty="0">
-                <a:latin typeface="Helvetica Light" panose="020B0403020202020204" pitchFamily="34" charset="0"/>
-              </a:rPr>
-              <a:t> ‘/ATG/ {print}’ </a:t>
-            </a:r>
-            <a:r>
-              <a:rPr lang="en-US" sz="2400" b="1" dirty="0" err="1">
-                <a:latin typeface="Helvetica Light" panose="020B0403020202020204" pitchFamily="34" charset="0"/>
-              </a:rPr>
-              <a:t>fasta.fa</a:t>
-            </a:r>
-            <a:endParaRPr lang="en-US" sz="2400" dirty="0"/>
-          </a:p>
-        </p:txBody>
-      </p:sp>
-      <p:sp>
-        <p:nvSpPr>
-          <p:cNvPr id="3" name="Rectangle 2">
-            <a:extLst>
-              <a:ext uri="{FF2B5EF4-FFF2-40B4-BE49-F238E27FC236}">
-                <a16:creationId xmlns:a16="http://schemas.microsoft.com/office/drawing/2014/main" id="{D3FF30EF-0465-0543-AD3C-A3B58AA0D915}"/>
-              </a:ext>
-            </a:extLst>
-          </p:cNvPr>
-          <p:cNvSpPr/>
-          <p:nvPr/>
-        </p:nvSpPr>
-        <p:spPr>
-          <a:xfrm>
-            <a:off x="539281" y="5642079"/>
-            <a:ext cx="5216493" cy="461665"/>
-          </a:xfrm>
-          <a:prstGeom prst="rect">
-            <a:avLst/>
-          </a:prstGeom>
-        </p:spPr>
-        <p:txBody>
-          <a:bodyPr wrap="none">
-            <a:spAutoFit/>
-          </a:bodyPr>
-          <a:lstStyle/>
-          <a:p>
-            <a:r>
-              <a:rPr lang="en-US" sz="2400" b="1" dirty="0">
-                <a:latin typeface="Helvetica Light" panose="020B0403020202020204" pitchFamily="34" charset="0"/>
-              </a:rPr>
-              <a:t>$ </a:t>
-            </a:r>
-            <a:r>
-              <a:rPr lang="en-US" sz="2400" b="1" dirty="0" err="1">
-                <a:latin typeface="Helvetica Light" panose="020B0403020202020204" pitchFamily="34" charset="0"/>
-              </a:rPr>
-              <a:t>awk</a:t>
-            </a:r>
-            <a:r>
-              <a:rPr lang="en-US" sz="2400" b="1" dirty="0">
-                <a:latin typeface="Helvetica Light" panose="020B0403020202020204" pitchFamily="34" charset="0"/>
-              </a:rPr>
-              <a:t> {'print $2'} </a:t>
-            </a:r>
-            <a:r>
-              <a:rPr lang="en-US" sz="2400" b="1" dirty="0" err="1">
-                <a:latin typeface="Helvetica Light" panose="020B0403020202020204" pitchFamily="34" charset="0"/>
-              </a:rPr>
-              <a:t>yeast_genome.gff</a:t>
-            </a:r>
-            <a:endParaRPr lang="en-US" sz="2400" b="1" dirty="0">
-              <a:latin typeface="Helvetica Light" panose="020B0403020202020204" pitchFamily="34" charset="0"/>
-            </a:endParaRPr>
-          </a:p>
-        </p:txBody>
-      </p:sp>
-    </p:spTree>
-    <p:extLst>
-      <p:ext uri="{BB962C8B-B14F-4D97-AF65-F5344CB8AC3E}">
-        <p14:creationId xmlns:p14="http://schemas.microsoft.com/office/powerpoint/2010/main" val="3798764439"/>
-      </p:ext>
-    </p:extLst>
-  </p:cSld>
-  <p:clrMapOvr>
-    <a:masterClrMapping/>
-  </p:clrMapOvr>
-  <p:timing>
-    <p:tnLst>
-      <p:par>
-        <p:cTn id="1" dur="indefinite" restart="never" nodeType="tmRoot">
-          <p:childTnLst>
-            <p:seq concurrent="1" nextAc="seek">
-              <p:cTn id="2" dur="indefinite" nodeType="mainSeq">
-                <p:childTnLst>
-                  <p:par>
-                    <p:cTn id="3" fill="hold">
-                      <p:stCondLst>
-                        <p:cond delay="indefinite"/>
-                      </p:stCondLst>
-                      <p:childTnLst>
-                        <p:par>
-                          <p:cTn id="4" fill="hold">
-                            <p:stCondLst>
-                              <p:cond delay="0"/>
-                            </p:stCondLst>
-                            <p:childTnLst>
-                              <p:par>
-                                <p:cTn id="5" presetID="1" presetClass="entr" presetSubtype="0" fill="hold" grpId="0" nodeType="clickEffect">
-                                  <p:stCondLst>
-                                    <p:cond delay="0"/>
-                                  </p:stCondLst>
-                                  <p:childTnLst>
-                                    <p:set>
-                                      <p:cBhvr>
-                                        <p:cTn id="6" dur="1" fill="hold">
-                                          <p:stCondLst>
-                                            <p:cond delay="0"/>
-                                          </p:stCondLst>
-                                        </p:cTn>
-                                        <p:tgtEl>
-                                          <p:spTgt spid="12"/>
-                                        </p:tgtEl>
-                                        <p:attrNameLst>
-                                          <p:attrName>style.visibility</p:attrName>
-                                        </p:attrNameLst>
-                                      </p:cBhvr>
-                                      <p:to>
-                                        <p:strVal val="visible"/>
-                                      </p:to>
-                                    </p:set>
-                                  </p:childTnLst>
-                                </p:cTn>
-                              </p:par>
-                              <p:par>
-                                <p:cTn id="7" presetID="1" presetClass="entr" presetSubtype="0" fill="hold" grpId="0" nodeType="withEffect">
-                                  <p:stCondLst>
-                                    <p:cond delay="0"/>
-                                  </p:stCondLst>
-                                  <p:childTnLst>
-                                    <p:set>
-                                      <p:cBhvr>
-                                        <p:cTn id="8" dur="1" fill="hold">
-                                          <p:stCondLst>
-                                            <p:cond delay="0"/>
-                                          </p:stCondLst>
-                                        </p:cTn>
-                                        <p:tgtEl>
-                                          <p:spTgt spid="13"/>
-                                        </p:tgtEl>
-                                        <p:attrNameLst>
-                                          <p:attrName>style.visibility</p:attrName>
-                                        </p:attrNameLst>
-                                      </p:cBhvr>
-                                      <p:to>
-                                        <p:strVal val="visible"/>
-                                      </p:to>
-                                    </p:set>
-                                  </p:childTnLst>
-                                </p:cTn>
-                              </p:par>
-                              <p:par>
-                                <p:cTn id="9" presetID="1" presetClass="entr" presetSubtype="0" fill="hold" grpId="0" nodeType="withEffect">
-                                  <p:stCondLst>
-                                    <p:cond delay="0"/>
-                                  </p:stCondLst>
-                                  <p:childTnLst>
-                                    <p:set>
-                                      <p:cBhvr>
-                                        <p:cTn id="10" dur="1" fill="hold">
-                                          <p:stCondLst>
-                                            <p:cond delay="0"/>
-                                          </p:stCondLst>
-                                        </p:cTn>
-                                        <p:tgtEl>
-                                          <p:spTgt spid="16"/>
-                                        </p:tgtEl>
-                                        <p:attrNameLst>
-                                          <p:attrName>style.visibility</p:attrName>
-                                        </p:attrNameLst>
-                                      </p:cBhvr>
-                                      <p:to>
-                                        <p:strVal val="visible"/>
-                                      </p:to>
-                                    </p:set>
-                                  </p:childTnLst>
-                                </p:cTn>
-                              </p:par>
-                            </p:childTnLst>
-                          </p:cTn>
-                        </p:par>
-                      </p:childTnLst>
-                    </p:cTn>
-                  </p:par>
-                  <p:par>
-                    <p:cTn id="11" fill="hold">
-                      <p:stCondLst>
-                        <p:cond delay="indefinite"/>
-                      </p:stCondLst>
-                      <p:childTnLst>
-                        <p:par>
-                          <p:cTn id="12" fill="hold">
-                            <p:stCondLst>
-                              <p:cond delay="0"/>
-                            </p:stCondLst>
-                            <p:childTnLst>
-                              <p:par>
-                                <p:cTn id="13" presetID="1" presetClass="entr" presetSubtype="0" fill="hold" grpId="0" nodeType="clickEffect">
-                                  <p:stCondLst>
-                                    <p:cond delay="0"/>
-                                  </p:stCondLst>
-                                  <p:childTnLst>
-                                    <p:set>
-                                      <p:cBhvr>
-                                        <p:cTn id="14" dur="1" fill="hold">
-                                          <p:stCondLst>
-                                            <p:cond delay="0"/>
-                                          </p:stCondLst>
-                                        </p:cTn>
-                                        <p:tgtEl>
-                                          <p:spTgt spid="14"/>
-                                        </p:tgtEl>
-                                        <p:attrNameLst>
-                                          <p:attrName>style.visibility</p:attrName>
-                                        </p:attrNameLst>
-                                      </p:cBhvr>
-                                      <p:to>
-                                        <p:strVal val="visible"/>
-                                      </p:to>
-                                    </p:set>
-                                  </p:childTnLst>
-                                </p:cTn>
-                              </p:par>
-                            </p:childTnLst>
-                          </p:cTn>
-                        </p:par>
-                      </p:childTnLst>
-                    </p:cTn>
-                  </p:par>
-                </p:childTnLst>
-              </p:cTn>
-              <p:prevCondLst>
-                <p:cond evt="onPrev" delay="0">
-                  <p:tgtEl>
-                    <p:sldTgt/>
-                  </p:tgtEl>
-                </p:cond>
-              </p:prevCondLst>
-              <p:nextCondLst>
-                <p:cond evt="onNext" delay="0">
-                  <p:tgtEl>
-                    <p:sldTgt/>
-                  </p:tgtEl>
-                </p:cond>
-              </p:nextCondLst>
-            </p:seq>
-          </p:childTnLst>
-        </p:cTn>
-      </p:par>
-    </p:tnLst>
-    <p:bldLst>
-      <p:bldP spid="12" grpId="0"/>
-      <p:bldP spid="13" grpId="0"/>
-      <p:bldP spid="14" grpId="0"/>
-      <p:bldP spid="16" grpId="0"/>
     </p:bldLst>
   </p:timing>
 </p:sld>
